--- a/downloads/tang-junjian-negotiation-mckinsey-briefing.pptx
+++ b/downloads/tang-junjian-negotiation-mckinsey-briefing.pptx
@@ -517,17 +517,17 @@
           <a:lstStyle/>
           <a:p>
             <a:r>
-              <a:t>① 本頁結論：凡是「我要」但不易從別人那裡要到的事，都需要透過「以己為先、利用理性與非理性、聯手找方案」的談判來解決。</a:t>
-            </a:r>
-          </a:p>
-          <a:p>
-            <a:r>
-              <a:t>② 補充說明：講者湯君健曾任寶潔渠道總監8年（乙方，年合同約10億，原文未載幣別）及大型電商企業大學校長（甲方）。不會談判的人要嘛吵架，要嘛當軟柿子妥協；高手的核心特質則是「可靠」。</a:t>
-            </a:r>
-          </a:p>
-          <a:p>
-            <a:r>
-              <a:t>③ 下一頁轉場：建立基本定義後，下一頁我們用一張架構圖看清整門課「一核心、三層循環、兩道防線」的全局邏輯。</a:t>
+              <a:t>① 本頁結論：凡是商業與職場中「我要、但無法輕易取得」的目標，皆需透過「以己為先、併用理性與非理性、聯手共創」的談判來實現。</a:t>
+            </a:r>
+          </a:p>
+          <a:p>
+            <a:r>
+              <a:t>② 圖表解讀：缺乏談判訓練者常陷入爭吵破局或無端妥協兩個極端；真正的高手給人的核心印象是「可靠」。</a:t>
+            </a:r>
+          </a:p>
+          <a:p>
+            <a:r>
+              <a:t>③ 行動呼籲：請先列出本季 3 項最關鍵的「我要」清單，帶著具體問題進入下一頁的全課戰略架構。</a:t>
             </a:r>
           </a:p>
         </p:txBody>
@@ -597,17 +597,17 @@
           <a:lstStyle/>
           <a:p>
             <a:r>
-              <a:t>① 本頁結論：看似談不下去的僵局正是價值談判的入口——透過「閱讀價值鏈」把顧客等第三方納入三角形，才能把總利潤面積做大。</a:t>
-            </a:r>
-          </a:p>
-          <a:p>
-            <a:r>
-              <a:t>② 補充說明：不管供應商和採購所在的三角形底邊怎麼切分，總面積是不變的；唯有在顧客端做文章（如女性手機專案），餅才會變大。</a:t>
-            </a:r>
-          </a:p>
-          <a:p>
-            <a:r>
-              <a:t>③ 下一頁轉場：但價值談判需要雙方共同投入才能實現，如何把對方拉到你的軌道並說服他背後的整個組織？請看下一頁。</a:t>
+              <a:t>① 本頁結論：當價格與既有條件皆陷入死局時，透過納入第三方（顧客）構成價值鏈三角形，共同做大總利潤額。</a:t>
+            </a:r>
+          </a:p>
+          <a:p>
+            <a:r>
+              <a:t>② 圖表解讀：不管供應商與採購所在的底邊如何切分，三角形面積都不變；唯有把顧客頂點拉高，總利潤面積才會擴大。</a:t>
+            </a:r>
+          </a:p>
+          <a:p>
+            <a:r>
+              <a:t>③ 行動呼籲：構思出做大蛋糕的新方案後，該如何說服對方的組織決策鏈共同投入資源？請看下一頁。</a:t>
             </a:r>
           </a:p>
         </p:txBody>
@@ -677,17 +677,17 @@
           <a:lstStyle/>
           <a:p>
             <a:r>
-              <a:t>① 本頁結論：先提問把方案塞進對方戰略主張裡，再以「數字算清利益、提供A/B/C三選項、精準對接拍板/評估/執行人」完成說服。</a:t>
-            </a:r>
-          </a:p>
-          <a:p>
-            <a:r>
-              <a:t>② 補充說明：給出上中下三策（A投入大見效快、C投入小風險低好掉頭）能把對方的決策心理從「要不要合作」轉為「選哪一個方案」。</a:t>
-            </a:r>
-          </a:p>
-          <a:p>
-            <a:r>
-              <a:t>③ 下一頁轉場：掌握了價格、條件、價值三層打法後，我們進入第5講，修煉立於不敗之地的談判心態與心理戰防禦！</a:t>
+              <a:t>① 本頁結論：先探詢對方戰略以「搭順風車」，再透過量化數據、A/B/C 三選項與決策鏈三角色精準完成組織說服。</a:t>
+            </a:r>
+          </a:p>
+          <a:p>
+            <a:r>
+              <a:t>② 圖表解讀：提供上中下三策能將對方的決策心理從「要不要合作」轉化為「選哪一個方案」。</a:t>
+            </a:r>
+          </a:p>
+          <a:p>
+            <a:r>
+              <a:t>③ 行動呼籲：掌握三層戰術後，最後兩講將築起支撐所有技巧的底層防線：第 5 講「談判心態與心理戰防禦」。</a:t>
             </a:r>
           </a:p>
         </p:txBody>
@@ -757,17 +757,17 @@
           <a:lstStyle/>
           <a:p>
             <a:r>
-              <a:t>① 本頁結論：守住「沒有非成交不可」的離桌底氣，認清「雙贏是結果不是目的」，並以「對事不對人」與「主動喊停」管理情緒。</a:t>
-            </a:r>
-          </a:p>
-          <a:p>
-            <a:r>
-              <a:t>② 補充說明：沒有人規定談判期間不許休息，像打撲克下棋一樣，心態快崩時主動喊停才不會打出負氣牌。</a:t>
-            </a:r>
-          </a:p>
-          <a:p>
-            <a:r>
-              <a:t>③ 下一頁轉場：有了強大心態，當對手使出五大常見心理戰伎倆時，該如何識破並積極防禦？請看下一頁。</a:t>
+              <a:t>① 本頁結論：建立「沒有非成交不可」的離桌底氣，認清「雙贏是結果而非目的」，並以「對事不對人」與「主動喊停」控管情緒。</a:t>
+            </a:r>
+          </a:p>
+          <a:p>
+            <a:r>
+              <a:t>② 圖表解讀：短期無原則妥協換不來長期好關係，只會養成對方的索取慣性。</a:t>
+            </a:r>
+          </a:p>
+          <a:p>
+            <a:r>
+              <a:t>③ 行動呼籲：穩固自身心態後，當對手祭出五種常見心理戰施壓時，該如何一眼識破並反制？請看下一頁。</a:t>
             </a:r>
           </a:p>
         </p:txBody>
@@ -837,17 +837,17 @@
           <a:lstStyle/>
           <a:p>
             <a:r>
-              <a:t>① 本頁結論：學習心理戰是為了「積極防禦」——看穿虛張聲勢、製造負罪感、面子換裡子、底線時間與紅白臉五大伎倆並拉回軌道。</a:t>
-            </a:r>
-          </a:p>
-          <a:p>
-            <a:r>
-              <a:t>② 補充說明：家樂福信條與點破紅白臉話術非常實用，同時請記住團隊談判時雙方出席人數最好對等，氣勢才不會輸。</a:t>
-            </a:r>
-          </a:p>
-          <a:p>
-            <a:r>
-              <a:t>③ 下一頁轉場：有了內在心態防線，下一頁我們進入第6講，學習外在「語言與肢體語言管理」的三句話準則與拒絕公式。</a:t>
+              <a:t>① 本頁結論：面對五大心理戰，只需識破底層演戲邏輯並以標準話術反問或點破，即可將談判拉回正軌。</a:t>
+            </a:r>
+          </a:p>
+          <a:p>
+            <a:r>
+              <a:t>② 圖表解讀：家樂福信條與點破紅白臉話術極具實戰價值，同時應確保團隊談判時雙方出席人數對等。</a:t>
+            </a:r>
+          </a:p>
+          <a:p>
+            <a:r>
+              <a:t>③ 行動呼籲：具備內在心理防線後，外在的語言與肢體該如何精準配合？請看第 6 講。</a:t>
             </a:r>
           </a:p>
         </p:txBody>
@@ -917,17 +917,17 @@
           <a:lstStyle/>
           <a:p>
             <a:r>
-              <a:t>① 本頁結論：以老領導三句話「態度要誠懇、立場要堅定、身段要柔軟」維持中立姿態，確保語言與肢體高度一致。</a:t>
-            </a:r>
-          </a:p>
-          <a:p>
-            <a:r>
-              <a:t>② 補充說明：拒絕公式把「說不」與「繼續談」綁在同一句話裡，立刻解決不好意思拒絕與拒絕後冷場兩大難題。</a:t>
-            </a:r>
-          </a:p>
-          <a:p>
-            <a:r>
-              <a:t>③ 下一頁轉場：六講內容全部學完後，下一頁我們將全課八條橫向因果鏈與大衛雲 MEDDIC 顧問銷售進行跨系統整合。</a:t>
+              <a:t>① 本頁結論：貫徹「態度要誠懇、立場要堅定、身段要柔軟」三柱姿態，確保語言與肢體動作高度一致。</a:t>
+            </a:r>
+          </a:p>
+          <a:p>
+            <a:r>
+              <a:t>② 圖表解讀：標準拒絕公式將「堅守底線（關門）」與「開放協商（指路）」合二為一，完美化解拒絕後的僵局。</a:t>
+            </a:r>
+          </a:p>
+          <a:p>
+            <a:r>
+              <a:t>③ 行動呼籲：完成六講核心內容後，下一頁將全課八條邏輯因果鏈與 B2B 顧問式銷售框架進行整合。</a:t>
             </a:r>
           </a:p>
         </p:txBody>
@@ -997,17 +997,17 @@
           <a:lstStyle/>
           <a:p>
             <a:r>
-              <a:t>① 本頁結論：前段工具是後段心態與話術的地基，將湯君健三層談判與 MEDDIC 結合可形成 B2B 完整商務閉環。</a:t>
-            </a:r>
-          </a:p>
-          <a:p>
-            <a:r>
-              <a:t>② 補充說明：有第2講的機會成本備案，才有第5講的離桌底氣；有第3講的條件分級，才有第6講拒絕公式後半句的指路空間。</a:t>
-            </a:r>
-          </a:p>
-          <a:p>
-            <a:r>
-              <a:t>③ 下一頁轉場：最後一頁，我們把全課精華收斂為一張進場前必填的「談判前一頁紙」與13項待辦行動表！</a:t>
+              <a:t>① 本頁結論：將全課程串聯為八條邏輯因果鏈，並與 B2B 顧問式銷售形成「前段價值控盤、後段議價收官」的完整閉環。</a:t>
+            </a:r>
+          </a:p>
+          <a:p>
+            <a:r>
+              <a:t>② 圖表解讀：沒有前段的機會成本備案與條款三級分類，後段的立場堅定與拒絕公式就會淪為無根之木。</a:t>
+            </a:r>
+          </a:p>
+          <a:p>
+            <a:r>
+              <a:t>③ 行動呼籲：最後一頁，我們將全課所有核心工具收斂為進場前 15 分鐘必填的「談判前一頁紙」。</a:t>
             </a:r>
           </a:p>
         </p:txBody>
@@ -1077,17 +1077,17 @@
           <a:lstStyle/>
           <a:p>
             <a:r>
-              <a:t>① 本頁結論：將全課工具收斂為一頁「談判前一頁紙」，在下一次採購或業主合約談判前花15分鐘填妥即可上場。</a:t>
-            </a:r>
-          </a:p>
-          <a:p>
-            <a:r>
-              <a:t>② 補充說明：好的談判者是利益和尊重兼得的。透過這套系統，我們既能守住「我要」的核心利益，又能與合作夥伴聯手創造更大價值。</a:t>
-            </a:r>
-          </a:p>
-          <a:p>
-            <a:r>
-              <a:t>③ 結語：感謝研習湯君健《有效提升你的談判能力》16頁麥肯錫精華簡報！</a:t>
+              <a:t>① 本頁結論：將全課程六講方法論收斂為進場前 15 分鐘必填的「談判前一頁紙」，在實戰中同時贏得商業利益與對手尊重。</a:t>
+            </a:r>
+          </a:p>
+          <a:p>
+            <a:r>
+              <a:t>② 圖表解讀：五格作戰畫布整合了底線目標、三級條款、假設提問、價值鏈三角形與拒絕公式，可直接印出帶入會議室。</a:t>
+            </a:r>
+          </a:p>
+          <a:p>
+            <a:r>
+              <a:t>③ 結語：恭喜完成湯君健《有效提升你的談判能力》16 頁麥肯錫精華簡報研習！</a:t>
             </a:r>
           </a:p>
         </p:txBody>
@@ -1157,17 +1157,17 @@
           <a:lstStyle/>
           <a:p>
             <a:r>
-              <a:t>① 本頁結論：全課濃縮為「一核心、三層循環、兩道防線」，價格、條件、價值三層是循環而非單向。</a:t>
-            </a:r>
-          </a:p>
-          <a:p>
-            <a:r>
-              <a:t>② 補充說明：當價格卡死時主動切換到條件層，條件到頭時升級到價值層把餅做大，做大後仍要回到價格分配（#002 明載）。</a:t>
-            </a:r>
-          </a:p>
-          <a:p>
-            <a:r>
-              <a:t>③ 下一頁轉場：掌握全課骨架後，我們進入第1講，從「兩個小孩分橘子」看懂表面訴求與真實需求的差異。</a:t>
+              <a:t>① 本頁結論：全課程濃縮為「一核心、三層循環、兩道防線」架構，四個作戰階段在各層皆有對應工具。</a:t>
+            </a:r>
+          </a:p>
+          <a:p>
+            <a:r>
+              <a:t>② 圖表解讀：當價格卡死時主動切換至條件層，條款耗盡時升級至價值層把餅做大，做大後仍須回歸價格層完成分配。</a:t>
+            </a:r>
+          </a:p>
+          <a:p>
+            <a:r>
+              <a:t>③ 行動呼籲：掌握全局藍圖後，下一頁進入第 1 講「正確認識談判」。</a:t>
             </a:r>
           </a:p>
         </p:txBody>
@@ -1237,17 +1237,17 @@
           <a:lstStyle/>
           <a:p>
             <a:r>
-              <a:t>① 本頁結論：談判三要點是「以自己目的為先、利用理性與非理性、聯手找方案」，核心是看穿表面立場背後的橘子皮真實需求。</a:t>
-            </a:r>
-          </a:p>
-          <a:p>
-            <a:r>
-              <a:t>② 補充說明：連「靠牆而非靠門的座位能給對方強烈壓迫感」都列入講者的談判前清單，證明非理性氣場管理極為關鍵。</a:t>
-            </a:r>
-          </a:p>
-          <a:p>
-            <a:r>
-              <a:t>③ 下一頁轉場：理解三要點後，下一頁我們看如何將任何複雜談判拆解為三種基本模型並靈活切換。</a:t>
+              <a:t>① 本頁結論：談判三大要點為「以己方目的為先、併用理性與非理性、聯手找方案」，核心在於穿透表面訴求挖掘真實需求。</a:t>
+            </a:r>
+          </a:p>
+          <a:p>
+            <a:r>
+              <a:t>② 圖表解讀：分橘子案例證明，表面看似零和的數量爭奪，只要挖出果皮與果肉的真實需求即可化為雙贏。</a:t>
+            </a:r>
+          </a:p>
+          <a:p>
+            <a:r>
+              <a:t>③ 行動呼籲：從下一場商務會談起，請將 7 項會前準備清單納入標準流程。</a:t>
             </a:r>
           </a:p>
         </p:txBody>
@@ -1317,17 +1317,17 @@
           <a:lstStyle/>
           <a:p>
             <a:r>
-              <a:t>① 本頁結論：再複雜的談判都能拆解為價格、條件、價值三種模型，卡在價格時應主動切換至條件或價值層。</a:t>
-            </a:r>
-          </a:p>
-          <a:p>
-            <a:r>
-              <a:t>② 補充說明：用談判解決問題，不靠命令、祈求或情感綁架。文末附錄美國國務院外交官13項標準亦印證談判需要定量分析、冷靜與合作等綜合能力。</a:t>
-            </a:r>
-          </a:p>
-          <a:p>
-            <a:r>
-              <a:t>③ 下一頁轉場：接下來第2講，我們深入拆解第一層模型——最考驗基本功的「價格類談判」。</a:t>
+              <a:t>① 本頁結論：任何複雜談判皆可拆解為價格、條件、價值三種模型，卡在單價時應果斷推向條件交換或價值共創。</a:t>
+            </a:r>
+          </a:p>
+          <a:p>
+            <a:r>
+              <a:t>② 圖表解讀：引導孩子看電視的三層次案例，清楚展示了從零和折衷到條件交換、再到創造教育新價值的升級路徑。</a:t>
+            </a:r>
+          </a:p>
+          <a:p>
+            <a:r>
+              <a:t>③ 行動呼籲：接下來第 2 講，我們深入剖析第一層模型——鍛鍊所有談判基本功的「價格類談判」。</a:t>
             </a:r>
           </a:p>
         </p:txBody>
@@ -1397,17 +1397,17 @@
           <a:lstStyle/>
           <a:p>
             <a:r>
-              <a:t>① 本頁結論：價格談判進場前須定出底線（機會成本）與目標價（市場尺子），並拆解供應鏈成本做到真正懂行。</a:t>
-            </a:r>
-          </a:p>
-          <a:p>
-            <a:r>
-              <a:t>② 補充說明：底線用機會成本定義，意味著「多備一家報價」本身就是談判籌碼。紅酒採購案例證明，把成本事實擺在桌上，供應商就不敢再拿虛高價忽悠。</a:t>
-            </a:r>
-          </a:p>
-          <a:p>
-            <a:r>
-              <a:t>③ 下一頁轉場：準備充分後走上談判桌，該由誰先報價？報完價後最重要的一個動作是什麼？請看下一頁。</a:t>
+              <a:t>① 本頁結論：價格談判的勝負有七成取決於會前準備：以機會成本定底線、以市場尺子定目標，並拆解成本做到真正懂行。</a:t>
+            </a:r>
+          </a:p>
+          <a:p>
+            <a:r>
+              <a:t>② 圖表解讀：底線以機會成本定義，證明「多備一家報價」本身就能直接提升談判籌碼。</a:t>
+            </a:r>
+          </a:p>
+          <a:p>
+            <a:r>
+              <a:t>③ 行動呼籲：完成準備坐上談判桌後，該由誰先報價？報完價後該做什麼？請看下一頁。</a:t>
             </a:r>
           </a:p>
         </p:txBody>
@@ -1477,17 +1477,17 @@
           <a:lstStyle/>
           <a:p>
             <a:r>
-              <a:t>① 本頁結論：依資訊對稱度決定誰先報價，靈活運用高報價或合理報價，並嚴格執行「報價前講理由、報完價立刻閉嘴」。</a:t>
-            </a:r>
-          </a:p>
-          <a:p>
-            <a:r>
-              <a:t>② 補充說明：五星級酒店會議室若底線5萬卻直接給採購經理報5萬實價，等對方採購總監親自打電話來要面子時就會陷入絕境。報完價立刻閉嘴則能避免暴露心虛。</a:t>
-            </a:r>
-          </a:p>
-          <a:p>
-            <a:r>
-              <a:t>③ 下一頁轉場：報完價進入來回還價階段，當對方威脅「不降價就不談了」，如何判讀真偽並正確讓步？請看下一頁。</a:t>
+              <a:t>① 本頁結論：依資訊對稱度決定先後手，依合作關係選用高報價或合理報價，並嚴守「報價前講理由、報完價立刻閉嘴」。</a:t>
+            </a:r>
+          </a:p>
+          <a:p>
+            <a:r>
+              <a:t>② 圖表解讀：把所有支撐理由放在報出數字前講完；報出價格後的沉默能給對手最大心理壓力。</a:t>
+            </a:r>
+          </a:p>
+          <a:p>
+            <a:r>
+              <a:t>③ 行動呼籲：進入還價拉鋸時，對手常祭出「不降價就不談了」的離桌威脅，下一頁解析如何識破真偽並執行遞減讓步。</a:t>
             </a:r>
           </a:p>
         </p:txBody>
@@ -1557,17 +1557,17 @@
           <a:lstStyle/>
           <a:p>
             <a:r>
-              <a:t>① 本頁結論：從「具體使用場景的非硬傷挑刺」識破假離桌威脅，並在收尾時做幅度遞減的不情願讓步者。</a:t>
-            </a:r>
-          </a:p>
-          <a:p>
-            <a:r>
-              <a:t>② 補充說明：真正想離開談判桌的人根本懶得費口舌挑刺，常一言不發走人；會嫌房間擺床擠的人心裡已經想買了。讓步若先讓50再讓80，會讓對方得寸進尺。</a:t>
-            </a:r>
-          </a:p>
-          <a:p>
-            <a:r>
-              <a:t>③ 下一頁轉場：當價格空間用盡仍無法成交時，就該啟動第3講「條件類談判」，用多條款交換破局！</a:t>
+              <a:t>① 本頁結論：從「具體使用場景挑刺」識破假離桌威脅，並嚴守「不一步到位、不情願、幅度遞減」三大讓步紀律。</a:t>
+            </a:r>
+          </a:p>
+          <a:p>
+            <a:r>
+              <a:t>② 圖表解讀：真正準備放棄交易的人懶得耗費口舌挑刺；會帶入擺床、乘坐場景的人內心早已準備成交。</a:t>
+            </a:r>
+          </a:p>
+          <a:p>
+            <a:r>
+              <a:t>③ 行動呼籲：當價格讓至底線仍無法成交時，應立即切換至第 3 講「條件類談判」，以多維條款交換破局。</a:t>
             </a:r>
           </a:p>
         </p:txBody>
@@ -1637,17 +1637,17 @@
           <a:lstStyle/>
           <a:p>
             <a:r>
-              <a:t>① 本頁結論：把所有可談條款列成清單並分為主要、次要、底線三級，再透過中層吹風會、需求排序題與假設性問題摸清對方優先序。</a:t>
-            </a:r>
-          </a:p>
-          <a:p>
-            <a:r>
-              <a:t>② 補充說明：條款列得多就好比價格開得高，次要目標全是你保護主要目標的彈藥。問假設性二選一問題比直接問更能試出真話。</a:t>
-            </a:r>
-          </a:p>
-          <a:p>
-            <a:r>
-              <a:t>③ 下一頁轉場：摸清雙方條件優先序後，如何找到「最佳可替代方案」並落實條件讓步三原則？請看下一頁。</a:t>
+              <a:t>① 本頁結論：將所有可談條款列成清單並分為主要、次要、底線三級，再透過吹風會與假設性提問摸清對方真實優先序。</a:t>
+            </a:r>
+          </a:p>
+          <a:p>
+            <a:r>
+              <a:t>② 圖表解讀：二選一假設性問題能穿透對方的客套防線，讓其選擇直接暴露真實價值權重。</a:t>
+            </a:r>
+          </a:p>
+          <a:p>
+            <a:r>
+              <a:t>③ 行動呼籲：摸清雙方條件優先序後，如何找到「最佳可替代方案」並執行條件交換？請看下一頁。</a:t>
             </a:r>
           </a:p>
         </p:txBody>
@@ -1717,17 +1717,17 @@
           <a:lstStyle/>
           <a:p>
             <a:r>
-              <a:t>① 本頁結論：挖掘對方苛刻條件背後的真實顧慮以提出最佳可替代方案，並嚴守「讓次要、不情願、條件換條件」三原則。</a:t>
-            </a:r>
-          </a:p>
-          <a:p>
-            <a:r>
-              <a:t>② 補充說明：房東逼你付三押三時，提出「換新空調」作為緩衝地帶，對方要嘛答應換空調，要嘛撤回押三要求，不會繼續得寸進尺。</a:t>
-            </a:r>
-          </a:p>
-          <a:p>
-            <a:r>
-              <a:t>③ 下一頁轉場：如果連條件都交換到盡頭、預算與底價仍無法匹配怎麼辦？我們進入第4講「價值類談判」！</a:t>
+              <a:t>① 本頁結論：挖掘苛刻條件背後的真實顧慮以設計最佳可替代方案，並嚴守「讓次要、不情願、條件換條件」三原則。</a:t>
+            </a:r>
+          </a:p>
+          <a:p>
+            <a:r>
+              <a:t>② 圖表解讀：「換新空調」即防禦緩衝帶——迫使對方在承擔新成本與撤回原要求之間二選一。</a:t>
+            </a:r>
+          </a:p>
+          <a:p>
+            <a:r>
+              <a:t>③ 行動呼籲：當既有條款全部交換完畢仍無交集時，就必須啟動第 4 講高階破局武器——「價值類談判」。</a:t>
             </a:r>
           </a:p>
         </p:txBody>
@@ -4893,7 +4893,7 @@
               </a:defRPr>
             </a:pPr>
             <a:r>
-              <a:t>SLIDE 01 / 16 ｜ 發刊詞：核心定義與高手特質 (#001)</a:t>
+              <a:t>SLIDE 01 / 16 ｜ LEVEL 1 入門基礎 ｜ 發刊詞：核心定義與專家特質</a:t>
             </a:r>
           </a:p>
           <a:p>
@@ -4906,7 +4906,7 @@
               </a:defRPr>
             </a:pPr>
             <a:r>
-              <a:t>談判是幫你解決「我要」的問題：利用決策中的理性與非理性因素，以己方目的為先並聯手共創方案</a:t>
+              <a:t>談判是幫你解決「我要」的問題：運用決策中的理性與非理性因素，以己方目標為先並與對手聯手共創方案</a:t>
             </a:r>
           </a:p>
         </p:txBody>
@@ -4987,7 +4987,7 @@
               </a:defRPr>
             </a:pPr>
             <a:r>
-              <a:t>▪ 凡是「我要」但難要到的皆屬談判</a:t>
+              <a:t>▪ 核心定位：凡是「我要」皆屬談判</a:t>
             </a:r>
           </a:p>
           <a:p>
@@ -5000,7 +5000,7 @@
               </a:defRPr>
             </a:pPr>
             <a:r>
-              <a:t>買車想便宜1萬、賣房想多10萬、加薪20%、讓孩子放下手機睡覺。不會談判有兩種失敗模式：①衝突升級吵架；②怕衝突當軟柿子無端妥協。</a:t>
+              <a:t>從購車議價、房產交易、職場談薪到跨部門資源爭取——凡是「我要」但無法輕易取得的目標皆屬談判。缺乏談判力易陷入兩極誤區：①衝突升級破局；②懼怕衝突淪為「軟柿子」。</a:t>
             </a:r>
           </a:p>
         </p:txBody>
@@ -5081,7 +5081,7 @@
               </a:defRPr>
             </a:pPr>
             <a:r>
-              <a:t>▪ 湯君健談判定義（三組關鍵詞）</a:t>
+              <a:t>▪ 標準定義：談判三大核心要素</a:t>
             </a:r>
           </a:p>
           <a:p>
@@ -5094,7 +5094,7 @@
               </a:defRPr>
             </a:pPr>
             <a:r>
-              <a:t>① 利用人決策中的【理性與非理性因素】；② 堅持【以自己的目的為先】（多數無欲無求是不知如何主張）；③ 和對方【聯手找到解決方案】。</a:t>
+              <a:t>① 同時運用決策中的【理性與非理性因素】；② 堅守【以己方目標（我要）為先】；③ 與對手【聯手找到解決方案】。</a:t>
             </a:r>
           </a:p>
         </p:txBody>
@@ -5175,7 +5175,7 @@
               </a:defRPr>
             </a:pPr>
             <a:r>
-              <a:t>▪ 高手特質是「可靠」× 甲乙方雙棲經驗</a:t>
+              <a:t>▪ 專家畫像：「可靠」特質 × 甲乙方視角</a:t>
             </a:r>
           </a:p>
           <a:p>
@@ -5188,7 +5188,7 @@
               </a:defRPr>
             </a:pPr>
             <a:r>
-              <a:t>高手非伶牙俐齒，而是原則強、守信、找方案不抱怨、換位思考。講者具寶潔8年渠道總監（乙方年簽10億）與大型電商企業大學校長（甲方）經驗。</a:t>
+              <a:t>頂尖談判者非咄咄逼人，而是「可靠」（守原則、重信譽、找方案、換位思考）。作者兼具寶潔8年渠道總監（乙方，年談判規模10億級）與電商企業大學校長（甲方）實戰經驗。</a:t>
             </a:r>
           </a:p>
         </p:txBody>
@@ -5256,7 +5256,7 @@
                         </a:defRPr>
                       </a:pPr>
                       <a:r>
-                        <a:t>不會談判的常見誤區</a:t>
+                        <a:t>新手常見誤區（入門避坑）</a:t>
                       </a:r>
                     </a:p>
                   </a:txBody>
@@ -5280,7 +5280,7 @@
                         </a:defRPr>
                       </a:pPr>
                       <a:r>
-                        <a:t>湯君健實戰談判定義</a:t>
+                        <a:t>專家標準法則（核心機制）</a:t>
                       </a:r>
                     </a:p>
                   </a:txBody>
@@ -5304,7 +5304,7 @@
                         </a:defRPr>
                       </a:pPr>
                       <a:r>
-                        <a:t>David 實戰落地行動 (#001)</a:t>
+                        <a:t>進階商務實戰行動指標</a:t>
                       </a:r>
                     </a:p>
                   </a:txBody>
@@ -5354,7 +5354,7 @@
                         </a:defRPr>
                       </a:pPr>
                       <a:r>
-                        <a:t>唇槍舌劍辯論，或怕衝突當軟柿子</a:t>
+                        <a:t>視為口才辯論賽，或怕衝突無端退讓</a:t>
                       </a:r>
                     </a:p>
                   </a:txBody>
@@ -5378,7 +5378,7 @@
                         </a:defRPr>
                       </a:pPr>
                       <a:r>
-                        <a:t>以自己目的為先 × 聯手找解決方案</a:t>
+                        <a:t>以己方目的為先 × 聯手設計解決方案</a:t>
                       </a:r>
                     </a:p>
                   </a:txBody>
@@ -5402,7 +5402,7 @@
                         </a:defRPr>
                       </a:pPr>
                       <a:r>
-                        <a:t>列出本季 3 件「我要但不易要到」事項</a:t>
+                        <a:t>進場前書面確立不可動搖的「我要」目標</a:t>
                       </a:r>
                     </a:p>
                   </a:txBody>
@@ -5428,7 +5428,7 @@
                         </a:defRPr>
                       </a:pPr>
                       <a:r>
-                        <a:t>決策因素</a:t>
+                        <a:t>決策驅動因素</a:t>
                       </a:r>
                     </a:p>
                   </a:txBody>
@@ -5452,7 +5452,7 @@
                         </a:defRPr>
                       </a:pPr>
                       <a:r>
-                        <a:t>只靠算計砍價，或只靠打感情牌</a:t>
+                        <a:t>單靠價格砍殺，或單憑人情關係擺平</a:t>
                       </a:r>
                     </a:p>
                   </a:txBody>
@@ -5476,7 +5476,7 @@
                         </a:defRPr>
                       </a:pPr>
                       <a:r>
-                        <a:t>同時運用理性（數據）與非理性（氣場）</a:t>
+                        <a:t>併用理性（數據/利益）與非理性（情感/氣場）</a:t>
                       </a:r>
                     </a:p>
                   </a:txBody>
@@ -5500,7 +5500,7 @@
                         </a:defRPr>
                       </a:pPr>
                       <a:r>
-                        <a:t>涵蓋客戶、供應商、內部各一項練習標的</a:t>
+                        <a:t>同步準備客觀成本數據與會議氣場設計</a:t>
                       </a:r>
                     </a:p>
                   </a:txBody>
@@ -5526,7 +5526,7 @@
                         </a:defRPr>
                       </a:pPr>
                       <a:r>
-                        <a:t>高手形象</a:t>
+                        <a:t>專家核心形象</a:t>
                       </a:r>
                     </a:p>
                   </a:txBody>
@@ -5550,7 +5550,7 @@
                         </a:defRPr>
                       </a:pPr>
                       <a:r>
-                        <a:t>咄咄逼人、能言善道</a:t>
+                        <a:t>伶牙俐齒、強勢壓人</a:t>
                       </a:r>
                     </a:p>
                   </a:txBody>
@@ -5574,7 +5574,7 @@
                         </a:defRPr>
                       </a:pPr>
                       <a:r>
-                        <a:t>「可靠」：原則性強、守信、換位思考</a:t>
+                        <a:t>「可靠」：原則性強、守信、專注解決問題</a:t>
                       </a:r>
                     </a:p>
                   </a:txBody>
@@ -5598,7 +5598,7 @@
                         </a:defRPr>
                       </a:pPr>
                       <a:r>
-                        <a:t>將信譽作為長期談判的核心資產</a:t>
+                        <a:t>列出本季 3 項「我要」目標作為演練標的</a:t>
                       </a:r>
                     </a:p>
                   </a:txBody>
@@ -5644,7 +5644,7 @@
               </a:defRPr>
             </a:pPr>
             <a:r>
-              <a:t>大衛雲 2.0 談判協商知識庫 (A2.6.4) ｜ COURSE #001 湯君健《有效提升你的談判能力》 ｜ McKinsey Executive Briefing • Slide 1 of 16</a:t>
+              <a:t>商務談判協商知識庫 ｜ COURSE #001 湯君健《有效提升你的談判能力》 ｜ McKinsey Executive Briefing Standard • Slide 1 of 16</a:t>
             </a:r>
           </a:p>
         </p:txBody>
@@ -5827,7 +5827,7 @@
               </a:defRPr>
             </a:pPr>
             <a:r>
-              <a:t>SLIDE 10 / 16 ｜ 第 4 講（上）價值類談判：閱讀價值鏈與把餅做大 (#005)</a:t>
+              <a:t>SLIDE 10 / 16 ｜ LEVEL 3 高階破局 ｜ 第 4 講（上）價值鏈三角形與增量破局</a:t>
             </a:r>
           </a:p>
           <a:p>
@@ -5840,7 +5840,7 @@
               </a:defRPr>
             </a:pPr>
             <a:r>
-              <a:t>第 4 講（上）僵局往往是價值談判的入口：跳出零和底邊博弈，將第三方（顧客）納入價值鏈三角形以做大利潤總面積</a:t>
+              <a:t>第 4 講（上）僵局是價值談判的最佳入口：跳出雙邊零和底邊，將第三方（顧客）納入價值鏈三角形以擴大總利潤面積</a:t>
             </a:r>
           </a:p>
         </p:txBody>
@@ -5921,7 +5921,7 @@
               </a:defRPr>
             </a:pPr>
             <a:r>
-              <a:t>▪ 國產手機採購破局：要利潤額而非好看利潤率</a:t>
+              <a:t>▪ 商業本質洞察：追求總「利潤額」而非帳面「利潤率」</a:t>
             </a:r>
           </a:p>
           <a:p>
@@ -5934,7 +5934,7 @@
               </a:defRPr>
             </a:pPr>
             <a:r>
-              <a:t>電商採購與手機廠為每台10元價差（要求與京東同進價）僵持一上午。湯君健點醒：做生意要的是總【利潤額】而非利潤率；我方網站女性顧客居多（京東男性多），應改談女性手機！</a:t>
+              <a:t>電商採購與手機廠為每台 10 元價差僵持一上午。湯君健點出：商業經營要的是總【利潤額】而非好看的【利潤率】；洞察我方平台女性顧客居多，應改談女性專屬手機！</a:t>
             </a:r>
           </a:p>
         </p:txBody>
@@ -6015,7 +6015,7 @@
               </a:defRPr>
             </a:pPr>
             <a:r>
-              <a:t>▪ 共創女性手機專項：銷量與利潤雙創紀錄</a:t>
+              <a:t>▪ 共創女性專機專案：銷量與總利潤額雙創紀錄</a:t>
             </a:r>
           </a:p>
           <a:p>
@@ -6028,7 +6028,7 @@
               </a:defRPr>
             </a:pPr>
             <a:r>
-              <a:t>手機廠拿出僅線下銷售的女性手機；電商提供空前流量支持、策劃女性購物節、把冰冷參數頁改為生動感性展示頁，讓雙方都拿到遠超預期的成果。</a:t>
+              <a:t>手機廠導入線下女性專屬手機；電商平台投入流量支持、策劃女性購物節、將冰冷參數頁改為感性視覺頁面，創造遠超預期的雙贏成果。</a:t>
             </a:r>
           </a:p>
         </p:txBody>
@@ -6109,7 +6109,7 @@
               </a:defRPr>
             </a:pPr>
             <a:r>
-              <a:t>▪ 閱讀價值鏈三角形模型 ＆ 求職談薪應用</a:t>
+              <a:t>▪ 價值鏈三角形模型 ＆ 高階談薪破局</a:t>
             </a:r>
           </a:p>
           <a:p>
@@ -6122,7 +6122,7 @@
               </a:defRPr>
             </a:pPr>
             <a:r>
-              <a:t>「供應商—採購—顧客」構成三角形，面積＝利潤空間。底邊怎麼分面積不變，唯有在【顧客頂點】做文章（新品、高毛利品、減缺貨損失）才能把餅做大。求職30萬vs25萬亦可改談新價值換職責權限。</a:t>
+              <a:t>「供應商—採購方—終端顧客」構成三角形，面積即總利潤空間。底邊零和博弈面積不變，唯有在【顧客頂點】做文章才能把餅做大。求職談薪卡關亦可改談新業務價值換取權限。</a:t>
             </a:r>
           </a:p>
         </p:txBody>
@@ -6190,7 +6190,7 @@
                         </a:defRPr>
                       </a:pPr>
                       <a:r>
-                        <a:t>零和價格博弈（三角形底邊爭奪）</a:t>
+                        <a:t>傳統零和博弈（底邊爭奪）</a:t>
                       </a:r>
                     </a:p>
                   </a:txBody>
@@ -6214,7 +6214,7 @@
                         </a:defRPr>
                       </a:pPr>
                       <a:r>
-                        <a:t>價值類談判（三角形顧客頂點擴張）</a:t>
+                        <a:t>價值鏈三角形共創（頂點擴張）</a:t>
                       </a:r>
                     </a:p>
                   </a:txBody>
@@ -6238,7 +6238,7 @@
                         </a:defRPr>
                       </a:pPr>
                       <a:r>
-                        <a:t>David 實戰落地行動 (#005)</a:t>
+                        <a:t>進階商務實戰行動指標</a:t>
                       </a:r>
                     </a:p>
                   </a:txBody>
@@ -6264,7 +6264,7 @@
                         </a:defRPr>
                       </a:pPr>
                       <a:r>
-                        <a:t>核心目標</a:t>
+                        <a:t>財務核心指標</a:t>
                       </a:r>
                     </a:p>
                   </a:txBody>
@@ -6288,7 +6288,7 @@
                         </a:defRPr>
                       </a:pPr>
                       <a:r>
-                        <a:t>死磕每台 10 元價差、追求帳面利潤率</a:t>
+                        <a:t>執著於單價折扣與帳面好看的「毛利率」</a:t>
                       </a:r>
                     </a:p>
                   </a:txBody>
@@ -6312,7 +6312,7 @@
                         </a:defRPr>
                       </a:pPr>
                       <a:r>
-                        <a:t>共同做大總【利潤額】（三角形總面積）</a:t>
+                        <a:t>聚焦雙方共享之絕對「總利潤額」與市場增量</a:t>
                       </a:r>
                     </a:p>
                   </a:txBody>
@@ -6336,7 +6336,7 @@
                         </a:defRPr>
                       </a:pPr>
                       <a:r>
-                        <a:t>挑一個卡在價格的業主或合作案畫出完整價值鏈</a:t>
+                        <a:t>單價觸底時，立即轉向試算總銷量提升之絕對金額</a:t>
                       </a:r>
                     </a:p>
                   </a:txBody>
@@ -6362,7 +6362,7 @@
                         </a:defRPr>
                       </a:pPr>
                       <a:r>
-                        <a:t>視野格局</a:t>
+                        <a:t>視野與參與方</a:t>
                       </a:r>
                     </a:p>
                   </a:txBody>
@@ -6386,7 +6386,7 @@
                         </a:defRPr>
                       </a:pPr>
                       <a:r>
-                        <a:t>僅看「供應商—採購」二元對立</a:t>
+                        <a:t>僅限談判桌上的買賣雙方（甲方 vs 乙方）</a:t>
                       </a:r>
                     </a:p>
                   </a:txBody>
@@ -6410,7 +6410,7 @@
                         </a:defRPr>
                       </a:pPr>
                       <a:r>
-                        <a:t>閱讀價值鏈，將第三方【顧客】納入頂點</a:t>
+                        <a:t>納入價值鏈第三方（終端顧客／下游客戶）需求</a:t>
                       </a:r>
                     </a:p>
                   </a:txBody>
@@ -6434,7 +6434,7 @@
                         </a:defRPr>
                       </a:pPr>
                       <a:r>
-                        <a:t>將終端用電戶、台電電網、綠色金融機構納入價值鏈</a:t>
+                        <a:t>分析共同服務之終端客群特徵，聯合開發高溢價方案</a:t>
                       </a:r>
                     </a:p>
                   </a:txBody>
@@ -6460,7 +6460,7 @@
                         </a:defRPr>
                       </a:pPr>
                       <a:r>
-                        <a:t>資源投入</a:t>
+                        <a:t>資源投入方式</a:t>
                       </a:r>
                     </a:p>
                   </a:txBody>
@@ -6484,7 +6484,7 @@
                         </a:defRPr>
                       </a:pPr>
                       <a:r>
-                        <a:t>單方割肉讓利</a:t>
+                        <a:t>零和索取，要求對方單方面讓利</a:t>
                       </a:r>
                     </a:p>
                   </a:txBody>
@@ -6508,7 +6508,7 @@
                         </a:defRPr>
                       </a:pPr>
                       <a:r>
-                        <a:t>雙方共同投入（線下女性機＋流量購物節改網頁）</a:t>
+                        <a:t>雙方共同投入互補資源（產品線 × 流量與行銷）</a:t>
                       </a:r>
                     </a:p>
                   </a:txBody>
@@ -6532,7 +6532,7 @@
                         </a:defRPr>
                       </a:pPr>
                       <a:r>
-                        <a:t>列出 1 個可把餅做大的價值創造點並粗算增量數字</a:t>
+                        <a:t>挑選一項卡關合作案，繪製含第三方的價值鏈三角形</a:t>
                       </a:r>
                     </a:p>
                   </a:txBody>
@@ -6578,7 +6578,7 @@
               </a:defRPr>
             </a:pPr>
             <a:r>
-              <a:t>大衛雲 2.0 談判協商知識庫 (A2.6.4) ｜ COURSE #001 湯君健《有效提升你的談判能力》 ｜ McKinsey Executive Briefing • Slide 10 of 16</a:t>
+              <a:t>商務談判協商知識庫 ｜ COURSE #001 湯君健《有效提升你的談判能力》 ｜ McKinsey Executive Briefing Standard • Slide 10 of 16</a:t>
             </a:r>
           </a:p>
         </p:txBody>
@@ -6761,7 +6761,7 @@
               </a:defRPr>
             </a:pPr>
             <a:r>
-              <a:t>SLIDE 11 / 16 ｜ 第 4 講（下）控制關注點與說服決策鏈三角色 (#005)</a:t>
+              <a:t>SLIDE 11 / 16 ｜ LEVEL 3 高階破局 ｜ 第 4 講（下）順風車提案與決策三角色</a:t>
             </a:r>
           </a:p>
           <a:p>
@@ -6774,7 +6774,7 @@
               </a:defRPr>
             </a:pPr>
             <a:r>
-              <a:t>第 4 講（下）把你的方案塞進對方的主張裡：以「數字說話、ABC三選項、精準對應拍板／評估／執行人」攻克複雜組織決策</a:t>
+              <a:t>第 4 講（下）把己方方案「塞進對方的主張裡」：以量化數據、A/B/C 三選項與決策鏈三角色精準攻克組織決策</a:t>
             </a:r>
           </a:p>
         </p:txBody>
@@ -6855,7 +6855,7 @@
               </a:defRPr>
             </a:pPr>
             <a:r>
-              <a:t>▪ 控制關注點：把你的方案塞進對方的主張裡</a:t>
+              <a:t>▪ 順風車法則：將己方方案「塞進對方的主張裡」</a:t>
             </a:r>
           </a:p>
           <a:p>
@@ -6868,7 +6868,7 @@
               </a:defRPr>
             </a:pPr>
             <a:r>
-              <a:t>即便方案是你提的，也要讓對方覺得是共同方案。先多問問題：「關於未來生意你怎麼規劃？」一旦對方說今年戰略是新品新店新渠道，立刻把你的新品塞進他的主張裡搭順風車。</a:t>
+              <a:t>先詢問對方年度戰略與未來規劃；當對方表示今年重點為「新品、新店、新渠道」時，立即將我方提案包裝為實踐其戰略的最佳載體，轉化為「共同方案」。</a:t>
             </a:r>
           </a:p>
         </p:txBody>
@@ -6949,7 +6949,7 @@
               </a:defRPr>
             </a:pPr>
             <a:r>
-              <a:t>▪ 說服要點 ① 數字說話 ＋ ② 給出 A/B/C 選擇</a:t>
+              <a:t>▪ 說服關鍵 ① 嚴謹數據量化 ＋ ② A/B/C 三套選項</a:t>
             </a:r>
           </a:p>
           <a:p>
@@ -6962,7 +6962,7 @@
               </a:defRPr>
             </a:pPr>
             <a:r>
-              <a:t>① 所有推理假設須有嚴謹數字支撐，把利益算出來。② 只給1個方案對方只能選同意或不同意；拆成方案A（上策：投入大見效快）、B、C（下策：投入小見效慢風險低好掉頭）主動剖析利弊。</a:t>
+              <a:t>① 所有效益推論須有嚴謹數據支撐。② 拆解為方案 A（上策：投入大見效快）、方案 B（穩健）、方案 C（下策：投入小風險低好掉頭），主動剖析利弊引導做選擇題。</a:t>
             </a:r>
           </a:p>
         </p:txBody>
@@ -7043,7 +7043,7 @@
               </a:defRPr>
             </a:pPr>
             <a:r>
-              <a:t>▪ 說服要點 ③ 有的放矢找對人（組織三角色）</a:t>
+              <a:t>▪ 說服關鍵 ③ 精準擊破組織決策鏈三大角色</a:t>
             </a:r>
           </a:p>
           <a:p>
@@ -7056,7 +7056,7 @@
               </a:defRPr>
             </a:pPr>
             <a:r>
-              <a:t>價值談判須說服整個組織：① 拍板人（總經理）：看大方向、品牌、總利潤，不講細節；② 評估人（CFO/業務骨幹）：看數據與例子準確性；③ 執行人（對接者）：看是否簡單易行。</a:t>
+              <a:t>① 拍板人（總經理）：關注大方向、品牌與總利潤，忌講細節；② 評估人（CFO/業務骨幹）：關注數據準確性與邏輯；③ 執行人（對接窗口）：關注流程是否簡單易行。</a:t>
             </a:r>
           </a:p>
         </p:txBody>
@@ -7100,7 +7100,7 @@
                         </a:defRPr>
                       </a:pPr>
                       <a:r>
-                        <a:t>組織決策鏈角色</a:t>
+                        <a:t>組織決策角色</a:t>
                       </a:r>
                     </a:p>
                   </a:txBody>
@@ -7124,7 +7124,7 @@
                         </a:defRPr>
                       </a:pPr>
                       <a:r>
-                        <a:t>典型職位</a:t>
+                        <a:t>核心決策關注點</a:t>
                       </a:r>
                     </a:p>
                   </a:txBody>
@@ -7148,7 +7148,7 @@
                         </a:defRPr>
                       </a:pPr>
                       <a:r>
-                        <a:t>核心關注焦點</a:t>
+                        <a:t>常見溝通失敗原因（入門避坑）</a:t>
                       </a:r>
                     </a:p>
                   </a:txBody>
@@ -7172,7 +7172,7 @@
                         </a:defRPr>
                       </a:pPr>
                       <a:r>
-                        <a:t>說服策略與方案 A/B/C 配置 (#005)</a:t>
+                        <a:t>進階定制化說帖與行動指標</a:t>
                       </a:r>
                     </a:p>
                   </a:txBody>
@@ -7198,7 +7198,7 @@
                         </a:defRPr>
                       </a:pPr>
                       <a:r>
-                        <a:t>1. 拍板人</a:t>
+                        <a:t>1. 拍板人 (總經理)</a:t>
                       </a:r>
                     </a:p>
                   </a:txBody>
@@ -7222,7 +7222,7 @@
                         </a:defRPr>
                       </a:pPr>
                       <a:r>
-                        <a:t>企業負責人、總經理</a:t>
+                        <a:t>企業戰略方向、品牌影響力、總利潤額</a:t>
                       </a:r>
                     </a:p>
                   </a:txBody>
@@ -7246,7 +7246,7 @@
                         </a:defRPr>
                       </a:pPr>
                       <a:r>
-                        <a:t>企業大方向、社會影響力、品牌知名度、總利潤</a:t>
+                        <a:t>陷入技術與執行細節，未對齊其年度戰略主軸</a:t>
                       </a:r>
                     </a:p>
                   </a:txBody>
@@ -7270,7 +7270,7 @@
                         </a:defRPr>
                       </a:pPr>
                       <a:r>
-                        <a:t>強調宏觀綜合價值與戰略順風車，不糾纏細節</a:t>
+                        <a:t>以一頁式摘要呈現戰略順風車契合度與總增量利潤</a:t>
                       </a:r>
                     </a:p>
                   </a:txBody>
@@ -7296,7 +7296,7 @@
                         </a:defRPr>
                       </a:pPr>
                       <a:r>
-                        <a:t>2. 評估人</a:t>
+                        <a:t>2. 評估人 (CFO/骨幹)</a:t>
                       </a:r>
                     </a:p>
                   </a:txBody>
@@ -7320,7 +7320,7 @@
                         </a:defRPr>
                       </a:pPr>
                       <a:r>
-                        <a:t>CFO、財務總監、業務骨幹</a:t>
+                        <a:t>財務模型準確性、投資回報率、風險邊界</a:t>
                       </a:r>
                     </a:p>
                   </a:txBody>
@@ -7344,7 +7344,7 @@
                         </a:defRPr>
                       </a:pPr>
                       <a:r>
-                        <a:t>數據邏輯、案例真實性、投入產出比準確度</a:t>
+                        <a:t>僅有口頭願景而無嚴謹數據，被評估人一票否決</a:t>
                       </a:r>
                     </a:p>
                   </a:txBody>
@@ -7368,7 +7368,7 @@
                         </a:defRPr>
                       </a:pPr>
                       <a:r>
-                        <a:t>用嚴謹數字說話，主動剖析 A/B/C 三方案利弊風險</a:t>
+                        <a:t>提供 A/B/C 三方案財務試算表（含成本、回收期與風險）</a:t>
                       </a:r>
                     </a:p>
                   </a:txBody>
@@ -7394,7 +7394,7 @@
                         </a:defRPr>
                       </a:pPr>
                       <a:r>
-                        <a:t>3. 執行人</a:t>
+                        <a:t>3. 執行人 (對接窗口)</a:t>
                       </a:r>
                     </a:p>
                   </a:txBody>
@@ -7418,7 +7418,7 @@
                         </a:defRPr>
                       </a:pPr>
                       <a:r>
-                        <a:t>具體業務對接窗口</a:t>
+                        <a:t>操作簡單易行、工作量不暴增、流程合規</a:t>
                       </a:r>
                     </a:p>
                   </a:txBody>
@@ -7442,7 +7442,7 @@
                         </a:defRPr>
                       </a:pPr>
                       <a:r>
-                        <a:t>方案是否足夠【簡單易行】、會不會增加負擔</a:t>
+                        <a:t>輕視一線窗口職級，因「執行太繁瑣」被消極擱置</a:t>
                       </a:r>
                     </a:p>
                   </a:txBody>
@@ -7466,7 +7466,7 @@
                         </a:defRPr>
                       </a:pPr>
                       <a:r>
-                        <a:t>提供低風險好掉頭的選項與標準化易執行流程</a:t>
+                        <a:t>為執行窗口準備標準化執行清單與 SOP，幫其減負</a:t>
                       </a:r>
                     </a:p>
                   </a:txBody>
@@ -7512,7 +7512,7 @@
               </a:defRPr>
             </a:pPr>
             <a:r>
-              <a:t>大衛雲 2.0 談判協商知識庫 (A2.6.4) ｜ COURSE #001 湯君健《有效提升你的談判能力》 ｜ McKinsey Executive Briefing • Slide 11 of 16</a:t>
+              <a:t>商務談判協商知識庫 ｜ COURSE #001 湯君健《有效提升你的談判能力》 ｜ McKinsey Executive Briefing Standard • Slide 11 of 16</a:t>
             </a:r>
           </a:p>
         </p:txBody>
@@ -7695,7 +7695,7 @@
               </a:defRPr>
             </a:pPr>
             <a:r>
-              <a:t>SLIDE 12 / 16 ｜ 第 5 講（上）談判心態：離桌底氣與對事不對人 (#006)</a:t>
+              <a:t>SLIDE 12 / 16 ｜ LEVEL 1–2 入門至進階 ｜ 第 5 講（上）離桌底氣與情緒控場</a:t>
             </a:r>
           </a:p>
           <a:p>
@@ -7708,7 +7708,7 @@
               </a:defRPr>
             </a:pPr>
             <a:r>
-              <a:t>第 5 講（上）雙贏是結果而非目的：建立「沒有非成交不可」的離桌底氣，堅持對事不對人並在情緒失控前主動喊停</a:t>
+              <a:t>第 5 講（上）雙贏是結果而非目的：建立「沒有非成交不可」的離桌底氣，堅持對事不對人並在失控前主動喊停</a:t>
             </a:r>
           </a:p>
         </p:txBody>
@@ -7789,7 +7789,7 @@
               </a:defRPr>
             </a:pPr>
             <a:r>
-              <a:t>▪ 心態第一句：沒有非成交不可的談判</a:t>
+              <a:t>▪ 支柱一：沒有非成交不可的談判（離桌底氣）</a:t>
             </a:r>
           </a:p>
           <a:p>
@@ -7802,7 +7802,7 @@
               </a:defRPr>
             </a:pPr>
             <a:r>
-              <a:t>覺得必須出結果等於沒有別的選擇，一開始就輸了！談判必須有離開桌子的底氣。高手談判前都會評估對方離桌可能性——對方的替代方案越少，給出的報價就越苛刻。</a:t>
+              <a:t>一旦內心認定「必須出結果」即喪失選擇權。對手會敏銳評估你離桌的可能性——你的替代方案越少，對手的報價與條件就越苛刻。</a:t>
             </a:r>
           </a:p>
         </p:txBody>
@@ -7883,7 +7883,7 @@
               </a:defRPr>
             </a:pPr>
             <a:r>
-              <a:t>▪ 雙贏是結果，不是目的（破除兩大錯覺）</a:t>
+              <a:t>▪ 支柱二：雙贏是結果而非目的（破除兩大迷思）</a:t>
             </a:r>
           </a:p>
           <a:p>
@@ -7896,7 +7896,7 @@
               </a:defRPr>
             </a:pPr>
             <a:r>
-              <a:t>① 過於融洽、一團和氣的談判，往往會失去價值創造的機會；② 想用短期利益讓步換取長期合作關係，往往換來的不是好關係，而是【不平等的關係】。</a:t>
+              <a:t>① 過於融洽的談判往往喪失創造新價值的動力；② 企圖以短期無端讓步換取長期合作關係，最終換來的必是【不平等的依附關係】。</a:t>
             </a:r>
           </a:p>
         </p:txBody>
@@ -7977,7 +7977,7 @@
               </a:defRPr>
             </a:pPr>
             <a:r>
-              <a:t>▪ 對事不對人 ＋ 情緒失控前雙向「主動喊停」</a:t>
+              <a:t>▪ 支柱三＆四：對事不對人 ＋ 情緒斷路器「主動喊停」</a:t>
             </a:r>
           </a:p>
           <a:p>
@@ -7990,7 +7990,7 @@
               </a:defRPr>
             </a:pPr>
             <a:r>
-              <a:t>同理心太強易被對方帶節奏，須把握「對事不對人」（分歧只是暫時無法滿足訴求）。自己心態快崩時主動喊停休息，不打負氣牌；觀察到對方情緒失控時也主動喊停幫他整理情緒。</a:t>
+              <a:t>同理心過強易被帶節奏，須堅守「對事不對人」。察覺自己焦慮快崩、或發現對手情緒失控時，立即主動提議中場休息喊停，絕不打負氣牌。</a:t>
             </a:r>
           </a:p>
         </p:txBody>
@@ -8034,7 +8034,7 @@
                         </a:defRPr>
                       </a:pPr>
                       <a:r>
-                        <a:t>心態維度</a:t>
+                        <a:t>心理建設維度</a:t>
                       </a:r>
                     </a:p>
                   </a:txBody>
@@ -8058,7 +8058,7 @@
                         </a:defRPr>
                       </a:pPr>
                       <a:r>
-                        <a:t>常見談判心理誤區</a:t>
+                        <a:t>新手常見誤區（入門避坑）</a:t>
                       </a:r>
                     </a:p>
                   </a:txBody>
@@ -8082,7 +8082,7 @@
                         </a:defRPr>
                       </a:pPr>
                       <a:r>
-                        <a:t>湯君健科學心態原則</a:t>
+                        <a:t>專家心態標準（核心機制）</a:t>
                       </a:r>
                     </a:p>
                   </a:txBody>
@@ -8106,7 +8106,7 @@
                         </a:defRPr>
                       </a:pPr>
                       <a:r>
-                        <a:t>David 實戰落地行動 (#006)</a:t>
+                        <a:t>進階商務實戰檢核指標</a:t>
                       </a:r>
                     </a:p>
                   </a:txBody>
@@ -8132,7 +8132,7 @@
                         </a:defRPr>
                       </a:pPr>
                       <a:r>
-                        <a:t>成交執念</a:t>
+                        <a:t>1. 成交執念管理</a:t>
                       </a:r>
                     </a:p>
                   </a:txBody>
@@ -8156,7 +8156,7 @@
                         </a:defRPr>
                       </a:pPr>
                       <a:r>
-                        <a:t>覺得這單非簽不可，毫無退路</a:t>
+                        <a:t>背負業績壓力認為「今天非簽不可」，毫無退路</a:t>
                       </a:r>
                     </a:p>
                   </a:txBody>
@@ -8180,7 +8180,7 @@
                         </a:defRPr>
                       </a:pPr>
                       <a:r>
-                        <a:t>沒有非成交不可的談判（備妥替代方案）</a:t>
+                        <a:t>沒有非成交不可的談判；隨時具備離桌底氣</a:t>
                       </a:r>
                     </a:p>
                   </a:txBody>
@@ -8204,7 +8204,7 @@
                         </a:defRPr>
                       </a:pPr>
                       <a:r>
-                        <a:t>進場前寫下「若談崩我的替代方案」與「對方離桌可能性」</a:t>
+                        <a:t>會前書面寫下「談崩具體備案」與「評估對手離桌率」</a:t>
                       </a:r>
                     </a:p>
                   </a:txBody>
@@ -8230,7 +8230,7 @@
                         </a:defRPr>
                       </a:pPr>
                       <a:r>
-                        <a:t>雙贏迷思</a:t>
+                        <a:t>2. 關係與利益權衡</a:t>
                       </a:r>
                     </a:p>
                   </a:txBody>
@@ -8254,7 +8254,7 @@
                         </a:defRPr>
                       </a:pPr>
                       <a:r>
-                        <a:t>追求相談甚歡，或短期讓利換長期關係</a:t>
+                        <a:t>追求表面和氣，或單方讓利幻想未來回報</a:t>
                       </a:r>
                     </a:p>
                   </a:txBody>
@@ -8278,7 +8278,7 @@
                         </a:defRPr>
                       </a:pPr>
                       <a:r>
-                        <a:t>雙贏是結果非目的；短期妥協只會換來不平等關係</a:t>
+                        <a:t>雙贏是結果非目的；守住原則方能贏得平等尊重</a:t>
                       </a:r>
                     </a:p>
                   </a:txBody>
@@ -8302,7 +8302,7 @@
                         </a:defRPr>
                       </a:pPr>
                       <a:r>
-                        <a:t>任何讓步必須綁定當期條件交換，拒絕無端讓利</a:t>
+                        <a:t>拒絕無條件「交朋友價」，當期折讓須綁定當期回報</a:t>
                       </a:r>
                     </a:p>
                   </a:txBody>
@@ -8328,7 +8328,7 @@
                         </a:defRPr>
                       </a:pPr>
                       <a:r>
-                        <a:t>情緒管理</a:t>
+                        <a:t>3. 情緒與節奏控場</a:t>
                       </a:r>
                     </a:p>
                   </a:txBody>
@@ -8352,7 +8352,7 @@
                         </a:defRPr>
                       </a:pPr>
                       <a:r>
-                        <a:t>被對方帶節奏，或心態崩潰打負氣牌</a:t>
+                        <a:t>因對方強硬動怒打負氣牌，或過度共情被帶偏</a:t>
                       </a:r>
                     </a:p>
                   </a:txBody>
@@ -8376,7 +8376,7 @@
                         </a:defRPr>
                       </a:pPr>
                       <a:r>
-                        <a:t>對事不對人；自己快崩或對方失控時主動喊停</a:t>
+                        <a:t>堅守對事不對人；情緒臨界時啟動主動喊停機制</a:t>
                       </a:r>
                     </a:p>
                   </a:txBody>
@@ -8400,7 +8400,7 @@
                         </a:defRPr>
                       </a:pPr>
                       <a:r>
-                        <a:t>在談判議程中預設中場休息機制清理思路</a:t>
+                        <a:t>於正式議程預留 15 分鐘休會時段作為團隊覆盤安全閥</a:t>
                       </a:r>
                     </a:p>
                   </a:txBody>
@@ -8446,7 +8446,7 @@
               </a:defRPr>
             </a:pPr>
             <a:r>
-              <a:t>大衛雲 2.0 談判協商知識庫 (A2.6.4) ｜ COURSE #001 湯君健《有效提升你的談判能力》 ｜ McKinsey Executive Briefing • Slide 12 of 16</a:t>
+              <a:t>商務談判協商知識庫 ｜ COURSE #001 湯君健《有效提升你的談判能力》 ｜ McKinsey Executive Briefing Standard • Slide 12 of 16</a:t>
             </a:r>
           </a:p>
         </p:txBody>
@@ -8629,7 +8629,7 @@
               </a:defRPr>
             </a:pPr>
             <a:r>
-              <a:t>SLIDE 13 / 16 ｜ 第 5 講（下）積極防禦：識破五種常見談判心理戰 (#006)</a:t>
+              <a:t>SLIDE 13 / 16 ｜ LEVEL 2 進階實戰 ｜ 第 5 講（下）五大心理戰積極防禦</a:t>
             </a:r>
           </a:p>
           <a:p>
@@ -8736,7 +8736,7 @@
               </a:defRPr>
             </a:pPr>
             <a:r>
-              <a:t>① 虛張聲勢（晾人1小時、一排副總厚資料）：記住家樂福信條「偉大商標或名片背後總有個沒啥能力的銷售員」，穿更嚴謹增強自信。② 製造負罪感（放大小缺點、挑數字）：熟自家產品分清真問題（正視拉回）與偽問題（笑過），或反挑對方瑕疵。</a:t>
+              <a:t>① 虛張聲勢（冷落晾人1小時、高管排場）：秉持家樂福信條「大名片背後常是普通銷售」，衣著更嚴謹、專注條款本身。② 製造負罪感（放大瑕疵）：熟稔產品區分真問題（正面解決拉回）與偽問題（微笑帶過）。</a:t>
             </a:r>
           </a:p>
         </p:txBody>
@@ -8817,7 +8817,7 @@
               </a:defRPr>
             </a:pPr>
             <a:r>
-              <a:t>▪ ③ 用面子換裡子（軟刀子）＆ ④ 底線時間</a:t>
+              <a:t>▪ ③ 面子換裡子（軟刀子）＆ ④ 底線時間</a:t>
             </a:r>
           </a:p>
           <a:p>
@@ -8830,7 +8830,7 @@
               </a:defRPr>
             </a:pPr>
             <a:r>
-              <a:t>③ 面子換裡子（貼心找台階「這是突破/幫你跟老闆說」）：面子道謝，裡子堅守不可交易原則；結束時無論輸贏都要讚揚對手。④ 底線時間（三天最後期限）：反問「為什麼是三天？是誰給你時間壓力的？」把問題變對方的。</a:t>
+              <a:t>③ 面子換裡子（貼心給台階誘使讓利）：面子致謝，裡子死守不可交易紅線；會後無論輸贏主動讚揚對手。④ 底線時間（三天最後期限）：反問「為何設定三天？是誰給您時間壓力的？」</a:t>
             </a:r>
           </a:p>
         </p:txBody>
@@ -8911,7 +8911,7 @@
               </a:defRPr>
             </a:pPr>
             <a:r>
-              <a:t>▪ ⑤ 團隊談判最常用：「紅白臉」一打一拉</a:t>
+              <a:t>▪ ⑤ 團隊談判最常用：「紅白臉」雙簧拆解</a:t>
             </a:r>
           </a:p>
           <a:p>
@@ -8924,7 +8924,7 @@
               </a:defRPr>
             </a:pPr>
             <a:r>
-              <a:t>白臉施壓威脅不談（降低你的心理預期），紅臉打圓場勸讓步（防談判繃斷）。應對：認清是在戴面具演戲，大方點破「你們別演紅白臉啦，我到底是和誰在談？」要求指定全權代表，且雙方人數最好對等。</a:t>
+              <a:t>白臉強硬施壓降預期，紅臉溫和打圓場勸退讓。防禦：看穿雙人演戲，直接微笑點破「兩位別演紅白臉了，請問我究竟與哪位全權代表主談？」並確保雙方人數對等。</a:t>
             </a:r>
           </a:p>
         </p:txBody>
@@ -8992,7 +8992,7 @@
                         </a:defRPr>
                       </a:pPr>
                       <a:r>
-                        <a:t>對手施壓手法</a:t>
+                        <a:t>對手典型施壓表現</a:t>
                       </a:r>
                     </a:p>
                   </a:txBody>
@@ -9016,7 +9016,7 @@
                         </a:defRPr>
                       </a:pPr>
                       <a:r>
-                        <a:t>積極防禦核心策略</a:t>
+                        <a:t>積極防禦核心機制</a:t>
                       </a:r>
                     </a:p>
                   </a:txBody>
@@ -9040,7 +9040,7 @@
                         </a:defRPr>
                       </a:pPr>
                       <a:r>
-                        <a:t>實戰反制話術／動作 (#006)</a:t>
+                        <a:t>進階標準反制話術與行動</a:t>
                       </a:r>
                     </a:p>
                   </a:txBody>
@@ -9090,7 +9090,7 @@
                         </a:defRPr>
                       </a:pPr>
                       <a:r>
-                        <a:t>晾1小時、高管排場、大名頭壓人</a:t>
+                        <a:t>會議室外晾人 1 小時；高管列席擺派頭</a:t>
                       </a:r>
                     </a:p>
                   </a:txBody>
@@ -9114,7 +9114,7 @@
                         </a:defRPr>
                       </a:pPr>
                       <a:r>
-                        <a:t>家樂福信條：專注談判本身不被名頭嚇住</a:t>
+                        <a:t>秉持家樂福信條，剝離頭銜光環聚焦條件</a:t>
                       </a:r>
                     </a:p>
                   </a:txBody>
@@ -9138,7 +9138,7 @@
                         </a:defRPr>
                       </a:pPr>
                       <a:r>
-                        <a:t>穿更嚴謹裝束增強自信，直接切入實質條件</a:t>
+                        <a:t>穿著更嚴謹專業提升氣場，直接切入實質條款</a:t>
                       </a:r>
                     </a:p>
                   </a:txBody>
@@ -9188,7 +9188,7 @@
                         </a:defRPr>
                       </a:pPr>
                       <a:r>
-                        <a:t>挑小缺點放大、挑數字邏輯讓人理虧</a:t>
+                        <a:t>放大微小瑕疵、質疑數據讓我方覺得理虧</a:t>
                       </a:r>
                     </a:p>
                   </a:txBody>
@@ -9212,7 +9212,7 @@
                         </a:defRPr>
                       </a:pPr>
                       <a:r>
-                        <a:t>熟稔產品分辨真偽問題，必要時以牙還牙</a:t>
+                        <a:t>深度掌握產品規格，區分真問題與偽問題</a:t>
                       </a:r>
                     </a:p>
                   </a:txBody>
@@ -9236,7 +9236,7 @@
                         </a:defRPr>
                       </a:pPr>
                       <a:r>
-                        <a:t>真問題正視並拉回主題；偽問題笑笑帶過；反挑對方瑕疵</a:t>
+                        <a:t>真問題提解法拉回主題；偽問題笑過；必要時反指痛點</a:t>
                       </a:r>
                     </a:p>
                   </a:txBody>
@@ -9286,7 +9286,7 @@
                         </a:defRPr>
                       </a:pPr>
                       <a:r>
-                        <a:t>給台階捧你「前所未有突破」誘使讓利</a:t>
+                        <a:t>給口頭高帽與台階，誘導讓出核心利益</a:t>
                       </a:r>
                     </a:p>
                   </a:txBody>
@@ -9310,7 +9310,7 @@
                         </a:defRPr>
                       </a:pPr>
                       <a:r>
-                        <a:t>面子道謝、裡子死守不可交易底線</a:t>
+                        <a:t>面子禮貌致謝，裡子堅守底線條件不可交易</a:t>
                       </a:r>
                     </a:p>
                   </a:txBody>
@@ -9334,7 +9334,7 @@
                         </a:defRPr>
                       </a:pPr>
                       <a:r>
-                        <a:t>守住底線不讓步，且在談判結束時主動讚揚對手</a:t>
+                        <a:t>「感謝體諒，但此條款確屬公司紅線無法交易」</a:t>
                       </a:r>
                     </a:p>
                   </a:txBody>
@@ -9360,7 +9360,7 @@
                         </a:defRPr>
                       </a:pPr>
                       <a:r>
-                        <a:t>4. 底線時間 / 5. 紅白臉</a:t>
+                        <a:t>4. 期限 / 5. 紅白臉</a:t>
                       </a:r>
                     </a:p>
                   </a:txBody>
@@ -9384,7 +9384,7 @@
                         </a:defRPr>
                       </a:pPr>
                       <a:r>
-                        <a:t>壓3天期限 / 一人扮凶一人打圓場</a:t>
+                        <a:t>壓3天期限 / 一人拍桌施壓一人打圓場</a:t>
                       </a:r>
                     </a:p>
                   </a:txBody>
@@ -9408,7 +9408,7 @@
                         </a:defRPr>
                       </a:pPr>
                       <a:r>
-                        <a:t>反問時間壓力來源 / 點破演戲要求全權代表</a:t>
+                        <a:t>反問壓力來源 / 點破雙簧要求指定全權代表</a:t>
                       </a:r>
                     </a:p>
                   </a:txBody>
@@ -9432,7 +9432,7 @@
                         </a:defRPr>
                       </a:pPr>
                       <a:r>
-                        <a:t>「為什麼是三天？誰給你壓力？」「別演紅白臉，指定全權代表」</a:t>
+                        <a:t>「為何三天？誰給您壓力？」「請指定一位全權代表主談」</a:t>
                       </a:r>
                     </a:p>
                   </a:txBody>
@@ -9478,7 +9478,7 @@
               </a:defRPr>
             </a:pPr>
             <a:r>
-              <a:t>大衛雲 2.0 談判協商知識庫 (A2.6.4) ｜ COURSE #001 湯君健《有效提升你的談判能力》 ｜ McKinsey Executive Briefing • Slide 13 of 16</a:t>
+              <a:t>商務談判協商知識庫 ｜ COURSE #001 湯君健《有效提升你的談判能力》 ｜ McKinsey Executive Briefing Standard • Slide 13 of 16</a:t>
             </a:r>
           </a:p>
         </p:txBody>
@@ -9661,7 +9661,7 @@
               </a:defRPr>
             </a:pPr>
             <a:r>
-              <a:t>SLIDE 14 / 16 ｜ 第 6 講：語言與肢體語言管理 (#007)</a:t>
+              <a:t>SLIDE 14 / 16 ｜ LEVEL 2 進階實戰 ｜ 第 6 講：三柱姿態與標準拒絕公式</a:t>
             </a:r>
           </a:p>
           <a:p>
@@ -9674,7 +9674,7 @@
               </a:defRPr>
             </a:pPr>
             <a:r>
-              <a:t>第 6 講 以不變應萬變的談判姿態：貫徹「態度誠懇、立場堅定、身段柔軟」，善用拒絕公式與「如果…就…」打開溝通之門</a:t>
+              <a:t>第 6 講 以不變應萬變的談判姿態：貫徹「態度誠懇、立場堅定、身段柔軟」，善用拒絕公式與「如果…就…」開啟雙向交換</a:t>
             </a:r>
           </a:p>
         </p:txBody>
@@ -9755,7 +9755,7 @@
               </a:defRPr>
             </a:pPr>
             <a:r>
-              <a:t>▪ 態度要誠懇：問理想結果（不問底線）＋開放肢體</a:t>
+              <a:t>▪ 態度要誠懇：探詢理想結果（嚴禁問底線）</a:t>
             </a:r>
           </a:p>
           <a:p>
@@ -9768,7 +9768,7 @@
               </a:defRPr>
             </a:pPr>
             <a:r>
-              <a:t>語言：多問對方看法與【理想結果】（切忌問底線，因對方不會說且顯示你無意幫他），說明事前準備（提前對帳）。肢體：多點頭＋眼神交流；身體微前傾不靠椅背；雙手攤開手掌放鬆不抱胸握拳。</a:t>
+              <a:t>語言：探詢對方看法與【理想結果】（嚴禁逼問底線，因對方不會說且暗示你無意幫他），主動說明會前準備（如已提前核對帳目）。肢體：點頭、眼神接觸、身體微前傾、雙手自然攤開。</a:t>
             </a:r>
           </a:p>
         </p:txBody>
@@ -9849,7 +9849,7 @@
               </a:defRPr>
             </a:pPr>
             <a:r>
-              <a:t>▪ 立場要堅定：必背「拒絕公式」＋手腳控場動作</a:t>
+              <a:t>▪ 立場要堅定：必背「標準拒絕公式」＋手腳控場</a:t>
             </a:r>
           </a:p>
           <a:p>
@@ -9862,7 +9862,7 @@
               </a:defRPr>
             </a:pPr>
             <a:r>
-              <a:t>【拒絕公式】＝前半句表明立場（關門）＋後半句提出在別處找方案（指路）。例：交貨期不能改，不如討論貨到倉後怎麼縮短收貨時間。肢體：手掌向下做按下動作（控制局勢），雙腳如種在地上貼地不晃。</a:t>
+              <a:t>【拒絕公式】＝前半句表明不可退讓立場（關門）＋後半句引導新解決方案（指路）。例：交貨期無法調整，不如探討到貨後如何縮短驗收時間。肢體：手掌向下按壓控場，雙腳如種在地面般穩固。</a:t>
             </a:r>
           </a:p>
         </p:txBody>
@@ -9956,7 +9956,7 @@
               </a:defRPr>
             </a:pPr>
             <a:r>
-              <a:t>西方諺語：「外交的車輪滾滾，全靠模糊的語言潤滑。」不說「方案不可能」改說「不咋地」；不罵「產品爛」改說「質量我們有數，質檢必須的」。多用「如果30號前款到，我們就發貨」取代斷貨威脅；反駁時微笑。</a:t>
+              <a:t>以委婉模糊語言避免絕對否定，保留迴旋空間；將「30日不付款即斷貨」改寫為「如果30日前款項到位，我們立即安排發貨」。肢體：肩頸放鬆、不撐桌、微笑平和反駁。</a:t>
             </a:r>
           </a:p>
         </p:txBody>
@@ -10000,7 +10000,7 @@
                         </a:defRPr>
                       </a:pPr>
                       <a:r>
-                        <a:t>姿態三句話</a:t>
+                        <a:t>三柱談判姿態</a:t>
                       </a:r>
                     </a:p>
                   </a:txBody>
@@ -10024,7 +10024,7 @@
                         </a:defRPr>
                       </a:pPr>
                       <a:r>
-                        <a:t>語言管理黃金句型（原文範例）</a:t>
+                        <a:t>新手常見誤區（語言與肢體失誤）</a:t>
                       </a:r>
                     </a:p>
                   </a:txBody>
@@ -10048,7 +10048,7 @@
                         </a:defRPr>
                       </a:pPr>
                       <a:r>
-                        <a:t>語言禁忌（嚴禁踩雷）</a:t>
+                        <a:t>專家標準語言公式</a:t>
                       </a:r>
                     </a:p>
                   </a:txBody>
@@ -10072,7 +10072,7 @@
                         </a:defRPr>
                       </a:pPr>
                       <a:r>
-                        <a:t>身體語言一致性標準 (#007)</a:t>
+                        <a:t>專業肢體語言配置標準</a:t>
                       </a:r>
                     </a:p>
                   </a:txBody>
@@ -10122,7 +10122,7 @@
                         </a:defRPr>
                       </a:pPr>
                       <a:r>
-                        <a:t>「我想聽聽您的意見／理想結果」「已提前對好帳」</a:t>
+                        <a:t>開口逼問「底線多少？」；後仰靠背、抱胸握拳</a:t>
                       </a:r>
                     </a:p>
                   </a:txBody>
@@ -10146,7 +10146,7 @@
                         </a:defRPr>
                       </a:pPr>
                       <a:r>
-                        <a:t>嚴禁開口問「你們底線是多少？」</a:t>
+                        <a:t>「請問您期望的理想結果為何？」「會前已核對好帳目」</a:t>
                       </a:r>
                     </a:p>
                   </a:txBody>
@@ -10170,7 +10170,7 @@
                         </a:defRPr>
                       </a:pPr>
                       <a:r>
-                        <a:t>多點頭、眼神交流、身體微前傾、雙手攤開放鬆</a:t>
+                        <a:t>專注點頭傾聽、眼神接觸、身體微前傾、雙手攤開</a:t>
                       </a:r>
                     </a:p>
                   </a:txBody>
@@ -10220,7 +10220,7 @@
                         </a:defRPr>
                       </a:pPr>
                       <a:r>
-                        <a:t>拒絕公式：「租金沒空間了，若馬上確認入住可談免租期」</a:t>
+                        <a:t>不敢說不，或生硬拒絕導致冷場；雙腳晃動</a:t>
                       </a:r>
                     </a:p>
                   </a:txBody>
@@ -10244,7 +10244,7 @@
                         </a:defRPr>
                       </a:pPr>
                       <a:r>
-                        <a:t>不敢拒絕被得寸進尺，或生硬拒絕冷場</a:t>
+                        <a:t>拒絕公式：「單價確無空間(關門)，但可談免租期(指路)」</a:t>
                       </a:r>
                     </a:p>
                   </a:txBody>
@@ -10268,7 +10268,7 @@
                         </a:defRPr>
                       </a:pPr>
                       <a:r>
-                        <a:t>手掌向下做按下動作、結尾有力一揮、雙腳種地不晃</a:t>
+                        <a:t>手掌向下平穩按壓控場、雙腳如種在地面般穩貼</a:t>
                       </a:r>
                     </a:p>
                   </a:txBody>
@@ -10318,7 +10318,7 @@
                         </a:defRPr>
                       </a:pPr>
                       <a:r>
-                        <a:t>模糊語言＋「如果你們在A讓步，我們可在B讓步」</a:t>
+                        <a:t>絕對否定詞把話說死、最後通牒；聳肩撐桌</a:t>
                       </a:r>
                     </a:p>
                   </a:txBody>
@@ -10342,7 +10342,7 @@
                         </a:defRPr>
                       </a:pPr>
                       <a:r>
-                        <a:t>徹底否定句把話說死、最後通牒威脅</a:t>
+                        <a:t>委婉表述＋「如果貴方在A配合，我方可在B讓步」</a:t>
                       </a:r>
                     </a:p>
                   </a:txBody>
@@ -10366,7 +10366,7 @@
                         </a:defRPr>
                       </a:pPr>
                       <a:r>
-                        <a:t>身體放鬆不聳肩、不雙手撐桌、反駁時保持微笑</a:t>
+                        <a:t>肩頸放鬆、重心置於前臂、反駁時面帶微笑語氣平和</a:t>
                       </a:r>
                     </a:p>
                   </a:txBody>
@@ -10412,7 +10412,7 @@
               </a:defRPr>
             </a:pPr>
             <a:r>
-              <a:t>大衛雲 2.0 談判協商知識庫 (A2.6.4) ｜ COURSE #001 湯君健《有效提升你的談判能力》 ｜ McKinsey Executive Briefing • Slide 14 of 16</a:t>
+              <a:t>商務談判協商知識庫 ｜ COURSE #001 湯君健《有效提升你的談判能力》 ｜ McKinsey Executive Briefing Standard • Slide 14 of 16</a:t>
             </a:r>
           </a:p>
         </p:txBody>
@@ -10595,7 +10595,7 @@
               </a:defRPr>
             </a:pPr>
             <a:r>
-              <a:t>SLIDE 15 / 16 ｜ 跨教材整合：全課八條因果鏈 × MEDDIC 銷售 (#008)</a:t>
+              <a:t>SLIDE 15 / 16 ｜ LEVEL 3 高階破局 ｜ 跨模組整合：八條因果鏈 × 顧問式銷售</a:t>
             </a:r>
           </a:p>
           <a:p>
@@ -10608,7 +10608,7 @@
               </a:defRPr>
             </a:pPr>
             <a:r>
-              <a:t>跨教材深度整合：串聯全課八條橫向因果鏈，並將湯君健「三層談判模型」與大衛雲「MEDDIC 顧問式銷售」交叉對齊</a:t>
+              <a:t>跨模組深度整合：串聯全課八條邏輯因果鏈，並將「三層談判模型」與「MEDDIC 顧問式銷售」無縫對接</a:t>
             </a:r>
           </a:p>
         </p:txBody>
@@ -10689,7 +10689,7 @@
               </a:defRPr>
             </a:pPr>
             <a:r>
-              <a:t>▪ 全課八條橫向因果鏈（#008 邏輯貫通）</a:t>
+              <a:t>▪ 全課八條橫向因果鏈（前段準備支撐後段控場）</a:t>
             </a:r>
           </a:p>
           <a:p>
@@ -10702,7 +10702,7 @@
               </a:defRPr>
             </a:pPr>
             <a:r>
-              <a:t>① 底線機會成本→離桌底氣；② 隱藏替代方案→離桌準備；③ 表面≠真實需求→假設題→價值鏈；④⑤⑥ 價格卡關→切條件層→創價值→回價格分配；⑦ 不情願讓步→讓步三原則→如果…就；⑧ 對事不對人→誠懇堅定柔軟。</a:t>
+              <a:t>①② 機會成本備案與談崩退路 ➔ 支撐第5講離桌底氣；③ 分橘子挖真實需求 ➔ 驅動假設提問與價值鏈擴張；④⑤⑥ 價格⇄條件⇄價值動態循環；⑦⑧ 讓步紀律與對事不對人 ➔ 外顯為三柱姿態。</a:t>
             </a:r>
           </a:p>
         </p:txBody>
@@ -10783,7 +10783,7 @@
               </a:defRPr>
             </a:pPr>
             <a:r>
-              <a:t>▪ 湯君健談判 × MEDDIC 銷售（A2.6 雙引擎）</a:t>
+              <a:t>▪ B2B 雙引擎：前段 MEDDIC 銷售 × 後段三層談判</a:t>
             </a:r>
           </a:p>
           <a:p>
@@ -10796,7 +10796,7 @@
               </a:defRPr>
             </a:pPr>
             <a:r>
-              <a:t>M (Metrics 量化) 對接第4講「數字說話算清利潤額」；E (Economic Buyer) 與 C (Champion) 對接第4講「拍板人/評估人/執行人」；D (決策標準) 對接「把方案塞進對方主張」。</a:t>
+              <a:t>M (Metrics 量化) 對接第4講「用數據算清總利潤額」；E (經濟決策者) 與 C (擁護者) 對接「拍板人/評估人/執行人」；D (決策標準) 對接「把方案塞進對方主張」。</a:t>
             </a:r>
           </a:p>
         </p:txBody>
@@ -10877,7 +10877,7 @@
               </a:defRPr>
             </a:pPr>
             <a:r>
-              <a:t>▪ 補強課程空白：簽約後履約與長期關係護欄</a:t>
+              <a:t>▪ 全生命週期延伸：簽約後履約與變更管理</a:t>
             </a:r>
           </a:p>
           <a:p>
@@ -10890,941 +10890,7 @@
               </a:defRPr>
             </a:pPr>
             <a:r>
-              <a:t>原課未涵蓋談判後履約監控與覆盤；實戰中須嚴防對方簽約後利用變更單蠶食利潤，並以平等原則維護長期合作。</a:t>
-            </a:r>
-          </a:p>
-        </p:txBody>
-      </p:sp>
-      <p:graphicFrame>
-        <p:nvGraphicFramePr>
-          <p:cNvPr id="12" name="Table 11"/>
-          <p:cNvGraphicFramePr>
-            <a:graphicFrameLocks noGrp="1"/>
-          </p:cNvGraphicFramePr>
-          <p:nvPr/>
-        </p:nvGraphicFramePr>
-        <p:xfrm>
-          <a:off x="457200" y="3858768"/>
-          <a:ext cx="11274552" cy="2423160"/>
-        </p:xfrm>
-        <a:graphic>
-          <a:graphicData uri="http://schemas.openxmlformats.org/drawingml/2006/table">
-            <a:tbl>
-              <a:tblPr firstRow="1" bandRow="1">
-                <a:tableStyleId>{5C22544A-7EE6-4342-B048-85BDC9FD1C3A}</a:tableStyleId>
-              </a:tblPr>
-              <a:tblGrid>
-                <a:gridCol w="2818638"/>
-                <a:gridCol w="2818638"/>
-                <a:gridCol w="2818638"/>
-                <a:gridCol w="2818638"/>
-              </a:tblGrid>
-              <a:tr h="605790">
-                <a:tc>
-                  <a:txBody>
-                    <a:bodyPr/>
-                    <a:lstStyle/>
-                    <a:p>
-                      <a:pPr>
-                        <a:defRPr sz="1100" b="1">
-                          <a:solidFill>
-                            <a:srgbClr val="FFFFFF"/>
-                          </a:solidFill>
-                          <a:latin typeface="Microsoft JhengHei"/>
-                        </a:defRPr>
-                      </a:pPr>
-                      <a:r>
-                        <a:t>橫向因果鏈</a:t>
-                      </a:r>
-                    </a:p>
-                  </a:txBody>
-                  <a:tcPr>
-                    <a:solidFill>
-                      <a:srgbClr val="051C2C"/>
-                    </a:solidFill>
-                  </a:tcPr>
-                </a:tc>
-                <a:tc>
-                  <a:txBody>
-                    <a:bodyPr/>
-                    <a:lstStyle/>
-                    <a:p>
-                      <a:pPr>
-                        <a:defRPr sz="1100" b="1">
-                          <a:solidFill>
-                            <a:srgbClr val="FFFFFF"/>
-                          </a:solidFill>
-                          <a:latin typeface="Microsoft JhengHei"/>
-                        </a:defRPr>
-                      </a:pPr>
-                      <a:r>
-                        <a:t>前段基礎認知／工具</a:t>
-                      </a:r>
-                    </a:p>
-                  </a:txBody>
-                  <a:tcPr>
-                    <a:solidFill>
-                      <a:srgbClr val="051C2C"/>
-                    </a:solidFill>
-                  </a:tcPr>
-                </a:tc>
-                <a:tc>
-                  <a:txBody>
-                    <a:bodyPr/>
-                    <a:lstStyle/>
-                    <a:p>
-                      <a:pPr>
-                        <a:defRPr sz="1100" b="1">
-                          <a:solidFill>
-                            <a:srgbClr val="FFFFFF"/>
-                          </a:solidFill>
-                          <a:latin typeface="Microsoft JhengHei"/>
-                        </a:defRPr>
-                      </a:pPr>
-                      <a:r>
-                        <a:t>後段高階能力／外顯表現</a:t>
-                      </a:r>
-                    </a:p>
-                  </a:txBody>
-                  <a:tcPr>
-                    <a:solidFill>
-                      <a:srgbClr val="051C2C"/>
-                    </a:solidFill>
-                  </a:tcPr>
-                </a:tc>
-                <a:tc>
-                  <a:txBody>
-                    <a:bodyPr/>
-                    <a:lstStyle/>
-                    <a:p>
-                      <a:pPr>
-                        <a:defRPr sz="1100" b="1">
-                          <a:solidFill>
-                            <a:srgbClr val="FFFFFF"/>
-                          </a:solidFill>
-                          <a:latin typeface="Microsoft JhengHei"/>
-                        </a:defRPr>
-                      </a:pPr>
-                      <a:r>
-                        <a:t>跨系統對接 MEDDIC 銷售 (A2.6.3.2)</a:t>
-                      </a:r>
-                    </a:p>
-                  </a:txBody>
-                  <a:tcPr>
-                    <a:solidFill>
-                      <a:srgbClr val="051C2C"/>
-                    </a:solidFill>
-                  </a:tcPr>
-                </a:tc>
-              </a:tr>
-              <a:tr h="605790">
-                <a:tc>
-                  <a:txBody>
-                    <a:bodyPr/>
-                    <a:lstStyle/>
-                    <a:p>
-                      <a:pPr>
-                        <a:defRPr sz="1050" b="1">
-                          <a:solidFill>
-                            <a:srgbClr val="051C2C"/>
-                          </a:solidFill>
-                          <a:latin typeface="Microsoft JhengHei"/>
-                        </a:defRPr>
-                      </a:pPr>
-                      <a:r>
-                        <a:t>底氣鏈 (#003→#006)</a:t>
-                      </a:r>
-                    </a:p>
-                  </a:txBody>
-                  <a:tcPr>
-                    <a:solidFill>
-                      <a:srgbClr val="FFFFFF"/>
-                    </a:solidFill>
-                  </a:tcPr>
-                </a:tc>
-                <a:tc>
-                  <a:txBody>
-                    <a:bodyPr/>
-                    <a:lstStyle/>
-                    <a:p>
-                      <a:pPr>
-                        <a:defRPr sz="1050" b="0">
-                          <a:solidFill>
-                            <a:srgbClr val="051C2C"/>
-                          </a:solidFill>
-                          <a:latin typeface="Microsoft JhengHei"/>
-                        </a:defRPr>
-                      </a:pPr>
-                      <a:r>
-                        <a:t>底線＝機會成本（多備報價）</a:t>
-                      </a:r>
-                    </a:p>
-                  </a:txBody>
-                  <a:tcPr>
-                    <a:solidFill>
-                      <a:srgbClr val="FFFFFF"/>
-                    </a:solidFill>
-                  </a:tcPr>
-                </a:tc>
-                <a:tc>
-                  <a:txBody>
-                    <a:bodyPr/>
-                    <a:lstStyle/>
-                    <a:p>
-                      <a:pPr>
-                        <a:defRPr sz="1050" b="0">
-                          <a:solidFill>
-                            <a:srgbClr val="051C2C"/>
-                          </a:solidFill>
-                          <a:latin typeface="Microsoft JhengHei"/>
-                        </a:defRPr>
-                      </a:pPr>
-                      <a:r>
-                        <a:t>沒有非成交不可的談判（敢離桌）</a:t>
-                      </a:r>
-                    </a:p>
-                  </a:txBody>
-                  <a:tcPr>
-                    <a:solidFill>
-                      <a:srgbClr val="FFFFFF"/>
-                    </a:solidFill>
-                  </a:tcPr>
-                </a:tc>
-                <a:tc>
-                  <a:txBody>
-                    <a:bodyPr/>
-                    <a:lstStyle/>
-                    <a:p>
-                      <a:pPr>
-                        <a:defRPr sz="1050" b="0">
-                          <a:solidFill>
-                            <a:srgbClr val="051C2C"/>
-                          </a:solidFill>
-                          <a:latin typeface="Microsoft JhengHei"/>
-                        </a:defRPr>
-                      </a:pPr>
-                      <a:r>
-                        <a:t>Pipeline 充足才不會在單一客戶前卑躬屈膝</a:t>
-                      </a:r>
-                    </a:p>
-                  </a:txBody>
-                  <a:tcPr>
-                    <a:solidFill>
-                      <a:srgbClr val="FFFFFF"/>
-                    </a:solidFill>
-                  </a:tcPr>
-                </a:tc>
-              </a:tr>
-              <a:tr h="605790">
-                <a:tc>
-                  <a:txBody>
-                    <a:bodyPr/>
-                    <a:lstStyle/>
-                    <a:p>
-                      <a:pPr>
-                        <a:defRPr sz="1050" b="1">
-                          <a:solidFill>
-                            <a:srgbClr val="051C2C"/>
-                          </a:solidFill>
-                          <a:latin typeface="Microsoft JhengHei"/>
-                        </a:defRPr>
-                      </a:pPr>
-                      <a:r>
-                        <a:t>需求鏈 (#002→#005)</a:t>
-                      </a:r>
-                    </a:p>
-                  </a:txBody>
-                  <a:tcPr>
-                    <a:solidFill>
-                      <a:srgbClr val="EFF6FF"/>
-                    </a:solidFill>
-                  </a:tcPr>
-                </a:tc>
-                <a:tc>
-                  <a:txBody>
-                    <a:bodyPr/>
-                    <a:lstStyle/>
-                    <a:p>
-                      <a:pPr>
-                        <a:defRPr sz="1050" b="0">
-                          <a:solidFill>
-                            <a:srgbClr val="051C2C"/>
-                          </a:solidFill>
-                          <a:latin typeface="Microsoft JhengHei"/>
-                        </a:defRPr>
-                      </a:pPr>
-                      <a:r>
-                        <a:t>分橘子真實需求 → 假設性問題</a:t>
-                      </a:r>
-                    </a:p>
-                  </a:txBody>
-                  <a:tcPr>
-                    <a:solidFill>
-                      <a:srgbClr val="EFF6FF"/>
-                    </a:solidFill>
-                  </a:tcPr>
-                </a:tc>
-                <a:tc>
-                  <a:txBody>
-                    <a:bodyPr/>
-                    <a:lstStyle/>
-                    <a:p>
-                      <a:pPr>
-                        <a:defRPr sz="1050" b="0">
-                          <a:solidFill>
-                            <a:srgbClr val="051C2C"/>
-                          </a:solidFill>
-                          <a:latin typeface="Microsoft JhengHei"/>
-                        </a:defRPr>
-                      </a:pPr>
-                      <a:r>
-                        <a:t>閱讀價值鏈三角形（納入顧客端）</a:t>
-                      </a:r>
-                    </a:p>
-                  </a:txBody>
-                  <a:tcPr>
-                    <a:solidFill>
-                      <a:srgbClr val="EFF6FF"/>
-                    </a:solidFill>
-                  </a:tcPr>
-                </a:tc>
-                <a:tc>
-                  <a:txBody>
-                    <a:bodyPr/>
-                    <a:lstStyle/>
-                    <a:p>
-                      <a:pPr>
-                        <a:defRPr sz="1050" b="0">
-                          <a:solidFill>
-                            <a:srgbClr val="051C2C"/>
-                          </a:solidFill>
-                          <a:latin typeface="Microsoft JhengHei"/>
-                        </a:defRPr>
-                      </a:pPr>
-                      <a:r>
-                        <a:t>I (Identify Pain 四層痛點) × M (雙層價值矩陣)</a:t>
-                      </a:r>
-                    </a:p>
-                  </a:txBody>
-                  <a:tcPr>
-                    <a:solidFill>
-                      <a:srgbClr val="EFF6FF"/>
-                    </a:solidFill>
-                  </a:tcPr>
-                </a:tc>
-              </a:tr>
-              <a:tr h="605790">
-                <a:tc>
-                  <a:txBody>
-                    <a:bodyPr/>
-                    <a:lstStyle/>
-                    <a:p>
-                      <a:pPr>
-                        <a:defRPr sz="1050" b="1">
-                          <a:solidFill>
-                            <a:srgbClr val="051C2C"/>
-                          </a:solidFill>
-                          <a:latin typeface="Microsoft JhengHei"/>
-                        </a:defRPr>
-                      </a:pPr>
-                      <a:r>
-                        <a:t>說服鏈 (#005→#007)</a:t>
-                      </a:r>
-                    </a:p>
-                  </a:txBody>
-                  <a:tcPr>
-                    <a:solidFill>
-                      <a:srgbClr val="FFFFFF"/>
-                    </a:solidFill>
-                  </a:tcPr>
-                </a:tc>
-                <a:tc>
-                  <a:txBody>
-                    <a:bodyPr/>
-                    <a:lstStyle/>
-                    <a:p>
-                      <a:pPr>
-                        <a:defRPr sz="1050" b="0">
-                          <a:solidFill>
-                            <a:srgbClr val="051C2C"/>
-                          </a:solidFill>
-                          <a:latin typeface="Microsoft JhengHei"/>
-                        </a:defRPr>
-                      </a:pPr>
-                      <a:r>
-                        <a:t>ABC三方案 × 拍板/評估/執行人</a:t>
-                      </a:r>
-                    </a:p>
-                  </a:txBody>
-                  <a:tcPr>
-                    <a:solidFill>
-                      <a:srgbClr val="FFFFFF"/>
-                    </a:solidFill>
-                  </a:tcPr>
-                </a:tc>
-                <a:tc>
-                  <a:txBody>
-                    <a:bodyPr/>
-                    <a:lstStyle/>
-                    <a:p>
-                      <a:pPr>
-                        <a:defRPr sz="1050" b="0">
-                          <a:solidFill>
-                            <a:srgbClr val="051C2C"/>
-                          </a:solidFill>
-                          <a:latin typeface="Microsoft JhengHei"/>
-                        </a:defRPr>
-                      </a:pPr>
-                      <a:r>
-                        <a:t>拒絕公式 ＋「如果…就…」條件交換</a:t>
-                      </a:r>
-                    </a:p>
-                  </a:txBody>
-                  <a:tcPr>
-                    <a:solidFill>
-                      <a:srgbClr val="FFFFFF"/>
-                    </a:solidFill>
-                  </a:tcPr>
-                </a:tc>
-                <a:tc>
-                  <a:txBody>
-                    <a:bodyPr/>
-                    <a:lstStyle/>
-                    <a:p>
-                      <a:pPr>
-                        <a:defRPr sz="1050" b="0">
-                          <a:solidFill>
-                            <a:srgbClr val="051C2C"/>
-                          </a:solidFill>
-                          <a:latin typeface="Microsoft JhengHei"/>
-                        </a:defRPr>
-                      </a:pPr>
-                      <a:r>
-                        <a:t>E (EB四考題) × C (Champion) × 異議處理六字訣</a:t>
-                      </a:r>
-                    </a:p>
-                  </a:txBody>
-                  <a:tcPr>
-                    <a:solidFill>
-                      <a:srgbClr val="FFFFFF"/>
-                    </a:solidFill>
-                  </a:tcPr>
-                </a:tc>
-              </a:tr>
-            </a:tbl>
-          </a:graphicData>
-        </a:graphic>
-      </p:graphicFrame>
-      <p:sp>
-        <p:nvSpPr>
-          <p:cNvPr id="13" name="TextBox 12"/>
-          <p:cNvSpPr txBox="1"/>
-          <p:nvPr/>
-        </p:nvSpPr>
-        <p:spPr>
-          <a:xfrm>
-            <a:off x="457200" y="6446520"/>
-            <a:ext cx="11274552" cy="320040"/>
-          </a:xfrm>
-          <a:prstGeom prst="rect">
-            <a:avLst/>
-          </a:prstGeom>
-          <a:noFill/>
-        </p:spPr>
-        <p:txBody>
-          <a:bodyPr wrap="none">
-            <a:spAutoFit/>
-          </a:bodyPr>
-          <a:lstStyle/>
-          <a:p>
-            <a:pPr>
-              <a:defRPr sz="950">
-                <a:solidFill>
-                  <a:srgbClr val="64748B"/>
-                </a:solidFill>
-                <a:latin typeface="Microsoft JhengHei"/>
-              </a:defRPr>
-            </a:pPr>
-            <a:r>
-              <a:t>大衛雲 2.0 談判協商知識庫 (A2.6.4) ｜ COURSE #001 湯君健《有效提升你的談判能力》 ｜ McKinsey Executive Briefing • Slide 15 of 16</a:t>
-            </a:r>
-          </a:p>
-        </p:txBody>
-      </p:sp>
-    </p:spTree>
-  </p:cSld>
-  <p:clrMapOvr>
-    <a:masterClrMapping/>
-  </p:clrMapOvr>
-</p:sld>
-</file>
-
-<file path=ppt/slides/slide16.xml><?xml version="1.0" encoding="utf-8"?>
-<p:sld xmlns:a="http://schemas.openxmlformats.org/drawingml/2006/main" xmlns:p="http://schemas.openxmlformats.org/presentationml/2006/main" xmlns:r="http://schemas.openxmlformats.org/officeDocument/2006/relationships">
-  <p:cSld>
-    <p:spTree>
-      <p:nvGrpSpPr>
-        <p:cNvPr id="1" name=""/>
-        <p:cNvGrpSpPr/>
-        <p:nvPr/>
-      </p:nvGrpSpPr>
-      <p:grpSpPr/>
-      <p:sp>
-        <p:nvSpPr>
-          <p:cNvPr id="2" name="Rectangle 1"/>
-          <p:cNvSpPr/>
-          <p:nvPr/>
-        </p:nvSpPr>
-        <p:spPr>
-          <a:xfrm>
-            <a:off x="0" y="0"/>
-            <a:ext cx="12191695" cy="6858000"/>
-          </a:xfrm>
-          <a:prstGeom prst="rect">
-            <a:avLst/>
-          </a:prstGeom>
-          <a:solidFill>
-            <a:srgbClr val="F4F6F9"/>
-          </a:solidFill>
-          <a:ln>
-            <a:noFill/>
-          </a:ln>
-        </p:spPr>
-        <p:style>
-          <a:lnRef idx="1">
-            <a:schemeClr val="accent1"/>
-          </a:lnRef>
-          <a:fillRef idx="3">
-            <a:schemeClr val="accent1"/>
-          </a:fillRef>
-          <a:effectRef idx="2">
-            <a:schemeClr val="accent1"/>
-          </a:effectRef>
-          <a:fontRef idx="minor">
-            <a:schemeClr val="lt1"/>
-          </a:fontRef>
-        </p:style>
-        <p:txBody>
-          <a:bodyPr rtlCol="0" anchor="ctr"/>
-          <a:lstStyle/>
-          <a:p>
-            <a:pPr algn="ctr"/>
-          </a:p>
-        </p:txBody>
-      </p:sp>
-      <p:sp>
-        <p:nvSpPr>
-          <p:cNvPr id="3" name="Rectangle 2"/>
-          <p:cNvSpPr/>
-          <p:nvPr/>
-        </p:nvSpPr>
-        <p:spPr>
-          <a:xfrm>
-            <a:off x="0" y="0"/>
-            <a:ext cx="12191695" cy="1234440"/>
-          </a:xfrm>
-          <a:prstGeom prst="rect">
-            <a:avLst/>
-          </a:prstGeom>
-          <a:solidFill>
-            <a:srgbClr val="051C2C"/>
-          </a:solidFill>
-          <a:ln>
-            <a:noFill/>
-          </a:ln>
-        </p:spPr>
-        <p:style>
-          <a:lnRef idx="1">
-            <a:schemeClr val="accent1"/>
-          </a:lnRef>
-          <a:fillRef idx="3">
-            <a:schemeClr val="accent1"/>
-          </a:fillRef>
-          <a:effectRef idx="2">
-            <a:schemeClr val="accent1"/>
-          </a:effectRef>
-          <a:fontRef idx="minor">
-            <a:schemeClr val="lt1"/>
-          </a:fontRef>
-        </p:style>
-        <p:txBody>
-          <a:bodyPr rtlCol="0" anchor="ctr"/>
-          <a:lstStyle/>
-          <a:p>
-            <a:pPr algn="ctr"/>
-          </a:p>
-        </p:txBody>
-      </p:sp>
-      <p:sp>
-        <p:nvSpPr>
-          <p:cNvPr id="4" name="Rectangle 3"/>
-          <p:cNvSpPr/>
-          <p:nvPr/>
-        </p:nvSpPr>
-        <p:spPr>
-          <a:xfrm>
-            <a:off x="0" y="1234440"/>
-            <a:ext cx="12191695" cy="45720"/>
-          </a:xfrm>
-          <a:prstGeom prst="rect">
-            <a:avLst/>
-          </a:prstGeom>
-          <a:solidFill>
-            <a:srgbClr val="D97706"/>
-          </a:solidFill>
-          <a:ln>
-            <a:noFill/>
-          </a:ln>
-        </p:spPr>
-        <p:style>
-          <a:lnRef idx="1">
-            <a:schemeClr val="accent1"/>
-          </a:lnRef>
-          <a:fillRef idx="3">
-            <a:schemeClr val="accent1"/>
-          </a:fillRef>
-          <a:effectRef idx="2">
-            <a:schemeClr val="accent1"/>
-          </a:effectRef>
-          <a:fontRef idx="minor">
-            <a:schemeClr val="lt1"/>
-          </a:fontRef>
-        </p:style>
-        <p:txBody>
-          <a:bodyPr rtlCol="0" anchor="ctr"/>
-          <a:lstStyle/>
-          <a:p>
-            <a:pPr algn="ctr"/>
-          </a:p>
-        </p:txBody>
-      </p:sp>
-      <p:sp>
-        <p:nvSpPr>
-          <p:cNvPr id="5" name="TextBox 4"/>
-          <p:cNvSpPr txBox="1"/>
-          <p:nvPr/>
-        </p:nvSpPr>
-        <p:spPr>
-          <a:xfrm>
-            <a:off x="457200" y="109728"/>
-            <a:ext cx="11247120" cy="1078992"/>
-          </a:xfrm>
-          <a:prstGeom prst="rect">
-            <a:avLst/>
-          </a:prstGeom>
-          <a:noFill/>
-        </p:spPr>
-        <p:txBody>
-          <a:bodyPr wrap="square">
-            <a:spAutoFit/>
-          </a:bodyPr>
-          <a:lstStyle/>
-          <a:p>
-            <a:pPr>
-              <a:defRPr sz="1000" b="1">
-                <a:solidFill>
-                  <a:srgbClr val="D97706"/>
-                </a:solidFill>
-                <a:latin typeface="Microsoft JhengHei"/>
-              </a:defRPr>
-            </a:pPr>
-            <a:r>
-              <a:t>SLIDE 16 / 16 ｜ 全課總結：談判前一頁紙與 13 項待辦行動池 (#001–#008)</a:t>
-            </a:r>
-          </a:p>
-          <a:p>
-            <a:pPr>
-              <a:defRPr sz="1800" b="1">
-                <a:solidFill>
-                  <a:srgbClr val="FFFFFF"/>
-                </a:solidFill>
-                <a:latin typeface="Microsoft JhengHei"/>
-              </a:defRPr>
-            </a:pPr>
-            <a:r>
-              <a:t>全課總結與落地行動：將「替代方案、條款三級分類、底線與目標」收斂為「談判前一頁紙」，實現利益與尊重兼得</a:t>
-            </a:r>
-          </a:p>
-        </p:txBody>
-      </p:sp>
-      <p:sp>
-        <p:nvSpPr>
-          <p:cNvPr id="6" name="Rounded Rectangle 5"/>
-          <p:cNvSpPr/>
-          <p:nvPr/>
-        </p:nvSpPr>
-        <p:spPr>
-          <a:xfrm>
-            <a:off x="457200" y="1444752"/>
-            <a:ext cx="3611880" cy="2240280"/>
-          </a:xfrm>
-          <a:prstGeom prst="roundRect">
-            <a:avLst/>
-          </a:prstGeom>
-          <a:solidFill>
-            <a:srgbClr val="FFFFFF"/>
-          </a:solidFill>
-          <a:ln w="19050">
-            <a:solidFill>
-              <a:srgbClr val="0066CC"/>
-            </a:solidFill>
-          </a:ln>
-        </p:spPr>
-        <p:style>
-          <a:lnRef idx="1">
-            <a:schemeClr val="accent1"/>
-          </a:lnRef>
-          <a:fillRef idx="3">
-            <a:schemeClr val="accent1"/>
-          </a:fillRef>
-          <a:effectRef idx="2">
-            <a:schemeClr val="accent1"/>
-          </a:effectRef>
-          <a:fontRef idx="minor">
-            <a:schemeClr val="lt1"/>
-          </a:fontRef>
-        </p:style>
-        <p:txBody>
-          <a:bodyPr rtlCol="0" anchor="ctr"/>
-          <a:lstStyle/>
-          <a:p>
-            <a:pPr algn="ctr"/>
-          </a:p>
-        </p:txBody>
-      </p:sp>
-      <p:sp>
-        <p:nvSpPr>
-          <p:cNvPr id="7" name="TextBox 6"/>
-          <p:cNvSpPr txBox="1"/>
-          <p:nvPr/>
-        </p:nvSpPr>
-        <p:spPr>
-          <a:xfrm>
-            <a:off x="594360" y="1554480"/>
-            <a:ext cx="3337560" cy="2020824"/>
-          </a:xfrm>
-          <a:prstGeom prst="rect">
-            <a:avLst/>
-          </a:prstGeom>
-          <a:noFill/>
-        </p:spPr>
-        <p:txBody>
-          <a:bodyPr wrap="square">
-            <a:spAutoFit/>
-          </a:bodyPr>
-          <a:lstStyle/>
-          <a:p>
-            <a:pPr>
-              <a:defRPr sz="1300" b="1">
-                <a:solidFill>
-                  <a:srgbClr val="051C2C"/>
-                </a:solidFill>
-                <a:latin typeface="Microsoft JhengHei"/>
-              </a:defRPr>
-            </a:pPr>
-            <a:r>
-              <a:t>▪ 五格「談判前一頁紙」作戰畫布（#008 首要行動）</a:t>
-            </a:r>
-          </a:p>
-          <a:p>
-            <a:pPr>
-              <a:defRPr sz="1100">
-                <a:solidFill>
-                  <a:srgbClr val="334155"/>
-                </a:solidFill>
-                <a:latin typeface="Microsoft JhengHei"/>
-              </a:defRPr>
-            </a:pPr>
-            <a:r>
-              <a:t>① 底線價（機會成本）、目標價與3條理由＋談崩替代方案；② 20+可談條款分主要/次要/底線；③ 對方橘子皮顧慮與2題假設題；④ 第三方價值鏈與ABC三方案（對準拍板/評估/執行人）；⑤ 2句拒絕公式與防禦預案。</a:t>
-            </a:r>
-          </a:p>
-        </p:txBody>
-      </p:sp>
-      <p:sp>
-        <p:nvSpPr>
-          <p:cNvPr id="8" name="Rounded Rectangle 7"/>
-          <p:cNvSpPr/>
-          <p:nvPr/>
-        </p:nvSpPr>
-        <p:spPr>
-          <a:xfrm>
-            <a:off x="4288536" y="1444752"/>
-            <a:ext cx="3611880" cy="2240280"/>
-          </a:xfrm>
-          <a:prstGeom prst="roundRect">
-            <a:avLst/>
-          </a:prstGeom>
-          <a:solidFill>
-            <a:srgbClr val="FFFFFF"/>
-          </a:solidFill>
-          <a:ln w="19050">
-            <a:solidFill>
-              <a:srgbClr val="0066CC"/>
-            </a:solidFill>
-          </a:ln>
-        </p:spPr>
-        <p:style>
-          <a:lnRef idx="1">
-            <a:schemeClr val="accent1"/>
-          </a:lnRef>
-          <a:fillRef idx="3">
-            <a:schemeClr val="accent1"/>
-          </a:fillRef>
-          <a:effectRef idx="2">
-            <a:schemeClr val="accent1"/>
-          </a:effectRef>
-          <a:fontRef idx="minor">
-            <a:schemeClr val="lt1"/>
-          </a:fontRef>
-        </p:style>
-        <p:txBody>
-          <a:bodyPr rtlCol="0" anchor="ctr"/>
-          <a:lstStyle/>
-          <a:p>
-            <a:pPr algn="ctr"/>
-          </a:p>
-        </p:txBody>
-      </p:sp>
-      <p:sp>
-        <p:nvSpPr>
-          <p:cNvPr id="9" name="TextBox 8"/>
-          <p:cNvSpPr txBox="1"/>
-          <p:nvPr/>
-        </p:nvSpPr>
-        <p:spPr>
-          <a:xfrm>
-            <a:off x="4425696" y="1554480"/>
-            <a:ext cx="3337560" cy="2020824"/>
-          </a:xfrm>
-          <a:prstGeom prst="rect">
-            <a:avLst/>
-          </a:prstGeom>
-          <a:noFill/>
-        </p:spPr>
-        <p:txBody>
-          <a:bodyPr wrap="square">
-            <a:spAutoFit/>
-          </a:bodyPr>
-          <a:lstStyle/>
-          <a:p>
-            <a:pPr>
-              <a:defRPr sz="1300" b="1">
-                <a:solidFill>
-                  <a:srgbClr val="051C2C"/>
-                </a:solidFill>
-                <a:latin typeface="Microsoft JhengHei"/>
-              </a:defRPr>
-            </a:pPr>
-            <a:r>
-              <a:t>▪ 光電 EPC 採購與業主合約立即套用標的</a:t>
-            </a:r>
-          </a:p>
-          <a:p>
-            <a:pPr>
-              <a:defRPr sz="1100">
-                <a:solidFill>
-                  <a:srgbClr val="334155"/>
-                </a:solidFill>
-                <a:latin typeface="Microsoft JhengHei"/>
-              </a:defRPr>
-            </a:pPr>
-            <a:r>
-              <a:t>採購端：模組、逆變器、施工分包（對照5家報價拆解成本反推底價）。業主端：EPC 標準合約條款分級與綠電/光儲第三方價值鏈共創。</a:t>
-            </a:r>
-          </a:p>
-        </p:txBody>
-      </p:sp>
-      <p:sp>
-        <p:nvSpPr>
-          <p:cNvPr id="10" name="Rounded Rectangle 9"/>
-          <p:cNvSpPr/>
-          <p:nvPr/>
-        </p:nvSpPr>
-        <p:spPr>
-          <a:xfrm>
-            <a:off x="8119872" y="1444752"/>
-            <a:ext cx="3611880" cy="2240280"/>
-          </a:xfrm>
-          <a:prstGeom prst="roundRect">
-            <a:avLst/>
-          </a:prstGeom>
-          <a:solidFill>
-            <a:srgbClr val="FFFFFF"/>
-          </a:solidFill>
-          <a:ln w="19050">
-            <a:solidFill>
-              <a:srgbClr val="D97706"/>
-            </a:solidFill>
-          </a:ln>
-        </p:spPr>
-        <p:style>
-          <a:lnRef idx="1">
-            <a:schemeClr val="accent1"/>
-          </a:lnRef>
-          <a:fillRef idx="3">
-            <a:schemeClr val="accent1"/>
-          </a:fillRef>
-          <a:effectRef idx="2">
-            <a:schemeClr val="accent1"/>
-          </a:effectRef>
-          <a:fontRef idx="minor">
-            <a:schemeClr val="lt1"/>
-          </a:fontRef>
-        </p:style>
-        <p:txBody>
-          <a:bodyPr rtlCol="0" anchor="ctr"/>
-          <a:lstStyle/>
-          <a:p>
-            <a:pPr algn="ctr"/>
-          </a:p>
-        </p:txBody>
-      </p:sp>
-      <p:sp>
-        <p:nvSpPr>
-          <p:cNvPr id="11" name="TextBox 10"/>
-          <p:cNvSpPr txBox="1"/>
-          <p:nvPr/>
-        </p:nvSpPr>
-        <p:spPr>
-          <a:xfrm>
-            <a:off x="8257032" y="1554480"/>
-            <a:ext cx="3337560" cy="2020824"/>
-          </a:xfrm>
-          <a:prstGeom prst="rect">
-            <a:avLst/>
-          </a:prstGeom>
-          <a:noFill/>
-        </p:spPr>
-        <p:txBody>
-          <a:bodyPr wrap="square">
-            <a:spAutoFit/>
-          </a:bodyPr>
-          <a:lstStyle/>
-          <a:p>
-            <a:pPr>
-              <a:defRPr sz="1300" b="1">
-                <a:solidFill>
-                  <a:srgbClr val="D97706"/>
-                </a:solidFill>
-                <a:latin typeface="Microsoft JhengHei"/>
-              </a:defRPr>
-            </a:pPr>
-            <a:r>
-              <a:t>▪ 全課最高境界：利益與尊重兼得</a:t>
-            </a:r>
-          </a:p>
-          <a:p>
-            <a:pPr>
-              <a:defRPr sz="1100">
-                <a:solidFill>
-                  <a:srgbClr val="334155"/>
-                </a:solidFill>
-                <a:latin typeface="Microsoft JhengHei"/>
-              </a:defRPr>
-            </a:pPr>
-            <a:r>
-              <a:t>保持「態度要誠懇，立場要堅定，身段要柔軟」，做一個原則性強、守信、專注找解決方案的「可靠」談判高手。</a:t>
+              <a:t>桌上達成協議後，須同步建立合約履約里程碑與變更索賠護欄，並以平等互惠原則維護長期商業合作。</a:t>
             </a:r>
           </a:p>
         </p:txBody>
@@ -11868,7 +10934,7 @@
                         </a:defRPr>
                       </a:pPr>
                       <a:r>
-                        <a:t>優先級</a:t>
+                        <a:t>邏輯因果鏈</a:t>
                       </a:r>
                     </a:p>
                   </a:txBody>
@@ -11892,7 +10958,7 @@
                         </a:defRPr>
                       </a:pPr>
                       <a:r>
-                        <a:t>來源編號</a:t>
+                        <a:t>前段基礎工具（因）</a:t>
                       </a:r>
                     </a:p>
                   </a:txBody>
@@ -11916,7 +10982,7 @@
                         </a:defRPr>
                       </a:pPr>
                       <a:r>
-                        <a:t>David 談判協商核心待辦行動（節錄自全 13 項行動池）</a:t>
+                        <a:t>後段高階表現（果）</a:t>
                       </a:r>
                     </a:p>
                   </a:txBody>
@@ -11940,7 +11006,7 @@
                         </a:defRPr>
                       </a:pPr>
                       <a:r>
-                        <a:t>驗證標準與交付物</a:t>
+                        <a:t>B2B 商務管理實戰意涵</a:t>
                       </a:r>
                     </a:p>
                   </a:txBody>
@@ -11966,7 +11032,7 @@
                         </a:defRPr>
                       </a:pPr>
                       <a:r>
-                        <a:t>高 P0</a:t>
+                        <a:t>因果鏈 1 &amp; 2</a:t>
                       </a:r>
                     </a:p>
                   </a:txBody>
@@ -11990,7 +11056,7 @@
                         </a:defRPr>
                       </a:pPr>
                       <a:r>
-                        <a:t>#003 / #008</a:t>
+                        <a:t>第2講：底線＝機會成本 / 第3講：談崩退路</a:t>
                       </a:r>
                     </a:p>
                   </a:txBody>
@@ -12014,7 +11080,7 @@
                         </a:defRPr>
                       </a:pPr>
                       <a:r>
-                        <a:t>為下一筆主要採購（模組/逆變器/分包）寫出底線、目標與3條理由，合成「談判前一頁紙」</a:t>
+                        <a:t>➔ 第5講：沒有非成交不可的離桌底氣</a:t>
                       </a:r>
                     </a:p>
                   </a:txBody>
@@ -12038,7 +11104,7 @@
                         </a:defRPr>
                       </a:pPr>
                       <a:r>
-                        <a:t>產出 1 頁標準化談判前作戰表</a:t>
+                        <a:t>唯有會前開發出實質備選方案，桌上才能無懼破局</a:t>
                       </a:r>
                     </a:p>
                   </a:txBody>
@@ -12064,7 +11130,7 @@
                         </a:defRPr>
                       </a:pPr>
                       <a:r>
-                        <a:t>高 P0</a:t>
+                        <a:t>因果鏈 3</a:t>
                       </a:r>
                     </a:p>
                   </a:txBody>
@@ -12088,7 +11154,7 @@
                         </a:defRPr>
                       </a:pPr>
                       <a:r>
-                        <a:t>#004</a:t>
+                        <a:t>第1講：表面訴求 ≠ 真實需求（分橘子）</a:t>
                       </a:r>
                     </a:p>
                   </a:txBody>
@@ -12112,7 +11178,7 @@
                         </a:defRPr>
                       </a:pPr>
                       <a:r>
-                        <a:t>把 EPC 標準合約可談條款全部列成清單，逐條標主要目標／次要目標／底線</a:t>
+                        <a:t>➔ 第3講：假設提問 ➔ 第4講：價值鏈三角形</a:t>
                       </a:r>
                     </a:p>
                   </a:txBody>
@@ -12136,7 +11202,7 @@
                         </a:defRPr>
                       </a:pPr>
                       <a:r>
-                        <a:t>完成 20+ 項合約條款三級分類表</a:t>
+                        <a:t>對真實動機挖掘越深，互利交換與增量空間越大</a:t>
                       </a:r>
                     </a:p>
                   </a:txBody>
@@ -12162,7 +11228,7 @@
                         </a:defRPr>
                       </a:pPr>
                       <a:r>
-                        <a:t>高 P0</a:t>
+                        <a:t>因果鏈 4–6</a:t>
                       </a:r>
                     </a:p>
                   </a:txBody>
@@ -12186,7 +11252,7 @@
                         </a:defRPr>
                       </a:pPr>
                       <a:r>
-                        <a:t>#006 / #007</a:t>
+                        <a:t>第2講：單價卡死 ➔ 第3講：多維條款交換</a:t>
                       </a:r>
                     </a:p>
                   </a:txBody>
@@ -12210,7 +11276,7 @@
                         </a:defRPr>
                       </a:pPr>
                       <a:r>
-                        <a:t>寫下「談崩替代方案與對方離桌率」；用「拒絕公式」為單價、工期預寫2句話術</a:t>
+                        <a:t>➔ 第4講：把餅做大 ➔ 回歸價格分配</a:t>
                       </a:r>
                     </a:p>
                   </a:txBody>
@@ -12234,7 +11300,7 @@
                         </a:defRPr>
                       </a:pPr>
                       <a:r>
-                        <a:t>進場前備妥離桌底案與關門指路話術</a:t>
+                        <a:t>打破單一維度死結，跨層創造增量後再行合理分配</a:t>
                       </a:r>
                     </a:p>
                   </a:txBody>
@@ -12260,7 +11326,7 @@
                         </a:defRPr>
                       </a:pPr>
                       <a:r>
-                        <a:t>中 P1</a:t>
+                        <a:t>因果鏈 7 &amp; 8</a:t>
                       </a:r>
                     </a:p>
                   </a:txBody>
@@ -12284,7 +11350,7 @@
                         </a:defRPr>
                       </a:pPr>
                       <a:r>
-                        <a:t>#003 / #005</a:t>
+                        <a:t>第2–3講：遞減與條件讓步 / 第5講：對事不對人</a:t>
                       </a:r>
                     </a:p>
                   </a:txBody>
@@ -12308,7 +11374,7 @@
                         </a:defRPr>
                       </a:pPr>
                       <a:r>
-                        <a:t>對照5家報價拆解成本結構；挑卡關案畫第三方價值鏈並拆成 A/B/C 三方案對準三角色</a:t>
+                        <a:t>➔ 第6講：「如果…就…」＋ 三柱姿態</a:t>
                       </a:r>
                     </a:p>
                   </a:txBody>
@@ -12332,7 +11398,7 @@
                         </a:defRPr>
                       </a:pPr>
                       <a:r>
-                        <a:t>完成成本反推表與 A/B/C 提案簡報</a:t>
+                        <a:t>內在讓步紀律與心理防線，透過精準話術與肢體展現</a:t>
                       </a:r>
                     </a:p>
                   </a:txBody>
@@ -12378,7 +11444,7 @@
               </a:defRPr>
             </a:pPr>
             <a:r>
-              <a:t>大衛雲 2.0 談判協商知識庫 (A2.6.4) ｜ COURSE #001 湯君健《有效提升你的談判能力》 ｜ McKinsey Executive Briefing • Slide 16 of 16</a:t>
+              <a:t>商務談判協商知識庫 ｜ COURSE #001 湯君健《有效提升你的談判能力》 ｜ McKinsey Executive Briefing Standard • Slide 15 of 16</a:t>
             </a:r>
           </a:p>
         </p:txBody>
@@ -12391,7 +11457,7 @@
 </p:sld>
 </file>
 
-<file path=ppt/slides/slide2.xml><?xml version="1.0" encoding="utf-8"?>
+<file path=ppt/slides/slide16.xml><?xml version="1.0" encoding="utf-8"?>
 <p:sld xmlns:a="http://schemas.openxmlformats.org/drawingml/2006/main" xmlns:p="http://schemas.openxmlformats.org/presentationml/2006/main" xmlns:r="http://schemas.openxmlformats.org/officeDocument/2006/relationships">
   <p:cSld>
     <p:spTree>
@@ -12561,7 +11627,7 @@
               </a:defRPr>
             </a:pPr>
             <a:r>
-              <a:t>SLIDE 02 / 16 ｜ 全課邏輯骨架：一核心、三層、兩道防線 (#008)</a:t>
+              <a:t>SLIDE 16 / 16 ｜ LEVEL 1–3 全員實戰 ｜ 全課總結：談判前一頁紙作戰畫布</a:t>
             </a:r>
           </a:p>
           <a:p>
@@ -12574,7 +11640,7 @@
               </a:defRPr>
             </a:pPr>
             <a:r>
-              <a:t>全課邏輯骨架：以「我要」為核心，串聯價格、條件、價值三層循環模型，並由心態與姿態築起兩道防線</a:t>
+              <a:t>全課總結與落地工具：將「替代方案、條款三級分類、底線與拒絕公式」收斂為「談判前一頁紙」，實現利益與尊重兼得</a:t>
             </a:r>
           </a:p>
         </p:txBody>
@@ -12655,7 +11721,7 @@
               </a:defRPr>
             </a:pPr>
             <a:r>
-              <a:t>▪ 一核心 ＋ 三層動態循環模型</a:t>
+              <a:t>▪ 五格「談判前一頁紙」標準作戰畫布</a:t>
             </a:r>
           </a:p>
           <a:p>
@@ -12668,7 +11734,7 @@
               </a:defRPr>
             </a:pPr>
             <a:r>
-              <a:t>核心：以「我要」為先。三層由簡到繁：L1 價格談判（零和）→ L2 條件/交換談判（多條款）→ L3 價值談判（做大餅）→ 做大後仍回到 L1 價格分配。</a:t>
+              <a:t>① 目標價(附3理由)、底線價(機會成本)與談崩退路；② 15~20項可談條款分主要/次要/底線；③ 對方深層需求與2道假設題；④ 第三方價值鏈與A/B/C三方案(對應三角色)；⑤ 預寫2句拒絕公式。</a:t>
             </a:r>
           </a:p>
         </p:txBody>
@@ -12749,7 +11815,7 @@
               </a:defRPr>
             </a:pPr>
             <a:r>
-              <a:t>▪ 內外兩道防線（共用於三層模型）</a:t>
+              <a:t>▪ 從入門到進階的黃金行動槓桿</a:t>
             </a:r>
           </a:p>
           <a:p>
@@ -12762,7 +11828,7 @@
               </a:defRPr>
             </a:pPr>
             <a:r>
-              <a:t>防線一（第5講內在心態）：沒有非成交不可、對事不對人、識破五種心理戰。防線二（第6講外在表達）：誠懇/堅定/柔軟、拒絕公式、「如果…就…」。</a:t>
+              <a:t>在下一場重要商務協商（採購議價、大客戶簽約、跨部門資源爭取或職場談薪）前，花 15 分鐘填妥五格畫布，將方法論轉化為標準動作。</a:t>
             </a:r>
           </a:p>
         </p:txBody>
@@ -12843,7 +11909,7 @@
               </a:defRPr>
             </a:pPr>
             <a:r>
-              <a:t>▪ 顧問識別之課程空白與術語校準</a:t>
+              <a:t>▪ 全課最高境界：利益與尊重兼得</a:t>
             </a:r>
           </a:p>
           <a:p>
@@ -12856,7 +11922,1039 @@
               </a:defRPr>
             </a:pPr>
             <a:r>
-              <a:t>發刊詞與第6講稱「交換類談判」即第3講「條件類談判」。原課未展開談判後履約覆盤，且談判前清單僅提及未列表，已於第16頁收斂為「談判前一頁紙」。</a:t>
+              <a:t>貫徹「態度要誠懇，立場要堅定，身段要柔軟」，成為一名原則明確、重信守諾、專注共創解決方案的「可靠」談判專家。</a:t>
+            </a:r>
+          </a:p>
+        </p:txBody>
+      </p:sp>
+      <p:graphicFrame>
+        <p:nvGraphicFramePr>
+          <p:cNvPr id="12" name="Table 11"/>
+          <p:cNvGraphicFramePr>
+            <a:graphicFrameLocks noGrp="1"/>
+          </p:cNvGraphicFramePr>
+          <p:nvPr/>
+        </p:nvGraphicFramePr>
+        <p:xfrm>
+          <a:off x="457200" y="3858768"/>
+          <a:ext cx="11274552" cy="2423160"/>
+        </p:xfrm>
+        <a:graphic>
+          <a:graphicData uri="http://schemas.openxmlformats.org/drawingml/2006/table">
+            <a:tbl>
+              <a:tblPr firstRow="1" bandRow="1">
+                <a:tableStyleId>{5C22544A-7EE6-4342-B048-85BDC9FD1C3A}</a:tableStyleId>
+              </a:tblPr>
+              <a:tblGrid>
+                <a:gridCol w="2818638"/>
+                <a:gridCol w="2818638"/>
+                <a:gridCol w="2818638"/>
+                <a:gridCol w="2818638"/>
+              </a:tblGrid>
+              <a:tr h="484632">
+                <a:tc>
+                  <a:txBody>
+                    <a:bodyPr/>
+                    <a:lstStyle/>
+                    <a:p>
+                      <a:pPr>
+                        <a:defRPr sz="1100" b="1">
+                          <a:solidFill>
+                            <a:srgbClr val="FFFFFF"/>
+                          </a:solidFill>
+                          <a:latin typeface="Microsoft JhengHei"/>
+                        </a:defRPr>
+                      </a:pPr>
+                      <a:r>
+                        <a:t>優先級別</a:t>
+                      </a:r>
+                    </a:p>
+                  </a:txBody>
+                  <a:tcPr>
+                    <a:solidFill>
+                      <a:srgbClr val="051C2C"/>
+                    </a:solidFill>
+                  </a:tcPr>
+                </a:tc>
+                <a:tc>
+                  <a:txBody>
+                    <a:bodyPr/>
+                    <a:lstStyle/>
+                    <a:p>
+                      <a:pPr>
+                        <a:defRPr sz="1100" b="1">
+                          <a:solidFill>
+                            <a:srgbClr val="FFFFFF"/>
+                          </a:solidFill>
+                          <a:latin typeface="Microsoft JhengHei"/>
+                        </a:defRPr>
+                      </a:pPr>
+                      <a:r>
+                        <a:t>適用能力階段</a:t>
+                      </a:r>
+                    </a:p>
+                  </a:txBody>
+                  <a:tcPr>
+                    <a:solidFill>
+                      <a:srgbClr val="051C2C"/>
+                    </a:solidFill>
+                  </a:tcPr>
+                </a:tc>
+                <a:tc>
+                  <a:txBody>
+                    <a:bodyPr/>
+                    <a:lstStyle/>
+                    <a:p>
+                      <a:pPr>
+                        <a:defRPr sz="1100" b="1">
+                          <a:solidFill>
+                            <a:srgbClr val="FFFFFF"/>
+                          </a:solidFill>
+                          <a:latin typeface="Microsoft JhengHei"/>
+                        </a:defRPr>
+                      </a:pPr>
+                      <a:r>
+                        <a:t>課後立即落地行動清單（Actionable Checklist）</a:t>
+                      </a:r>
+                    </a:p>
+                  </a:txBody>
+                  <a:tcPr>
+                    <a:solidFill>
+                      <a:srgbClr val="051C2C"/>
+                    </a:solidFill>
+                  </a:tcPr>
+                </a:tc>
+                <a:tc>
+                  <a:txBody>
+                    <a:bodyPr/>
+                    <a:lstStyle/>
+                    <a:p>
+                      <a:pPr>
+                        <a:defRPr sz="1100" b="1">
+                          <a:solidFill>
+                            <a:srgbClr val="FFFFFF"/>
+                          </a:solidFill>
+                          <a:latin typeface="Microsoft JhengHei"/>
+                        </a:defRPr>
+                      </a:pPr>
+                      <a:r>
+                        <a:t>預期實戰效益與檢核標準</a:t>
+                      </a:r>
+                    </a:p>
+                  </a:txBody>
+                  <a:tcPr>
+                    <a:solidFill>
+                      <a:srgbClr val="051C2C"/>
+                    </a:solidFill>
+                  </a:tcPr>
+                </a:tc>
+              </a:tr>
+              <a:tr h="484632">
+                <a:tc>
+                  <a:txBody>
+                    <a:bodyPr/>
+                    <a:lstStyle/>
+                    <a:p>
+                      <a:pPr>
+                        <a:defRPr sz="1050" b="1">
+                          <a:solidFill>
+                            <a:srgbClr val="051C2C"/>
+                          </a:solidFill>
+                          <a:latin typeface="Microsoft JhengHei"/>
+                        </a:defRPr>
+                      </a:pPr>
+                      <a:r>
+                        <a:t>P0 必做</a:t>
+                      </a:r>
+                    </a:p>
+                  </a:txBody>
+                  <a:tcPr>
+                    <a:solidFill>
+                      <a:srgbClr val="FFFFFF"/>
+                    </a:solidFill>
+                  </a:tcPr>
+                </a:tc>
+                <a:tc>
+                  <a:txBody>
+                    <a:bodyPr/>
+                    <a:lstStyle/>
+                    <a:p>
+                      <a:pPr>
+                        <a:defRPr sz="1050" b="0">
+                          <a:solidFill>
+                            <a:srgbClr val="051C2C"/>
+                          </a:solidFill>
+                          <a:latin typeface="Microsoft JhengHei"/>
+                        </a:defRPr>
+                      </a:pPr>
+                      <a:r>
+                        <a:t>L1–L3 全員必備</a:t>
+                      </a:r>
+                    </a:p>
+                  </a:txBody>
+                  <a:tcPr>
+                    <a:solidFill>
+                      <a:srgbClr val="FFFFFF"/>
+                    </a:solidFill>
+                  </a:tcPr>
+                </a:tc>
+                <a:tc>
+                  <a:txBody>
+                    <a:bodyPr/>
+                    <a:lstStyle/>
+                    <a:p>
+                      <a:pPr>
+                        <a:defRPr sz="1050" b="0">
+                          <a:solidFill>
+                            <a:srgbClr val="051C2C"/>
+                          </a:solidFill>
+                          <a:latin typeface="Microsoft JhengHei"/>
+                        </a:defRPr>
+                      </a:pPr>
+                      <a:r>
+                        <a:t>為下一筆關鍵協商填寫「談判前一頁紙」：寫出底線價(機會成本)、目標價與 3 條理由</a:t>
+                      </a:r>
+                    </a:p>
+                  </a:txBody>
+                  <a:tcPr>
+                    <a:solidFill>
+                      <a:srgbClr val="FFFFFF"/>
+                    </a:solidFill>
+                  </a:tcPr>
+                </a:tc>
+                <a:tc>
+                  <a:txBody>
+                    <a:bodyPr/>
+                    <a:lstStyle/>
+                    <a:p>
+                      <a:pPr>
+                        <a:defRPr sz="1050" b="0">
+                          <a:solidFill>
+                            <a:srgbClr val="051C2C"/>
+                          </a:solidFill>
+                          <a:latin typeface="Microsoft JhengHei"/>
+                        </a:defRPr>
+                      </a:pPr>
+                      <a:r>
+                        <a:t>進場前建立清晰價格尺子，杜絕心虛解釋與盲目讓步</a:t>
+                      </a:r>
+                    </a:p>
+                  </a:txBody>
+                  <a:tcPr>
+                    <a:solidFill>
+                      <a:srgbClr val="FFFFFF"/>
+                    </a:solidFill>
+                  </a:tcPr>
+                </a:tc>
+              </a:tr>
+              <a:tr h="484632">
+                <a:tc>
+                  <a:txBody>
+                    <a:bodyPr/>
+                    <a:lstStyle/>
+                    <a:p>
+                      <a:pPr>
+                        <a:defRPr sz="1050" b="1">
+                          <a:solidFill>
+                            <a:srgbClr val="051C2C"/>
+                          </a:solidFill>
+                          <a:latin typeface="Microsoft JhengHei"/>
+                        </a:defRPr>
+                      </a:pPr>
+                      <a:r>
+                        <a:t>P0 必做</a:t>
+                      </a:r>
+                    </a:p>
+                  </a:txBody>
+                  <a:tcPr>
+                    <a:solidFill>
+                      <a:srgbClr val="EFF6FF"/>
+                    </a:solidFill>
+                  </a:tcPr>
+                </a:tc>
+                <a:tc>
+                  <a:txBody>
+                    <a:bodyPr/>
+                    <a:lstStyle/>
+                    <a:p>
+                      <a:pPr>
+                        <a:defRPr sz="1050" b="0">
+                          <a:solidFill>
+                            <a:srgbClr val="051C2C"/>
+                          </a:solidFill>
+                          <a:latin typeface="Microsoft JhengHei"/>
+                        </a:defRPr>
+                      </a:pPr>
+                      <a:r>
+                        <a:t>L2 進階實戰</a:t>
+                      </a:r>
+                    </a:p>
+                  </a:txBody>
+                  <a:tcPr>
+                    <a:solidFill>
+                      <a:srgbClr val="EFF6FF"/>
+                    </a:solidFill>
+                  </a:tcPr>
+                </a:tc>
+                <a:tc>
+                  <a:txBody>
+                    <a:bodyPr/>
+                    <a:lstStyle/>
+                    <a:p>
+                      <a:pPr>
+                        <a:defRPr sz="1050" b="0">
+                          <a:solidFill>
+                            <a:srgbClr val="051C2C"/>
+                          </a:solidFill>
+                          <a:latin typeface="Microsoft JhengHei"/>
+                        </a:defRPr>
+                      </a:pPr>
+                      <a:r>
+                        <a:t>將合約可談條款列為 15～20 項清單並標註主要/次要/底線，預備 2 道二選一假設題</a:t>
+                      </a:r>
+                    </a:p>
+                  </a:txBody>
+                  <a:tcPr>
+                    <a:solidFill>
+                      <a:srgbClr val="EFF6FF"/>
+                    </a:solidFill>
+                  </a:tcPr>
+                </a:tc>
+                <a:tc>
+                  <a:txBody>
+                    <a:bodyPr/>
+                    <a:lstStyle/>
+                    <a:p>
+                      <a:pPr>
+                        <a:defRPr sz="1050" b="0">
+                          <a:solidFill>
+                            <a:srgbClr val="051C2C"/>
+                          </a:solidFill>
+                          <a:latin typeface="Microsoft JhengHei"/>
+                        </a:defRPr>
+                      </a:pPr>
+                      <a:r>
+                        <a:t>建立充足次要條款緩衝池，確保每次讓步皆能條件交換</a:t>
+                      </a:r>
+                    </a:p>
+                  </a:txBody>
+                  <a:tcPr>
+                    <a:solidFill>
+                      <a:srgbClr val="EFF6FF"/>
+                    </a:solidFill>
+                  </a:tcPr>
+                </a:tc>
+              </a:tr>
+              <a:tr h="484632">
+                <a:tc>
+                  <a:txBody>
+                    <a:bodyPr/>
+                    <a:lstStyle/>
+                    <a:p>
+                      <a:pPr>
+                        <a:defRPr sz="1050" b="1">
+                          <a:solidFill>
+                            <a:srgbClr val="051C2C"/>
+                          </a:solidFill>
+                          <a:latin typeface="Microsoft JhengHei"/>
+                        </a:defRPr>
+                      </a:pPr>
+                      <a:r>
+                        <a:t>P0 必做</a:t>
+                      </a:r>
+                    </a:p>
+                  </a:txBody>
+                  <a:tcPr>
+                    <a:solidFill>
+                      <a:srgbClr val="FFFFFF"/>
+                    </a:solidFill>
+                  </a:tcPr>
+                </a:tc>
+                <a:tc>
+                  <a:txBody>
+                    <a:bodyPr/>
+                    <a:lstStyle/>
+                    <a:p>
+                      <a:pPr>
+                        <a:defRPr sz="1050" b="0">
+                          <a:solidFill>
+                            <a:srgbClr val="051C2C"/>
+                          </a:solidFill>
+                          <a:latin typeface="Microsoft JhengHei"/>
+                        </a:defRPr>
+                      </a:pPr>
+                      <a:r>
+                        <a:t>L1–L2 入門至進階</a:t>
+                      </a:r>
+                    </a:p>
+                  </a:txBody>
+                  <a:tcPr>
+                    <a:solidFill>
+                      <a:srgbClr val="FFFFFF"/>
+                    </a:solidFill>
+                  </a:tcPr>
+                </a:tc>
+                <a:tc>
+                  <a:txBody>
+                    <a:bodyPr/>
+                    <a:lstStyle/>
+                    <a:p>
+                      <a:pPr>
+                        <a:defRPr sz="1050" b="0">
+                          <a:solidFill>
+                            <a:srgbClr val="051C2C"/>
+                          </a:solidFill>
+                          <a:latin typeface="Microsoft JhengHei"/>
+                        </a:defRPr>
+                      </a:pPr>
+                      <a:r>
+                        <a:t>寫下「談崩替代方案」；針對最常被砍的 2 項條款依「拒絕公式(關門＋指路)」預寫話術</a:t>
+                      </a:r>
+                    </a:p>
+                  </a:txBody>
+                  <a:tcPr>
+                    <a:solidFill>
+                      <a:srgbClr val="FFFFFF"/>
+                    </a:solidFill>
+                  </a:tcPr>
+                </a:tc>
+                <a:tc>
+                  <a:txBody>
+                    <a:bodyPr/>
+                    <a:lstStyle/>
+                    <a:p>
+                      <a:pPr>
+                        <a:defRPr sz="1050" b="0">
+                          <a:solidFill>
+                            <a:srgbClr val="051C2C"/>
+                          </a:solidFill>
+                          <a:latin typeface="Microsoft JhengHei"/>
+                        </a:defRPr>
+                      </a:pPr>
+                      <a:r>
+                        <a:t>消除非成交不可恐懼；守住底線同時自然導向替代方案</a:t>
+                      </a:r>
+                    </a:p>
+                  </a:txBody>
+                  <a:tcPr>
+                    <a:solidFill>
+                      <a:srgbClr val="FFFFFF"/>
+                    </a:solidFill>
+                  </a:tcPr>
+                </a:tc>
+              </a:tr>
+              <a:tr h="484632">
+                <a:tc>
+                  <a:txBody>
+                    <a:bodyPr/>
+                    <a:lstStyle/>
+                    <a:p>
+                      <a:pPr>
+                        <a:defRPr sz="1050" b="1">
+                          <a:solidFill>
+                            <a:srgbClr val="051C2C"/>
+                          </a:solidFill>
+                          <a:latin typeface="Microsoft JhengHei"/>
+                        </a:defRPr>
+                      </a:pPr>
+                      <a:r>
+                        <a:t>P1–P2 進階</a:t>
+                      </a:r>
+                    </a:p>
+                  </a:txBody>
+                  <a:tcPr>
+                    <a:solidFill>
+                      <a:srgbClr val="EFF6FF"/>
+                    </a:solidFill>
+                  </a:tcPr>
+                </a:tc>
+                <a:tc>
+                  <a:txBody>
+                    <a:bodyPr/>
+                    <a:lstStyle/>
+                    <a:p>
+                      <a:pPr>
+                        <a:defRPr sz="1050" b="0">
+                          <a:solidFill>
+                            <a:srgbClr val="051C2C"/>
+                          </a:solidFill>
+                          <a:latin typeface="Microsoft JhengHei"/>
+                        </a:defRPr>
+                      </a:pPr>
+                      <a:r>
+                        <a:t>L2–L3 高階破局</a:t>
+                      </a:r>
+                    </a:p>
+                  </a:txBody>
+                  <a:tcPr>
+                    <a:solidFill>
+                      <a:srgbClr val="EFF6FF"/>
+                    </a:solidFill>
+                  </a:tcPr>
+                </a:tc>
+                <a:tc>
+                  <a:txBody>
+                    <a:bodyPr/>
+                    <a:lstStyle/>
+                    <a:p>
+                      <a:pPr>
+                        <a:defRPr sz="1050" b="0">
+                          <a:solidFill>
+                            <a:srgbClr val="051C2C"/>
+                          </a:solidFill>
+                          <a:latin typeface="Microsoft JhengHei"/>
+                        </a:defRPr>
+                      </a:pPr>
+                      <a:r>
+                        <a:t>比對 5 家報價拆解成本結構；針對卡關專案繪製第三方價值鏈並設計 A/B/C 三方案</a:t>
+                      </a:r>
+                    </a:p>
+                  </a:txBody>
+                  <a:tcPr>
+                    <a:solidFill>
+                      <a:srgbClr val="EFF6FF"/>
+                    </a:solidFill>
+                  </a:tcPr>
+                </a:tc>
+                <a:tc>
+                  <a:txBody>
+                    <a:bodyPr/>
+                    <a:lstStyle/>
+                    <a:p>
+                      <a:pPr>
+                        <a:defRPr sz="1050" b="0">
+                          <a:solidFill>
+                            <a:srgbClr val="051C2C"/>
+                          </a:solidFill>
+                          <a:latin typeface="Microsoft JhengHei"/>
+                        </a:defRPr>
+                      </a:pPr>
+                      <a:r>
+                        <a:t>以客觀數據破解虛高溢價，以增量共創攻克組織決策鏈</a:t>
+                      </a:r>
+                    </a:p>
+                  </a:txBody>
+                  <a:tcPr>
+                    <a:solidFill>
+                      <a:srgbClr val="EFF6FF"/>
+                    </a:solidFill>
+                  </a:tcPr>
+                </a:tc>
+              </a:tr>
+            </a:tbl>
+          </a:graphicData>
+        </a:graphic>
+      </p:graphicFrame>
+      <p:sp>
+        <p:nvSpPr>
+          <p:cNvPr id="13" name="TextBox 12"/>
+          <p:cNvSpPr txBox="1"/>
+          <p:nvPr/>
+        </p:nvSpPr>
+        <p:spPr>
+          <a:xfrm>
+            <a:off x="457200" y="6446520"/>
+            <a:ext cx="11274552" cy="320040"/>
+          </a:xfrm>
+          <a:prstGeom prst="rect">
+            <a:avLst/>
+          </a:prstGeom>
+          <a:noFill/>
+        </p:spPr>
+        <p:txBody>
+          <a:bodyPr wrap="none">
+            <a:spAutoFit/>
+          </a:bodyPr>
+          <a:lstStyle/>
+          <a:p>
+            <a:pPr>
+              <a:defRPr sz="950">
+                <a:solidFill>
+                  <a:srgbClr val="64748B"/>
+                </a:solidFill>
+                <a:latin typeface="Microsoft JhengHei"/>
+              </a:defRPr>
+            </a:pPr>
+            <a:r>
+              <a:t>商務談判協商知識庫 ｜ COURSE #001 湯君健《有效提升你的談判能力》 ｜ McKinsey Executive Briefing Standard • Slide 16 of 16</a:t>
+            </a:r>
+          </a:p>
+        </p:txBody>
+      </p:sp>
+    </p:spTree>
+  </p:cSld>
+  <p:clrMapOvr>
+    <a:masterClrMapping/>
+  </p:clrMapOvr>
+</p:sld>
+</file>
+
+<file path=ppt/slides/slide2.xml><?xml version="1.0" encoding="utf-8"?>
+<p:sld xmlns:a="http://schemas.openxmlformats.org/drawingml/2006/main" xmlns:p="http://schemas.openxmlformats.org/presentationml/2006/main" xmlns:r="http://schemas.openxmlformats.org/officeDocument/2006/relationships">
+  <p:cSld>
+    <p:spTree>
+      <p:nvGrpSpPr>
+        <p:cNvPr id="1" name=""/>
+        <p:cNvGrpSpPr/>
+        <p:nvPr/>
+      </p:nvGrpSpPr>
+      <p:grpSpPr/>
+      <p:sp>
+        <p:nvSpPr>
+          <p:cNvPr id="2" name="Rectangle 1"/>
+          <p:cNvSpPr/>
+          <p:nvPr/>
+        </p:nvSpPr>
+        <p:spPr>
+          <a:xfrm>
+            <a:off x="0" y="0"/>
+            <a:ext cx="12191695" cy="6858000"/>
+          </a:xfrm>
+          <a:prstGeom prst="rect">
+            <a:avLst/>
+          </a:prstGeom>
+          <a:solidFill>
+            <a:srgbClr val="F4F6F9"/>
+          </a:solidFill>
+          <a:ln>
+            <a:noFill/>
+          </a:ln>
+        </p:spPr>
+        <p:style>
+          <a:lnRef idx="1">
+            <a:schemeClr val="accent1"/>
+          </a:lnRef>
+          <a:fillRef idx="3">
+            <a:schemeClr val="accent1"/>
+          </a:fillRef>
+          <a:effectRef idx="2">
+            <a:schemeClr val="accent1"/>
+          </a:effectRef>
+          <a:fontRef idx="minor">
+            <a:schemeClr val="lt1"/>
+          </a:fontRef>
+        </p:style>
+        <p:txBody>
+          <a:bodyPr rtlCol="0" anchor="ctr"/>
+          <a:lstStyle/>
+          <a:p>
+            <a:pPr algn="ctr"/>
+          </a:p>
+        </p:txBody>
+      </p:sp>
+      <p:sp>
+        <p:nvSpPr>
+          <p:cNvPr id="3" name="Rectangle 2"/>
+          <p:cNvSpPr/>
+          <p:nvPr/>
+        </p:nvSpPr>
+        <p:spPr>
+          <a:xfrm>
+            <a:off x="0" y="0"/>
+            <a:ext cx="12191695" cy="1234440"/>
+          </a:xfrm>
+          <a:prstGeom prst="rect">
+            <a:avLst/>
+          </a:prstGeom>
+          <a:solidFill>
+            <a:srgbClr val="051C2C"/>
+          </a:solidFill>
+          <a:ln>
+            <a:noFill/>
+          </a:ln>
+        </p:spPr>
+        <p:style>
+          <a:lnRef idx="1">
+            <a:schemeClr val="accent1"/>
+          </a:lnRef>
+          <a:fillRef idx="3">
+            <a:schemeClr val="accent1"/>
+          </a:fillRef>
+          <a:effectRef idx="2">
+            <a:schemeClr val="accent1"/>
+          </a:effectRef>
+          <a:fontRef idx="minor">
+            <a:schemeClr val="lt1"/>
+          </a:fontRef>
+        </p:style>
+        <p:txBody>
+          <a:bodyPr rtlCol="0" anchor="ctr"/>
+          <a:lstStyle/>
+          <a:p>
+            <a:pPr algn="ctr"/>
+          </a:p>
+        </p:txBody>
+      </p:sp>
+      <p:sp>
+        <p:nvSpPr>
+          <p:cNvPr id="4" name="Rectangle 3"/>
+          <p:cNvSpPr/>
+          <p:nvPr/>
+        </p:nvSpPr>
+        <p:spPr>
+          <a:xfrm>
+            <a:off x="0" y="1234440"/>
+            <a:ext cx="12191695" cy="45720"/>
+          </a:xfrm>
+          <a:prstGeom prst="rect">
+            <a:avLst/>
+          </a:prstGeom>
+          <a:solidFill>
+            <a:srgbClr val="D97706"/>
+          </a:solidFill>
+          <a:ln>
+            <a:noFill/>
+          </a:ln>
+        </p:spPr>
+        <p:style>
+          <a:lnRef idx="1">
+            <a:schemeClr val="accent1"/>
+          </a:lnRef>
+          <a:fillRef idx="3">
+            <a:schemeClr val="accent1"/>
+          </a:fillRef>
+          <a:effectRef idx="2">
+            <a:schemeClr val="accent1"/>
+          </a:effectRef>
+          <a:fontRef idx="minor">
+            <a:schemeClr val="lt1"/>
+          </a:fontRef>
+        </p:style>
+        <p:txBody>
+          <a:bodyPr rtlCol="0" anchor="ctr"/>
+          <a:lstStyle/>
+          <a:p>
+            <a:pPr algn="ctr"/>
+          </a:p>
+        </p:txBody>
+      </p:sp>
+      <p:sp>
+        <p:nvSpPr>
+          <p:cNvPr id="5" name="TextBox 4"/>
+          <p:cNvSpPr txBox="1"/>
+          <p:nvPr/>
+        </p:nvSpPr>
+        <p:spPr>
+          <a:xfrm>
+            <a:off x="457200" y="109728"/>
+            <a:ext cx="11247120" cy="1078992"/>
+          </a:xfrm>
+          <a:prstGeom prst="rect">
+            <a:avLst/>
+          </a:prstGeom>
+          <a:noFill/>
+        </p:spPr>
+        <p:txBody>
+          <a:bodyPr wrap="square">
+            <a:spAutoFit/>
+          </a:bodyPr>
+          <a:lstStyle/>
+          <a:p>
+            <a:pPr>
+              <a:defRPr sz="1000" b="1">
+                <a:solidFill>
+                  <a:srgbClr val="D97706"/>
+                </a:solidFill>
+                <a:latin typeface="Microsoft JhengHei"/>
+              </a:defRPr>
+            </a:pPr>
+            <a:r>
+              <a:t>SLIDE 02 / 16 ｜ LEVEL 1–3 全景架構 ｜ 一核心、三層循環、兩道防線</a:t>
+            </a:r>
+          </a:p>
+          <a:p>
+            <a:pPr>
+              <a:defRPr sz="1800" b="1">
+                <a:solidFill>
+                  <a:srgbClr val="FFFFFF"/>
+                </a:solidFill>
+                <a:latin typeface="Microsoft JhengHei"/>
+              </a:defRPr>
+            </a:pPr>
+            <a:r>
+              <a:t>全課戰略骨架：以「我要」為核心，串聯價格、條件、價值三層循環模型，並由心態與姿態築起兩道防線</a:t>
+            </a:r>
+          </a:p>
+        </p:txBody>
+      </p:sp>
+      <p:sp>
+        <p:nvSpPr>
+          <p:cNvPr id="6" name="Rounded Rectangle 5"/>
+          <p:cNvSpPr/>
+          <p:nvPr/>
+        </p:nvSpPr>
+        <p:spPr>
+          <a:xfrm>
+            <a:off x="457200" y="1444752"/>
+            <a:ext cx="3611880" cy="2240280"/>
+          </a:xfrm>
+          <a:prstGeom prst="roundRect">
+            <a:avLst/>
+          </a:prstGeom>
+          <a:solidFill>
+            <a:srgbClr val="FFFFFF"/>
+          </a:solidFill>
+          <a:ln w="19050">
+            <a:solidFill>
+              <a:srgbClr val="0066CC"/>
+            </a:solidFill>
+          </a:ln>
+        </p:spPr>
+        <p:style>
+          <a:lnRef idx="1">
+            <a:schemeClr val="accent1"/>
+          </a:lnRef>
+          <a:fillRef idx="3">
+            <a:schemeClr val="accent1"/>
+          </a:fillRef>
+          <a:effectRef idx="2">
+            <a:schemeClr val="accent1"/>
+          </a:effectRef>
+          <a:fontRef idx="minor">
+            <a:schemeClr val="lt1"/>
+          </a:fontRef>
+        </p:style>
+        <p:txBody>
+          <a:bodyPr rtlCol="0" anchor="ctr"/>
+          <a:lstStyle/>
+          <a:p>
+            <a:pPr algn="ctr"/>
+          </a:p>
+        </p:txBody>
+      </p:sp>
+      <p:sp>
+        <p:nvSpPr>
+          <p:cNvPr id="7" name="TextBox 6"/>
+          <p:cNvSpPr txBox="1"/>
+          <p:nvPr/>
+        </p:nvSpPr>
+        <p:spPr>
+          <a:xfrm>
+            <a:off x="594360" y="1554480"/>
+            <a:ext cx="3337560" cy="2020824"/>
+          </a:xfrm>
+          <a:prstGeom prst="rect">
+            <a:avLst/>
+          </a:prstGeom>
+          <a:noFill/>
+        </p:spPr>
+        <p:txBody>
+          <a:bodyPr wrap="square">
+            <a:spAutoFit/>
+          </a:bodyPr>
+          <a:lstStyle/>
+          <a:p>
+            <a:pPr>
+              <a:defRPr sz="1300" b="1">
+                <a:solidFill>
+                  <a:srgbClr val="051C2C"/>
+                </a:solidFill>
+                <a:latin typeface="Microsoft JhengHei"/>
+              </a:defRPr>
+            </a:pPr>
+            <a:r>
+              <a:t>▪ 一核心 ＋ 三層動態循環模型</a:t>
+            </a:r>
+          </a:p>
+          <a:p>
+            <a:pPr>
+              <a:defRPr sz="1100">
+                <a:solidFill>
+                  <a:srgbClr val="334155"/>
+                </a:solidFill>
+                <a:latin typeface="Microsoft JhengHei"/>
+              </a:defRPr>
+            </a:pPr>
+            <a:r>
+              <a:t>核心：以「我要」為先。三層由簡入繁：L1 價格談判（零和分配）→ L2 條件談判（多維交換）→ L3 價值談判（納入第三方把餅做大）→ 做大後回歸 L1 價格分配。</a:t>
+            </a:r>
+          </a:p>
+        </p:txBody>
+      </p:sp>
+      <p:sp>
+        <p:nvSpPr>
+          <p:cNvPr id="8" name="Rounded Rectangle 7"/>
+          <p:cNvSpPr/>
+          <p:nvPr/>
+        </p:nvSpPr>
+        <p:spPr>
+          <a:xfrm>
+            <a:off x="4288536" y="1444752"/>
+            <a:ext cx="3611880" cy="2240280"/>
+          </a:xfrm>
+          <a:prstGeom prst="roundRect">
+            <a:avLst/>
+          </a:prstGeom>
+          <a:solidFill>
+            <a:srgbClr val="FFFFFF"/>
+          </a:solidFill>
+          <a:ln w="19050">
+            <a:solidFill>
+              <a:srgbClr val="0066CC"/>
+            </a:solidFill>
+          </a:ln>
+        </p:spPr>
+        <p:style>
+          <a:lnRef idx="1">
+            <a:schemeClr val="accent1"/>
+          </a:lnRef>
+          <a:fillRef idx="3">
+            <a:schemeClr val="accent1"/>
+          </a:fillRef>
+          <a:effectRef idx="2">
+            <a:schemeClr val="accent1"/>
+          </a:effectRef>
+          <a:fontRef idx="minor">
+            <a:schemeClr val="lt1"/>
+          </a:fontRef>
+        </p:style>
+        <p:txBody>
+          <a:bodyPr rtlCol="0" anchor="ctr"/>
+          <a:lstStyle/>
+          <a:p>
+            <a:pPr algn="ctr"/>
+          </a:p>
+        </p:txBody>
+      </p:sp>
+      <p:sp>
+        <p:nvSpPr>
+          <p:cNvPr id="9" name="TextBox 8"/>
+          <p:cNvSpPr txBox="1"/>
+          <p:nvPr/>
+        </p:nvSpPr>
+        <p:spPr>
+          <a:xfrm>
+            <a:off x="4425696" y="1554480"/>
+            <a:ext cx="3337560" cy="2020824"/>
+          </a:xfrm>
+          <a:prstGeom prst="rect">
+            <a:avLst/>
+          </a:prstGeom>
+          <a:noFill/>
+        </p:spPr>
+        <p:txBody>
+          <a:bodyPr wrap="square">
+            <a:spAutoFit/>
+          </a:bodyPr>
+          <a:lstStyle/>
+          <a:p>
+            <a:pPr>
+              <a:defRPr sz="1300" b="1">
+                <a:solidFill>
+                  <a:srgbClr val="051C2C"/>
+                </a:solidFill>
+                <a:latin typeface="Microsoft JhengHei"/>
+              </a:defRPr>
+            </a:pPr>
+            <a:r>
+              <a:t>▪ 內外兩道防線（貫穿三層模型）</a:t>
+            </a:r>
+          </a:p>
+          <a:p>
+            <a:pPr>
+              <a:defRPr sz="1100">
+                <a:solidFill>
+                  <a:srgbClr val="334155"/>
+                </a:solidFill>
+                <a:latin typeface="Microsoft JhengHei"/>
+              </a:defRPr>
+            </a:pPr>
+            <a:r>
+              <a:t>防線一（第5講內在心態）：建立離桌底氣、對事不對人、破解五大心理戰。防線二（第6講外在姿態）：態度誠懇、立場堅定、身段柔軟，善用標準拒絕公式。</a:t>
+            </a:r>
+          </a:p>
+        </p:txBody>
+      </p:sp>
+      <p:sp>
+        <p:nvSpPr>
+          <p:cNvPr id="10" name="Rounded Rectangle 9"/>
+          <p:cNvSpPr/>
+          <p:nvPr/>
+        </p:nvSpPr>
+        <p:spPr>
+          <a:xfrm>
+            <a:off x="8119872" y="1444752"/>
+            <a:ext cx="3611880" cy="2240280"/>
+          </a:xfrm>
+          <a:prstGeom prst="roundRect">
+            <a:avLst/>
+          </a:prstGeom>
+          <a:solidFill>
+            <a:srgbClr val="FFFFFF"/>
+          </a:solidFill>
+          <a:ln w="19050">
+            <a:solidFill>
+              <a:srgbClr val="D97706"/>
+            </a:solidFill>
+          </a:ln>
+        </p:spPr>
+        <p:style>
+          <a:lnRef idx="1">
+            <a:schemeClr val="accent1"/>
+          </a:lnRef>
+          <a:fillRef idx="3">
+            <a:schemeClr val="accent1"/>
+          </a:fillRef>
+          <a:effectRef idx="2">
+            <a:schemeClr val="accent1"/>
+          </a:effectRef>
+          <a:fontRef idx="minor">
+            <a:schemeClr val="lt1"/>
+          </a:fontRef>
+        </p:style>
+        <p:txBody>
+          <a:bodyPr rtlCol="0" anchor="ctr"/>
+          <a:lstStyle/>
+          <a:p>
+            <a:pPr algn="ctr"/>
+          </a:p>
+        </p:txBody>
+      </p:sp>
+      <p:sp>
+        <p:nvSpPr>
+          <p:cNvPr id="11" name="TextBox 10"/>
+          <p:cNvSpPr txBox="1"/>
+          <p:nvPr/>
+        </p:nvSpPr>
+        <p:spPr>
+          <a:xfrm>
+            <a:off x="8257032" y="1554480"/>
+            <a:ext cx="3337560" cy="2020824"/>
+          </a:xfrm>
+          <a:prstGeom prst="rect">
+            <a:avLst/>
+          </a:prstGeom>
+          <a:noFill/>
+        </p:spPr>
+        <p:txBody>
+          <a:bodyPr wrap="square">
+            <a:spAutoFit/>
+          </a:bodyPr>
+          <a:lstStyle/>
+          <a:p>
+            <a:pPr>
+              <a:defRPr sz="1300" b="1">
+                <a:solidFill>
+                  <a:srgbClr val="D97706"/>
+                </a:solidFill>
+                <a:latin typeface="Microsoft JhengHei"/>
+              </a:defRPr>
+            </a:pPr>
+            <a:r>
+              <a:t>▪ 全週期合約控盤與延伸</a:t>
+            </a:r>
+          </a:p>
+          <a:p>
+            <a:pPr>
+              <a:defRPr sz="1100">
+                <a:solidFill>
+                  <a:srgbClr val="334155"/>
+                </a:solidFill>
+                <a:latin typeface="Microsoft JhengHei"/>
+              </a:defRPr>
+            </a:pPr>
+            <a:r>
+              <a:t>課程中之「條件類談判」與「交換類談判」實為同一概念。進階管理者於簽約後須同步建立履約里程碑檢核，確保協議成果完整落地。</a:t>
             </a:r>
           </a:p>
         </p:txBody>
@@ -12901,7 +12999,7 @@
                         </a:defRPr>
                       </a:pPr>
                       <a:r>
-                        <a:t>作戰維度</a:t>
+                        <a:t>作戰階段</a:t>
                       </a:r>
                     </a:p>
                   </a:txBody>
@@ -12925,7 +13023,7 @@
                         </a:defRPr>
                       </a:pPr>
                       <a:r>
-                        <a:t>#003 價格類談判</a:t>
+                        <a:t>L1 價格類談判（第 2 講）</a:t>
                       </a:r>
                     </a:p>
                   </a:txBody>
@@ -12949,7 +13047,7 @@
                         </a:defRPr>
                       </a:pPr>
                       <a:r>
-                        <a:t>#004 條件類談判</a:t>
+                        <a:t>L2 條件類談判（第 3 講）</a:t>
                       </a:r>
                     </a:p>
                   </a:txBody>
@@ -12973,7 +13071,7 @@
                         </a:defRPr>
                       </a:pPr>
                       <a:r>
-                        <a:t>#005 價值類談判</a:t>
+                        <a:t>L3 價值類談判（第 4 講）</a:t>
                       </a:r>
                     </a:p>
                   </a:txBody>
@@ -12997,7 +13095,7 @@
                         </a:defRPr>
                       </a:pPr>
                       <a:r>
-                        <a:t>#006/#007 兩道防線</a:t>
+                        <a:t>心態與姿態防線（第 5–6 講）</a:t>
                       </a:r>
                     </a:p>
                   </a:txBody>
@@ -13023,7 +13121,7 @@
                         </a:defRPr>
                       </a:pPr>
                       <a:r>
-                        <a:t>準備階段</a:t>
+                        <a:t>1. 進場準備</a:t>
                       </a:r>
                     </a:p>
                   </a:txBody>
@@ -13047,7 +13145,7 @@
                         </a:defRPr>
                       </a:pPr>
                       <a:r>
-                        <a:t>底線(機會成本)、目標、行情</a:t>
+                        <a:t>機會成本底線、市場尺子、拆解成本</a:t>
                       </a:r>
                     </a:p>
                   </a:txBody>
@@ -13071,7 +13169,7 @@
                         </a:defRPr>
                       </a:pPr>
                       <a:r>
-                        <a:t>20+條款分主要/次要/底線</a:t>
+                        <a:t>盤點 20+ 條款分為主要/次要/底線</a:t>
                       </a:r>
                     </a:p>
                   </a:txBody>
@@ -13095,7 +13193,7 @@
                         </a:defRPr>
                       </a:pPr>
                       <a:r>
-                        <a:t>閱讀價值鏈、算清增量數字</a:t>
+                        <a:t>繪製含顧客第三方價值鏈、精算增量</a:t>
                       </a:r>
                     </a:p>
                   </a:txBody>
@@ -13119,7 +13217,7 @@
                         </a:defRPr>
                       </a:pPr>
                       <a:r>
-                        <a:t>備妥離桌替代方案、提前對帳</a:t>
+                        <a:t>確立離桌替代方案、展示會前準備</a:t>
                       </a:r>
                     </a:p>
                   </a:txBody>
@@ -13145,7 +13243,7 @@
                         </a:defRPr>
                       </a:pPr>
                       <a:r>
-                        <a:t>資訊刺探</a:t>
+                        <a:t>2. 資訊刺探</a:t>
                       </a:r>
                     </a:p>
                   </a:txBody>
@@ -13169,7 +13267,7 @@
                         </a:defRPr>
                       </a:pPr>
                       <a:r>
-                        <a:t>決定誰先報價、要求解釋依據</a:t>
+                        <a:t>依資訊對稱度決定先後手、要求明細</a:t>
                       </a:r>
                     </a:p>
                   </a:txBody>
@@ -13193,7 +13291,7 @@
                         </a:defRPr>
                       </a:pPr>
                       <a:r>
-                        <a:t>中層吹風會、排序題、假設題</a:t>
+                        <a:t>中層吹風會、優先排序題、假設題</a:t>
                       </a:r>
                     </a:p>
                   </a:txBody>
@@ -13217,7 +13315,7 @@
                         </a:defRPr>
                       </a:pPr>
                       <a:r>
-                        <a:t>問對方未來生意規劃搭順風車</a:t>
+                        <a:t>探詢對方年度戰略規劃搭順風車</a:t>
                       </a:r>
                     </a:p>
                   </a:txBody>
@@ -13241,7 +13339,7 @@
                         </a:defRPr>
                       </a:pPr>
                       <a:r>
-                        <a:t>不問對方底線、改問理想結果</a:t>
+                        <a:t>切忌探問底線、改問期望之理想結果</a:t>
                       </a:r>
                     </a:p>
                   </a:txBody>
@@ -13267,7 +13365,7 @@
                         </a:defRPr>
                       </a:pPr>
                       <a:r>
-                        <a:t>讓步與破局</a:t>
+                        <a:t>3. 讓步與破局</a:t>
                       </a:r>
                     </a:p>
                   </a:txBody>
@@ -13291,7 +13389,7 @@
                         </a:defRPr>
                       </a:pPr>
                       <a:r>
-                        <a:t>識破離桌威脅、不情願遞減讓步</a:t>
+                        <a:t>識破假離桌、執行不情願遞減讓步</a:t>
                       </a:r>
                     </a:p>
                   </a:txBody>
@@ -13315,7 +13413,7 @@
                         </a:defRPr>
                       </a:pPr>
                       <a:r>
-                        <a:t>讓次要保主要、雙方同讓換空調</a:t>
+                        <a:t>讓次要保主要、條件換條件(緩衝帶)</a:t>
                       </a:r>
                     </a:p>
                   </a:txBody>
@@ -13339,7 +13437,7 @@
                         </a:defRPr>
                       </a:pPr>
                       <a:r>
-                        <a:t>納入顧客三角形、ABC選方案</a:t>
+                        <a:t>設計 A/B/C 三方案對接決策三角色</a:t>
                       </a:r>
                     </a:p>
                   </a:txBody>
@@ -13363,7 +13461,7 @@
                         </a:defRPr>
                       </a:pPr>
                       <a:r>
-                        <a:t>主動喊停、拒絕公式、如果…就</a:t>
+                        <a:t>主動喊停休息、拒絕公式(關門指路)</a:t>
                       </a:r>
                     </a:p>
                   </a:txBody>
@@ -13409,7 +13507,7 @@
               </a:defRPr>
             </a:pPr>
             <a:r>
-              <a:t>大衛雲 2.0 談判協商知識庫 (A2.6.4) ｜ COURSE #001 湯君健《有效提升你的談判能力》 ｜ McKinsey Executive Briefing • Slide 2 of 16</a:t>
+              <a:t>商務談判協商知識庫 ｜ COURSE #001 湯君健《有效提升你的談判能力》 ｜ McKinsey Executive Briefing Standard • Slide 2 of 16</a:t>
             </a:r>
           </a:p>
         </p:txBody>
@@ -13592,7 +13690,7 @@
               </a:defRPr>
             </a:pPr>
             <a:r>
-              <a:t>SLIDE 03 / 16 ｜ 第 1 講（上）談判三要點與分橘子啟示 (#002)</a:t>
+              <a:t>SLIDE 03 / 16 ｜ LEVEL 1 入門基礎 ｜ 第 1 講（上）表面訴求 vs 真實需求</a:t>
             </a:r>
           </a:p>
           <a:p>
@@ -13605,7 +13703,7 @@
               </a:defRPr>
             </a:pPr>
             <a:r>
-              <a:t>第 1 講（上）表面訴求不等於真實需求：堅守「以自己目的為先」，透過資訊交換與換位加工挖掘對方的「橘子皮」</a:t>
+              <a:t>第 1 講（上）表面訴求不等於真實需求：堅守「以己方目的為先」，透過資訊交換與加工挖掘對方的「橘子皮」</a:t>
             </a:r>
           </a:p>
         </p:txBody>
@@ -13686,7 +13784,7 @@
               </a:defRPr>
             </a:pPr>
             <a:r>
-              <a:t>▪ 分橘子故事：表面爭數量 vs 真實需求</a:t>
+              <a:t>▪ 分橘子冰山模型：表面立場 vs 真實需求</a:t>
             </a:r>
           </a:p>
           <a:p>
@@ -13699,7 +13797,7 @@
               </a:defRPr>
             </a:pPr>
             <a:r>
-              <a:t>一大一小兩個男孩分5個橘子，先訴諸公平（個子大 vs 先看到），再訴諸權力（年齡大 vs 告爸爸）。父親問出小男孩要皮做橘燈、大男孩要肉榨汁，皮肉分開圓滿解決。</a:t>
+              <a:t>雙方表面爭奪 5 顆橘子數量（訴諸公平與權力陷入零和），實則一方需要果肉榨汁、一方需要果皮做小橘燈；皮肉分離即可各自取得 100% 所需資源。</a:t>
             </a:r>
           </a:p>
         </p:txBody>
@@ -13793,7 +13891,7 @@
               </a:defRPr>
             </a:pPr>
             <a:r>
-              <a:t>① 以自己目的為先：明確訴求且不動搖，靠「向前爭取」而非「往後讓步」。② 利用理性與非理性：講者談判前清單包含需求、資訊、利益計算、對方性格、議程、會場及靠牆座位（給對方壓迫感）。</a:t>
+              <a:t>① 以己方目的為先：明確訴求且不動搖，靠「向前爭取」而非退讓。② 併用理性與非理性：涵蓋需求、資訊、利益計算、對手性格、議程、會場及靠牆座位配置等 7 項清單。</a:t>
             </a:r>
           </a:p>
         </p:txBody>
@@ -13887,7 +13985,7 @@
               </a:defRPr>
             </a:pPr>
             <a:r>
-              <a:t>現實談判沒有第三者爸爸替我們解圍，必須靠自己不斷刺探對方需求（資訊交換），並換位思考找出背後潛台詞（資訊加工）。</a:t>
+              <a:t>商務談判無全知第三方裁判，須靠自己提問刺探需求（資訊交換），並換位思考解讀潛台詞（資訊加工），挖出對方的真實用途。</a:t>
             </a:r>
           </a:p>
         </p:txBody>
@@ -13931,7 +14029,7 @@
                         </a:defRPr>
                       </a:pPr>
                       <a:r>
-                        <a:t>談判三要點</a:t>
+                        <a:t>準備維度</a:t>
                       </a:r>
                     </a:p>
                   </a:txBody>
@@ -13955,7 +14053,7 @@
                         </a:defRPr>
                       </a:pPr>
                       <a:r>
-                        <a:t>核心內涵與反直覺洞見</a:t>
+                        <a:t>新手常見誤區（入門避坑）</a:t>
                       </a:r>
                     </a:p>
                   </a:txBody>
@@ -13979,7 +14077,7 @@
                         </a:defRPr>
                       </a:pPr>
                       <a:r>
-                        <a:t>分橘子故事／實戰案例對照</a:t>
+                        <a:t>專家標準法則（7 項準備清單）</a:t>
                       </a:r>
                     </a:p>
                   </a:txBody>
@@ -14003,7 +14101,7 @@
                         </a:defRPr>
                       </a:pPr>
                       <a:r>
-                        <a:t>David 落地行動 (#002)</a:t>
+                        <a:t>進階商務實戰行動指標</a:t>
                       </a:r>
                     </a:p>
                   </a:txBody>
@@ -14029,7 +14127,7 @@
                         </a:defRPr>
                       </a:pPr>
                       <a:r>
-                        <a:t>1. 以自己目的為先</a:t>
+                        <a:t>理性利益維度</a:t>
                       </a:r>
                     </a:p>
                   </a:txBody>
@@ -14053,7 +14151,7 @@
                         </a:defRPr>
                       </a:pPr>
                       <a:r>
-                        <a:t>非往後讓步求合，而是向前爭取實現訴求</a:t>
+                        <a:t>僅看表面開價，忽略背後真實動機</a:t>
                       </a:r>
                     </a:p>
                   </a:txBody>
@@ -14077,7 +14175,7 @@
                         </a:defRPr>
                       </a:pPr>
                       <a:r>
-                        <a:t>不因怕衝突而放棄自己應得的份額</a:t>
+                        <a:t>①雙方需求挖掘、②資訊蒐集、③利益計算</a:t>
                       </a:r>
                     </a:p>
                   </a:txBody>
@@ -14101,7 +14199,7 @@
                         </a:defRPr>
                       </a:pPr>
                       <a:r>
-                        <a:t>進場前明確寫下不可動搖的核心訴求</a:t>
+                        <a:t>會前拆解對手的表面立場與真實用途(橘子皮)</a:t>
                       </a:r>
                     </a:p>
                   </a:txBody>
@@ -14127,7 +14225,7 @@
                         </a:defRPr>
                       </a:pPr>
                       <a:r>
-                        <a:t>2. 利用理性與非理性</a:t>
+                        <a:t>人物性格維度</a:t>
                       </a:r>
                     </a:p>
                   </a:txBody>
@@ -14151,7 +14249,7 @@
                         </a:defRPr>
                       </a:pPr>
                       <a:r>
-                        <a:t>擺事實、利益打動、示弱、環境氣場並用</a:t>
+                        <a:t>忽略談判對手個人的決策風格與偏好</a:t>
                       </a:r>
                     </a:p>
                   </a:txBody>
@@ -14175,7 +14273,7 @@
                         </a:defRPr>
                       </a:pPr>
                       <a:r>
-                        <a:t>安排對手坐「靠牆而非靠門座位」傳遞壓迫感</a:t>
+                        <a:t>④調研對手個人喜好與性格特點</a:t>
                       </a:r>
                     </a:p>
                   </a:txBody>
@@ -14199,7 +14297,7 @@
                         </a:defRPr>
                       </a:pPr>
                       <a:r>
-                        <a:t>起草個人版「重要談判前7項檢查清單」</a:t>
+                        <a:t>針對數據型、權威型或關係型對手配置策略</a:t>
                       </a:r>
                     </a:p>
                   </a:txBody>
@@ -14225,7 +14323,7 @@
                         </a:defRPr>
                       </a:pPr>
                       <a:r>
-                        <a:t>3. 聯手找解決方案</a:t>
+                        <a:t>環境氣場維度</a:t>
                       </a:r>
                     </a:p>
                   </a:txBody>
@@ -14249,7 +14347,7 @@
                         </a:defRPr>
                       </a:pPr>
                       <a:r>
-                        <a:t>資訊交換（刺探）＋ 資訊加工（讀潛台詞）</a:t>
+                        <a:t>隨機入座，被動跟隨對方會議節奏</a:t>
                       </a:r>
                     </a:p>
                   </a:txBody>
@@ -14273,7 +14371,7 @@
                         </a:defRPr>
                       </a:pPr>
                       <a:r>
-                        <a:t>表面爭5顆橘子，潛台詞是橘皮做燈 vs 橘肉榨汁</a:t>
+                        <a:t>⑤議程設計、⑥會場布置、⑦主客座位安排</a:t>
                       </a:r>
                     </a:p>
                   </a:txBody>
@@ -14297,7 +14395,7 @@
                         </a:defRPr>
                       </a:pPr>
                       <a:r>
-                        <a:t>列出進行中案件對方的「橘子皮」需求</a:t>
+                        <a:t>主場談判將核心對手安排於背靠牆座位控場</a:t>
                       </a:r>
                     </a:p>
                   </a:txBody>
@@ -14343,7 +14441,7 @@
               </a:defRPr>
             </a:pPr>
             <a:r>
-              <a:t>大衛雲 2.0 談判協商知識庫 (A2.6.4) ｜ COURSE #001 湯君健《有效提升你的談判能力》 ｜ McKinsey Executive Briefing • Slide 3 of 16</a:t>
+              <a:t>商務談判協商知識庫 ｜ COURSE #001 湯君健《有效提升你的談判能力》 ｜ McKinsey Executive Briefing Standard • Slide 3 of 16</a:t>
             </a:r>
           </a:p>
         </p:txBody>
@@ -14526,7 +14624,7 @@
               </a:defRPr>
             </a:pPr>
             <a:r>
-              <a:t>SLIDE 04 / 16 ｜ 第 1 講（下）三種基本模型與跨層切換 (#002)</a:t>
+              <a:t>SLIDE 04 / 16 ｜ LEVEL 1 入門基礎 ｜ 第 1 講（下）三種基本模型與跨層切換</a:t>
             </a:r>
           </a:p>
           <a:p>
@@ -14539,7 +14637,7 @@
               </a:defRPr>
             </a:pPr>
             <a:r>
-              <a:t>第 1 講（下）再複雜的談判皆可拆解為三種基本模型：先辨識所處層次，並在卡關時主動推動談判跨層升級</a:t>
+              <a:t>第 1 講（下）複雜談判皆可拆解為三種基本模型：先辨識所處層次，並在卡關時主動推動談判跨層升級</a:t>
             </a:r>
           </a:p>
         </p:txBody>
@@ -14620,7 +14718,7 @@
               </a:defRPr>
             </a:pPr>
             <a:r>
-              <a:t>▪ 三種基本模型（由簡到繁・常混合存在）</a:t>
+              <a:t>▪ 三種基本模型（由簡入繁・常混合存在）</a:t>
             </a:r>
           </a:p>
           <a:p>
@@ -14633,7 +14731,7 @@
               </a:defRPr>
             </a:pPr>
             <a:r>
-              <a:t>① 價格談判：零和博弈，餅就這麼大，你多咬一口我就少一塊。② 條件談判：含付款方式、送貨、合格率等多條款，各取所需。③ 價值談判：超越既有條件，創造新價值。</a:t>
+              <a:t>① 價格談判：單維度零和博弈，存量分配。② 條件談判：引入付款方式、交期、良率等多重砝碼，各取所需。③ 價值談判：超越既有條款，共同投入創造新價值。</a:t>
             </a:r>
           </a:p>
         </p:txBody>
@@ -14714,7 +14812,7 @@
               </a:defRPr>
             </a:pPr>
             <a:r>
-              <a:t>▪ 管教孩子不看電視的三層次演繹</a:t>
+              <a:t>▪ 生活實例：引導孩子不看電視的三層演繹</a:t>
             </a:r>
           </a:p>
           <a:p>
@@ -14727,7 +14825,7 @@
               </a:defRPr>
             </a:pPr>
             <a:r>
-              <a:t>① 價格層：你說看3分鐘，他討價5分鐘，最後4分鐘成交。② 條件層：現在立刻不看，週末才帶去公園玩（條件換條件）。③ 價值層：可以看，但看完要把故事講一遍。</a:t>
+              <a:t>① 價格層：主張3分鐘 vs 5分鐘，折衷4分鐘成交。② 條件層：現在立刻關電視，週末才帶去公園玩（條件換條件）。③ 價值層：可以看，但看完須把故事完整複述一遍。</a:t>
             </a:r>
           </a:p>
         </p:txBody>
@@ -14808,7 +14906,7 @@
               </a:defRPr>
             </a:pPr>
             <a:r>
-              <a:t>▪ 主動切換策略 ＆ 美國外交官 13 項標準</a:t>
+              <a:t>▪ 主動跨層切換 ＆ 外交官 13 項能力標準</a:t>
             </a:r>
           </a:p>
           <a:p>
@@ -14821,7 +14919,7 @@
               </a:defRPr>
             </a:pPr>
             <a:r>
-              <a:t>對方死不降價時主動試探其他可交換條款；做大餅後仍須回到價格分配。附美國國務院外事人員13條標準（冷靜、文化適應、資訊分析、判斷力、定量分析等）。</a:t>
+              <a:t>對方拒不降價時主動切換至條件層；把餅做大後仍須回歸價格分配。附美國國務院外事人員 13 項標準（冷靜、資訊整合分析、判斷力、定量分析、靈活應變等）。</a:t>
             </a:r>
           </a:p>
         </p:txBody>
@@ -14865,7 +14963,7 @@
                         </a:defRPr>
                       </a:pPr>
                       <a:r>
-                        <a:t>基本模型</a:t>
+                        <a:t>談判基本模型</a:t>
                       </a:r>
                     </a:p>
                   </a:txBody>
@@ -14889,7 +14987,7 @@
                         </a:defRPr>
                       </a:pPr>
                       <a:r>
-                        <a:t>博弈特徵</a:t>
+                        <a:t>利益結構與核心特徵</a:t>
                       </a:r>
                     </a:p>
                   </a:txBody>
@@ -14913,7 +15011,7 @@
                         </a:defRPr>
                       </a:pPr>
                       <a:r>
-                        <a:t>原文生活與商務實例</a:t>
+                        <a:t>經典生活與商業案例</a:t>
                       </a:r>
                     </a:p>
                   </a:txBody>
@@ -14937,7 +15035,7 @@
                         </a:defRPr>
                       </a:pPr>
                       <a:r>
-                        <a:t>光電 EPC 合約對應（顧問推論 #002）</a:t>
+                        <a:t>進階商務實戰應用場景（B2B 採購／銷售）</a:t>
                       </a:r>
                     </a:p>
                   </a:txBody>
@@ -14963,7 +15061,7 @@
                         </a:defRPr>
                       </a:pPr>
                       <a:r>
-                        <a:t>價格談判</a:t>
+                        <a:t>1. 價格談判</a:t>
                       </a:r>
                     </a:p>
                   </a:txBody>
@@ -14987,7 +15085,7 @@
                         </a:defRPr>
                       </a:pPr>
                       <a:r>
-                        <a:t>零和博弈（收益＝對方損失）</a:t>
+                        <a:t>單一變數議價；典型零和存量分配</a:t>
                       </a:r>
                     </a:p>
                   </a:txBody>
@@ -15011,7 +15109,7 @@
                         </a:defRPr>
                       </a:pPr>
                       <a:r>
-                        <a:t>買賣討價還價；看電視 3 vs 5 分鐘→4分鐘</a:t>
+                        <a:t>標準商品討價還價；看電視 4 分鐘成交</a:t>
                       </a:r>
                     </a:p>
                   </a:txBody>
@@ -15035,7 +15133,7 @@
                         </a:defRPr>
                       </a:pPr>
                       <a:r>
-                        <a:t>單純壓低每瓦模組或逆變器單價</a:t>
+                        <a:t>大宗標準品現貨採購、單一產品報價折扣協商</a:t>
                       </a:r>
                     </a:p>
                   </a:txBody>
@@ -15061,7 +15159,7 @@
                         </a:defRPr>
                       </a:pPr>
                       <a:r>
-                        <a:t>條件談判</a:t>
+                        <a:t>2. 條件談判</a:t>
                       </a:r>
                     </a:p>
                   </a:txBody>
@@ -15085,7 +15183,7 @@
                         </a:defRPr>
                       </a:pPr>
                       <a:r>
-                        <a:t>多條款砝碼，各取所需互換</a:t>
+                        <a:t>多變數組合；利用偏好差異不等價交換</a:t>
                       </a:r>
                     </a:p>
                   </a:txBody>
@@ -15109,7 +15207,7 @@
                         </a:defRPr>
                       </a:pPr>
                       <a:r>
-                        <a:t>現結/季結、自提/送貨、合格率；關電視換去公園</a:t>
+                        <a:t>立刻關電視換週末去公園；房產戶型與付款協商</a:t>
                       </a:r>
                     </a:p>
                   </a:txBody>
@@ -15133,7 +15231,7 @@
                         </a:defRPr>
                       </a:pPr>
                       <a:r>
-                        <a:t>單價 × 付款期程 × 保固 × 工期 × 罰則交換</a:t>
+                        <a:t>單價 × 付款帳期(現結/季結) × 交期 × 保固年限</a:t>
                       </a:r>
                     </a:p>
                   </a:txBody>
@@ -15159,7 +15257,7 @@
                         </a:defRPr>
                       </a:pPr>
                       <a:r>
-                        <a:t>價值談判</a:t>
+                        <a:t>3. 價值談判</a:t>
                       </a:r>
                     </a:p>
                   </a:txBody>
@@ -15183,7 +15281,7 @@
                         </a:defRPr>
                       </a:pPr>
                       <a:r>
-                        <a:t>共同投入創造新價值把餅做大</a:t>
+                        <a:t>深度合作；共同投入資源創造增量價值</a:t>
                       </a:r>
                     </a:p>
                   </a:txBody>
@@ -15207,7 +15305,7 @@
                         </a:defRPr>
                       </a:pPr>
                       <a:r>
-                        <a:t>看完電視講故事；電商與手機廠共推女性專機</a:t>
+                        <a:t>看完電視複述故事練表達；共推女性專屬手機</a:t>
                       </a:r>
                     </a:p>
                   </a:txBody>
@@ -15231,7 +15329,7 @@
                         </a:defRPr>
                       </a:pPr>
                       <a:r>
-                        <a:t>納入用電戶/金融方共創光儲綠電增值方案</a:t>
+                        <a:t>策略聯盟、聯合行銷、納入終端客戶之增值分潤案</a:t>
                       </a:r>
                     </a:p>
                   </a:txBody>
@@ -15277,7 +15375,7 @@
               </a:defRPr>
             </a:pPr>
             <a:r>
-              <a:t>大衛雲 2.0 談判協商知識庫 (A2.6.4) ｜ COURSE #001 湯君健《有效提升你的談判能力》 ｜ McKinsey Executive Briefing • Slide 4 of 16</a:t>
+              <a:t>商務談判協商知識庫 ｜ COURSE #001 湯君健《有效提升你的談判能力》 ｜ McKinsey Executive Briefing Standard • Slide 4 of 16</a:t>
             </a:r>
           </a:p>
         </p:txBody>
@@ -15460,7 +15558,7 @@
               </a:defRPr>
             </a:pPr>
             <a:r>
-              <a:t>SLIDE 05 / 16 ｜ 第 2 講（上）價格談判準備：底線、目標與真正懂行 (#003)</a:t>
+              <a:t>SLIDE 05 / 16 ｜ LEVEL 1–2 入門至進階 ｜ 第 2 講（上）機會成本底線與成本拆解</a:t>
             </a:r>
           </a:p>
           <a:p>
@@ -15473,7 +15571,7 @@
               </a:defRPr>
             </a:pPr>
             <a:r>
-              <a:t>第 2 講（上）善戰者立於不敗之地：以機會成本錨定底線、以市場尺子設定目標，並拆解供應鏈成本做到「真正懂行」</a:t>
+              <a:t>第 2 講（上）善戰者立於不敗之地：以機會成本設定底線、以市場尺子錨定目標，並拆解供應鏈成本做到「真正懂行」</a:t>
             </a:r>
           </a:p>
         </p:txBody>
@@ -15554,7 +15652,7 @@
               </a:defRPr>
             </a:pPr>
             <a:r>
-              <a:t>▪ 明確底線（機會成本）與目標（市場尺子）</a:t>
+              <a:t>▪ 精準定義：底線（機會成本）與目標（市場尺子）</a:t>
             </a:r>
           </a:p>
           <a:p>
@@ -15567,7 +15665,7 @@
               </a:defRPr>
             </a:pPr>
             <a:r>
-              <a:t>底線＝心理最低價或【機會成本】（手上已有12.5元選擇，就不能低於12.5元）。目標＝跳一跳能拿到的價格（二手車行情3.5~4萬，車況稀有可定4萬，報新車價則外行）。</a:t>
+              <a:t>底線價＝心理最低價或手頭備選之【機會成本】（已有12.5元買家，底線即鎖定12.5元）。目標價＝以市場行情為客觀尺子，設定努力可及高標並附支撐理由。</a:t>
             </a:r>
           </a:p>
         </p:txBody>
@@ -15648,7 +15746,7 @@
               </a:defRPr>
             </a:pPr>
             <a:r>
-              <a:t>▪ 零售巨頭紅酒採購：6 個月做到真正懂行</a:t>
+              <a:t>▪ 成本結構反推法：6 個月做到「真正懂行」</a:t>
             </a:r>
           </a:p>
           <a:p>
@@ -15661,7 +15759,7 @@
               </a:defRPr>
             </a:pPr>
             <a:r>
-              <a:t>30年前紅酒剛進中國，滴酒不沾的女採購報法國紅酒班、跑產地考察、請教供應鏈各環節，6個月後看年份工藝產地即可拆解包裝、存儲、運輸成本，反推供應商成本價。</a:t>
+              <a:t>零售巨頭首席商品官年輕採購紅酒時，耗時6個月研習紅酒課程、考察產地，摸透原酒、包材、溫控儲運成本與平均毛利，直接攤開數據剔除供應商虛高溢價。</a:t>
             </a:r>
           </a:p>
         </p:txBody>
@@ -15755,7 +15853,7 @@
               </a:defRPr>
             </a:pPr>
             <a:r>
-              <a:t>談判占大便宜很難，一時衝動吃大虧卻很容易。菜市場省10塊未必值當，但職場跳槽薪資基於過去基數增長，影響長期，務必做足調研。</a:t>
+              <a:t>深度調研旨在確保決策不因一時衝動而吃大虧。日常小額採購無須過度耗時，但大宗合約與跳槽談薪（決定未來數年調薪基數）影響深遠，必須做足調研。</a:t>
             </a:r>
           </a:p>
         </p:txBody>
@@ -15799,7 +15897,7 @@
                         </a:defRPr>
                       </a:pPr>
                       <a:r>
-                        <a:t>準備要素</a:t>
+                        <a:t>準備核心要素</a:t>
                       </a:r>
                     </a:p>
                   </a:txBody>
@@ -15823,7 +15921,7 @@
                         </a:defRPr>
                       </a:pPr>
                       <a:r>
-                        <a:t>操作定義</a:t>
+                        <a:t>新手常見誤區（入門避坑）</a:t>
                       </a:r>
                     </a:p>
                   </a:txBody>
@@ -15847,7 +15945,7 @@
                         </a:defRPr>
                       </a:pPr>
                       <a:r>
-                        <a:t>原文案例</a:t>
+                        <a:t>專家標準法則（核心機制）</a:t>
                       </a:r>
                     </a:p>
                   </a:txBody>
@@ -15871,7 +15969,7 @@
                         </a:defRPr>
                       </a:pPr>
                       <a:r>
-                        <a:t>David 實戰落地行動 (#003)</a:t>
+                        <a:t>進階商務實戰行動指標</a:t>
                       </a:r>
                     </a:p>
                   </a:txBody>
@@ -15897,7 +15995,7 @@
                         </a:defRPr>
                       </a:pPr>
                       <a:r>
-                        <a:t>底線價</a:t>
+                        <a:t>1. 底線價設定</a:t>
                       </a:r>
                     </a:p>
                   </a:txBody>
@@ -15921,7 +16019,7 @@
                         </a:defRPr>
                       </a:pPr>
                       <a:r>
-                        <a:t>心理最低價 或 手頭備選之機會成本</a:t>
+                        <a:t>憑主觀感覺設底線，未準備任何備選方案</a:t>
                       </a:r>
                     </a:p>
                   </a:txBody>
@@ -15945,7 +16043,7 @@
                         </a:defRPr>
                       </a:pPr>
                       <a:r>
-                        <a:t>手上已有 12.5 元選擇，底線即鎖定 12.5 元</a:t>
+                        <a:t>以手頭既有替代選項之「機會成本」鎖定底線</a:t>
                       </a:r>
                     </a:p>
                   </a:txBody>
@@ -15969,7 +16067,7 @@
                         </a:defRPr>
                       </a:pPr>
                       <a:r>
-                        <a:t>採購議價前先備妥多份合格報價墊高機會成本</a:t>
+                        <a:t>議價前取得至少 2～3 家合格備選報價墊高底線</a:t>
                       </a:r>
                     </a:p>
                   </a:txBody>
@@ -15995,7 +16093,7 @@
                         </a:defRPr>
                       </a:pPr>
                       <a:r>
-                        <a:t>目標價</a:t>
+                        <a:t>2. 目標價錨定</a:t>
                       </a:r>
                     </a:p>
                   </a:txBody>
@@ -16019,7 +16117,7 @@
                         </a:defRPr>
                       </a:pPr>
                       <a:r>
-                        <a:t>以市場價為客觀尺子，備妥高目標支撐理由</a:t>
+                        <a:t>不諳市場行情卻盲目喊價，瞬間暴露外行</a:t>
                       </a:r>
                     </a:p>
                   </a:txBody>
@@ -16043,7 +16141,7 @@
                         </a:defRPr>
                       </a:pPr>
                       <a:r>
-                        <a:t>二手車行情 3.5–4 萬，稀有高配定 4 萬目標</a:t>
+                        <a:t>以市場客觀行情為尺子，設定高標並備妥理由</a:t>
                       </a:r>
                     </a:p>
                   </a:txBody>
@@ -16067,7 +16165,7 @@
                         </a:defRPr>
                       </a:pPr>
                       <a:r>
-                        <a:t>為下一筆主要採購寫出底線價、目標價與3條理由</a:t>
+                        <a:t>書面列出「底線—目標價」區間與 3 項差異化理由</a:t>
                       </a:r>
                     </a:p>
                   </a:txBody>
@@ -16093,7 +16191,7 @@
                         </a:defRPr>
                       </a:pPr>
                       <a:r>
-                        <a:t>真正懂行</a:t>
+                        <a:t>3. 供應鏈拆解</a:t>
                       </a:r>
                     </a:p>
                   </a:txBody>
@@ -16117,7 +16215,7 @@
                         </a:defRPr>
                       </a:pPr>
                       <a:r>
-                        <a:t>拆解供應鏈各環節成本與平均利潤反推底價</a:t>
+                        <a:t>只看最終總報價，無法分辨虛高水分</a:t>
                       </a:r>
                     </a:p>
                   </a:txBody>
@@ -16141,7 +16239,7 @@
                         </a:defRPr>
                       </a:pPr>
                       <a:r>
-                        <a:t>紅酒女採購 6 個月摸透產地、包裝、儲運成本</a:t>
+                        <a:t>拆解原材料、加工、物流與合理毛利反推底價</a:t>
                       </a:r>
                     </a:p>
                   </a:txBody>
@@ -16165,7 +16263,7 @@
                         </a:defRPr>
                       </a:pPr>
                       <a:r>
-                        <a:t>對照 5 家以上實際報價拆解材料/運輸/利潤結構</a:t>
+                        <a:t>橫向比對 5 家以上報價單，建立成本結構拆解表</a:t>
                       </a:r>
                     </a:p>
                   </a:txBody>
@@ -16211,7 +16309,7 @@
               </a:defRPr>
             </a:pPr>
             <a:r>
-              <a:t>大衛雲 2.0 談判協商知識庫 (A2.6.4) ｜ COURSE #001 湯君健《有效提升你的談判能力》 ｜ McKinsey Executive Briefing • Slide 5 of 16</a:t>
+              <a:t>商務談判協商知識庫 ｜ COURSE #001 湯君健《有效提升你的談判能力》 ｜ McKinsey Executive Briefing Standard • Slide 5 of 16</a:t>
             </a:r>
           </a:p>
         </p:txBody>
@@ -16394,7 +16492,7 @@
               </a:defRPr>
             </a:pPr>
             <a:r>
-              <a:t>SLIDE 06 / 16 ｜ 第 2 講（中）報價策略：先後手決策與報完價閉嘴 (#003)</a:t>
+              <a:t>SLIDE 06 / 16 ｜ LEVEL 2 進階實戰 ｜ 第 2 講（中）報價先後手與沉默鐵律</a:t>
             </a:r>
           </a:p>
           <a:p>
@@ -16407,7 +16505,7 @@
               </a:defRPr>
             </a:pPr>
             <a:r>
-              <a:t>第 2 講（中）掌握報價主動權：依資訊對稱度決定誰先報價，靈活選用高報價或合理報價，並嚴格執行「報完價立刻閉嘴」</a:t>
+              <a:t>第 2 講（中）掌握報價主動權：依資訊對稱度決定先後手，靈活選用高報價或合理報價，並嚴格執行「報完價立刻閉嘴」</a:t>
             </a:r>
           </a:p>
         </p:txBody>
@@ -16488,7 +16586,7 @@
               </a:defRPr>
             </a:pPr>
             <a:r>
-              <a:t>▪ 誰先報價兩條經驗（看資訊對稱度）</a:t>
+              <a:t>▪ 先後手決策準則（依資訊對稱度二選一）</a:t>
             </a:r>
           </a:p>
           <a:p>
@@ -16501,7 +16599,7 @@
               </a:defRPr>
             </a:pPr>
             <a:r>
-              <a:t>① 不知怎麼報、資訊嚴重不對稱時，等對方先報（被動反而是主動，你想1000說不定對方報200）。② 比對方更懂市場行情時，大膽先報以掌握主動權、降低對方期望值。</a:t>
+              <a:t>① 資訊嚴重不對稱、不諳行情時【後出價】（你預想1,000元，對方可能先報200元）。② 比對手更熟悉市場行情時【大膽先報價】，先發制人壓低對方心理預期。</a:t>
             </a:r>
           </a:p>
         </p:txBody>
@@ -16582,7 +16680,7 @@
               </a:defRPr>
             </a:pPr>
             <a:r>
-              <a:t>▪ 高報價（上浮5%~100%）vs 合理報價</a:t>
+              <a:t>▪ 高報價（上浮5%～100%）vs 合理報價</a:t>
             </a:r>
           </a:p>
           <a:p>
@@ -16595,7 +16693,7 @@
               </a:defRPr>
             </a:pPr>
             <a:r>
-              <a:t>高報價有兩好處：①錨定效應（五星酒店報超五星價）；②留還價空間（給對方採購總監打電話要面子的空間）。對方熟行情、長期合作、討厭還價、看跌、快走量則改用合理報價（拒絕還價）。</a:t>
+              <a:t>高報價兼具錨定效應與預留還價空間（如五星飯店會務留空間讓客戶老總砍價有面子）；但對手極懂行、長期夥伴、行情看跌、急需走量時禁用，應改採透明合理報價。</a:t>
             </a:r>
           </a:p>
         </p:txBody>
@@ -16676,7 +16774,7 @@
               </a:defRPr>
             </a:pPr>
             <a:r>
-              <a:t>▪ 通用兩大鐵律：先列理由 ＋ 報完價閉嘴</a:t>
+              <a:t>▪ 通用黃金時序：先講理由 ＋ 報完價立刻閉嘴</a:t>
             </a:r>
           </a:p>
           <a:p>
@@ -16689,7 +16787,7 @@
               </a:defRPr>
             </a:pPr>
             <a:r>
-              <a:t>① 報價前說出 1、2、3、4 多條支撐理由；② 【報完價之後不解釋，馬上沉默】觀察對方表情！事後解釋一大通只會讓對方覺得你心虛。</a:t>
+              <a:t>① 報價前充分陳述 1-2-3-4 條客觀支撐理由；② 清晰報出數字；③ 【報完價立刻閉嘴沉默】觀察對方微表情！報價後多解釋一句，都會被視為心虛信號。</a:t>
             </a:r>
           </a:p>
         </p:txBody>
@@ -16733,7 +16831,7 @@
                         </a:defRPr>
                       </a:pPr>
                       <a:r>
-                        <a:t>報價策略維度</a:t>
+                        <a:t>報價決策節點</a:t>
                       </a:r>
                     </a:p>
                   </a:txBody>
@@ -16757,7 +16855,7 @@
                         </a:defRPr>
                       </a:pPr>
                       <a:r>
-                        <a:t>高報價策略（上浮 5%～100%）</a:t>
+                        <a:t>新手常見誤區（入門避坑）</a:t>
                       </a:r>
                     </a:p>
                   </a:txBody>
@@ -16781,7 +16879,7 @@
                         </a:defRPr>
                       </a:pPr>
                       <a:r>
-                        <a:t>合理報價策略（不高于市場價）</a:t>
+                        <a:t>專家標準法則（核心機制）</a:t>
                       </a:r>
                     </a:p>
                   </a:txBody>
@@ -16805,7 +16903,7 @@
                         </a:defRPr>
                       </a:pPr>
                       <a:r>
-                        <a:t>通用黃金執行時序（嚴禁違反）</a:t>
+                        <a:t>進階商務實戰行動指標</a:t>
                       </a:r>
                     </a:p>
                   </a:txBody>
@@ -16831,7 +16929,7 @@
                         </a:defRPr>
                       </a:pPr>
                       <a:r>
-                        <a:t>核心優勢</a:t>
+                        <a:t>1. 先後手選擇</a:t>
                       </a:r>
                     </a:p>
                   </a:txBody>
@@ -16855,7 +16953,7 @@
                         </a:defRPr>
                       </a:pPr>
                       <a:r>
-                        <a:t>錨定效應 ＋ 預留給對方老總砍價的面子空間</a:t>
+                        <a:t>不了解底細時貿然先開價，導致錨定失準</a:t>
                       </a:r>
                     </a:p>
                   </a:txBody>
@@ -16879,7 +16977,7 @@
                         </a:defRPr>
                       </a:pPr>
                       <a:r>
-                        <a:t>傳遞「透明價、拒絕討價還價」的自信品牌形象</a:t>
+                        <a:t>不熟行情讓對方先報；熟稔行情則主動先報錨定</a:t>
                       </a:r>
                     </a:p>
                   </a:txBody>
@@ -16903,7 +17001,7 @@
                         </a:defRPr>
                       </a:pPr>
                       <a:r>
-                        <a:t>1. 報價前：先完整陳述 1234 條客觀理由</a:t>
+                        <a:t>非標採購請對方先報明細；標準品主動拋目標錨點</a:t>
                       </a:r>
                     </a:p>
                   </a:txBody>
@@ -16929,7 +17027,7 @@
                         </a:defRPr>
                       </a:pPr>
                       <a:r>
-                        <a:t>經典案例</a:t>
+                        <a:t>2. 高報價邊界</a:t>
                       </a:r>
                     </a:p>
                   </a:txBody>
@@ -16953,7 +17051,7 @@
                         </a:defRPr>
                       </a:pPr>
                       <a:r>
-                        <a:t>酒店會務底線5萬，若實報5萬則老總來電無法讓</a:t>
+                        <a:t>對所有客戶一律虛報高價，嚇跑熟行夥伴</a:t>
                       </a:r>
                     </a:p>
                   </a:txBody>
@@ -16977,7 +17075,7 @@
                         </a:defRPr>
                       </a:pPr>
                       <a:r>
-                        <a:t>一口價品牌，若對方糾纏可主動結束談判護牌</a:t>
+                        <a:t>對手極懂行、長期合作、行情看跌、急走量禁用</a:t>
                       </a:r>
                     </a:p>
                   </a:txBody>
@@ -17001,7 +17099,7 @@
                         </a:defRPr>
                       </a:pPr>
                       <a:r>
-                        <a:t>2. 報價時：清晰報出數字</a:t>
+                        <a:t>一次性專案預留議價緩衝；戰略長約採透明合理價</a:t>
                       </a:r>
                     </a:p>
                   </a:txBody>
@@ -17027,7 +17125,7 @@
                         </a:defRPr>
                       </a:pPr>
                       <a:r>
-                        <a:t>禁用／前提</a:t>
+                        <a:t>3. 報價話術時序</a:t>
                       </a:r>
                     </a:p>
                   </a:txBody>
@@ -17051,7 +17149,7 @@
                         </a:defRPr>
                       </a:pPr>
                       <a:r>
-                        <a:t>對方熟行情/長期夥伴/行情看跌/急走量不適用</a:t>
+                        <a:t>報價後見對方皺眉便慌忙解釋、主動鬆口</a:t>
                       </a:r>
                     </a:p>
                   </a:txBody>
@@ -17075,7 +17173,7 @@
                         </a:defRPr>
                       </a:pPr>
                       <a:r>
-                        <a:t>必須對自身主張與產品競爭力有足夠自信</a:t>
+                        <a:t>嚴守「先講理由 → 報出數字 → 立刻閉嘴觀察」</a:t>
                       </a:r>
                     </a:p>
                   </a:txBody>
@@ -17099,7 +17197,7 @@
                         </a:defRPr>
                       </a:pPr>
                       <a:r>
-                        <a:t>3. 報價後：立刻閉嘴沉默！觀察表情等對方出招</a:t>
+                        <a:t>報出關鍵價格後強制默數 5 秒不發一言</a:t>
                       </a:r>
                     </a:p>
                   </a:txBody>
@@ -17145,7 +17243,7 @@
               </a:defRPr>
             </a:pPr>
             <a:r>
-              <a:t>大衛雲 2.0 談判協商知識庫 (A2.6.4) ｜ COURSE #001 湯君健《有效提升你的談判能力》 ｜ McKinsey Executive Briefing • Slide 6 of 16</a:t>
+              <a:t>商務談判協商知識庫 ｜ COURSE #001 湯君健《有效提升你的談判能力》 ｜ McKinsey Executive Briefing Standard • Slide 6 of 16</a:t>
             </a:r>
           </a:p>
         </p:txBody>
@@ -17328,7 +17426,7 @@
               </a:defRPr>
             </a:pPr>
             <a:r>
-              <a:t>SLIDE 07 / 16 ｜ 第 2 講（下）還價與讓步：離桌威脅判讀與遞減讓步 (#003)</a:t>
+              <a:t>SLIDE 07 / 16 ｜ LEVEL 2 進階實戰 ｜ 第 2 講（下）離桌威脅判讀與遞減讓步</a:t>
             </a:r>
           </a:p>
           <a:p>
@@ -17341,7 +17439,7 @@
               </a:defRPr>
             </a:pPr>
             <a:r>
-              <a:t>第 2 講（下）拆解還價拉鋸戰：從「具體使用場景挑刺」識破假離桌威脅，並做幅度遞減的「不情願讓步者」</a:t>
+              <a:t>第 2 講（下）掌控還價拉鋸戰：從「具體使用場景挑刺」識破假離桌威脅，並做幅度遞減的「不情願讓步者」</a:t>
             </a:r>
           </a:p>
         </p:txBody>
@@ -17422,7 +17520,7 @@
               </a:defRPr>
             </a:pPr>
             <a:r>
-              <a:t>▪ 還價攻防：擺事實理由 vs 要求對方解釋</a:t>
+              <a:t>▪ 還價攻防：攤開成本事實 vs 要求拆解依據</a:t>
             </a:r>
           </a:p>
           <a:p>
@@ -17435,7 +17533,7 @@
               </a:defRPr>
             </a:pPr>
             <a:r>
-              <a:t>熟行情時像紅酒採購一樣擺出成本事實；不熟行情且對方報價沒給理由時，不急著拋觀點，要求對方仔細解釋報價是怎麼來的供你判斷（以不變應萬變）。</a:t>
+              <a:t>熟稔行情時直接攤開供應鏈成本數據；不熟行情且對方僅拋籠統高價時，切勿急於還價，應要求對方詳細解釋報價的計算邏輯與構成明細。</a:t>
             </a:r>
           </a:p>
         </p:txBody>
@@ -17516,7 +17614,7 @@
               </a:defRPr>
             </a:pPr>
             <a:r>
-              <a:t>▪ 離桌威脅真偽判讀：挑具體場景小毛病＝想買</a:t>
+              <a:t>▪ 離桌威脅判讀：挑剔具體使用場景＝高度想買</a:t>
             </a:r>
           </a:p>
           <a:p>
@@ -17529,7 +17627,7 @@
               </a:defRPr>
             </a:pPr>
             <a:r>
-              <a:t>對方挑毛病若有【具體使用場景且非硬傷】（如「這房間擺張床有點擠」「車靠背坐起來有點硬」），說明內心很想要、已帶入成交後場景，成交意願大！真想走的人常一言不發。</a:t>
+              <a:t>若對手挑剔細節具備【具體使用場景且非硬傷】（如「房間擺雙人床略擠」「座椅靠背略硬」），代表心理已代入成交後畫面，成交意願極高！真想放棄者常一言不發離場。</a:t>
             </a:r>
           </a:p>
         </p:txBody>
@@ -17610,7 +17708,7 @@
               </a:defRPr>
             </a:pPr>
             <a:r>
-              <a:t>▪ 讓步三技巧：不一步到位、不情願、幅度遞減</a:t>
+              <a:t>▪ 讓步三大紀律：不一步到位、不情願、幅度遞減</a:t>
             </a:r>
           </a:p>
           <a:p>
@@ -17623,7 +17721,7 @@
               </a:defRPr>
             </a:pPr>
             <a:r>
-              <a:t>快談到可接受點時適當讓步促成協議，但切記：①不要一步到位；②做不情願的讓步者；③讓步幅度逐漸縮小（絕不能第一次讓50、第二次讓80，否則對方必得寸進尺）。</a:t>
+              <a:t>接近成交區間時：①絕不一步到位；②扮演不情願的讓步者；③讓步幅度嚴格遞減（如 50→25→5）。若先讓 50 再讓 80，必誘發對手無底線逼迫。</a:t>
             </a:r>
           </a:p>
         </p:txBody>
@@ -17667,7 +17765,7 @@
                         </a:defRPr>
                       </a:pPr>
                       <a:r>
-                        <a:t>還價拉鋸情境</a:t>
+                        <a:t>拉鋸交鋒情境</a:t>
                       </a:r>
                     </a:p>
                   </a:txBody>
@@ -17691,7 +17789,7 @@
                         </a:defRPr>
                       </a:pPr>
                       <a:r>
-                        <a:t>對手表面言行</a:t>
+                        <a:t>新手常見誤區（入門避坑）</a:t>
                       </a:r>
                     </a:p>
                   </a:txBody>
@@ -17715,7 +17813,7 @@
                         </a:defRPr>
                       </a:pPr>
                       <a:r>
-                        <a:t>背後真實意圖判讀</a:t>
+                        <a:t>專家標準判讀與機制</a:t>
                       </a:r>
                     </a:p>
                   </a:txBody>
@@ -17739,7 +17837,7 @@
                         </a:defRPr>
                       </a:pPr>
                       <a:r>
-                        <a:t>湯君健標準反制與讓步動作</a:t>
+                        <a:t>進階商務實戰應對動作</a:t>
                       </a:r>
                     </a:p>
                   </a:txBody>
@@ -17765,7 +17863,7 @@
                         </a:defRPr>
                       </a:pPr>
                       <a:r>
-                        <a:t>無理由高報價</a:t>
+                        <a:t>1. 籠統高價無明細</a:t>
                       </a:r>
                     </a:p>
                   </a:txBody>
@@ -17789,7 +17887,7 @@
                         </a:defRPr>
                       </a:pPr>
                       <a:r>
-                        <a:t>只拋總價不給構成明細</a:t>
+                        <a:t>憑直覺直接攔腰砍半，陷入漫天喊價</a:t>
                       </a:r>
                     </a:p>
                   </a:txBody>
@@ -17813,7 +17911,7 @@
                         </a:defRPr>
                       </a:pPr>
                       <a:r>
-                        <a:t>試探我方是否外行</a:t>
+                        <a:t>將舉證責任推回報價方，檢視成本結構合理性</a:t>
                       </a:r>
                     </a:p>
                   </a:txBody>
@@ -17837,7 +17935,7 @@
                         </a:defRPr>
                       </a:pPr>
                       <a:r>
-                        <a:t>要求對方逐項解釋報價來源，或擺出供應鏈成本數據</a:t>
+                        <a:t>要求對方提供分項計價明細表(BOM)逐項核對</a:t>
                       </a:r>
                     </a:p>
                   </a:txBody>
@@ -17863,7 +17961,7 @@
                         </a:defRPr>
                       </a:pPr>
                       <a:r>
-                        <a:t>挑小毛病威脅離桌</a:t>
+                        <a:t>2. 場景挑刺＋威脅</a:t>
                       </a:r>
                     </a:p>
                   </a:txBody>
@@ -17887,7 +17985,7 @@
                         </a:defRPr>
                       </a:pPr>
                       <a:r>
-                        <a:t>「房間擺床有點擠／靠背有點硬，不降不買」</a:t>
+                        <a:t>聽聞「不降價就不買」即驚慌大幅退讓</a:t>
                       </a:r>
                     </a:p>
                   </a:txBody>
@@ -17911,7 +18009,7 @@
                         </a:defRPr>
                       </a:pPr>
                       <a:r>
-                        <a:t>假離桌！已帶入使用場景，成交意願極高</a:t>
+                        <a:t>識別「具體使用場景＋非硬傷挑剔」＝想成交</a:t>
                       </a:r>
                     </a:p>
                   </a:txBody>
@@ -17935,7 +18033,7 @@
                         </a:defRPr>
                       </a:pPr>
                       <a:r>
-                        <a:t>穩住底線化解小顧慮，切勿驚慌大幅降價</a:t>
+                        <a:t>穩守底線，針對使用細節提供配套而不輕易降價</a:t>
                       </a:r>
                     </a:p>
                   </a:txBody>
@@ -17961,7 +18059,7 @@
                         </a:defRPr>
                       </a:pPr>
                       <a:r>
-                        <a:t>臨門一腳促成交易</a:t>
+                        <a:t>3. 價格空間見底</a:t>
                       </a:r>
                     </a:p>
                   </a:txBody>
@@ -17985,7 +18083,7 @@
                         </a:defRPr>
                       </a:pPr>
                       <a:r>
-                        <a:t>接近我方目標與底線區間</a:t>
+                        <a:t>讓步先小後大，導致底線被徹底擊穿</a:t>
                       </a:r>
                     </a:p>
                   </a:txBody>
@@ -18009,7 +18107,7 @@
                         </a:defRPr>
                       </a:pPr>
                       <a:r>
-                        <a:t>期待我方給最後一點甜頭拍板</a:t>
+                        <a:t>以「不情願＋幅度遞減」傳遞價格見底信號</a:t>
                       </a:r>
                     </a:p>
                   </a:txBody>
@@ -18033,7 +18131,7 @@
                         </a:defRPr>
                       </a:pPr>
                       <a:r>
-                        <a:t>做不情願的讓步者，且幅度遞減（例：50→25→5）</a:t>
+                        <a:t>會前預先設定 3 次遞減讓步階梯(如 3%→1.5%→0.5%)</a:t>
                       </a:r>
                     </a:p>
                   </a:txBody>
@@ -18079,7 +18177,7 @@
               </a:defRPr>
             </a:pPr>
             <a:r>
-              <a:t>大衛雲 2.0 談判協商知識庫 (A2.6.4) ｜ COURSE #001 湯君健《有效提升你的談判能力》 ｜ McKinsey Executive Briefing • Slide 7 of 16</a:t>
+              <a:t>商務談判協商知識庫 ｜ COURSE #001 湯君健《有效提升你的談判能力》 ｜ McKinsey Executive Briefing Standard • Slide 7 of 16</a:t>
             </a:r>
           </a:p>
         </p:txBody>
@@ -18262,7 +18360,7 @@
               </a:defRPr>
             </a:pPr>
             <a:r>
-              <a:t>SLIDE 08 / 16 ｜ 第 3 講（上）條件類談判：條款三級分類與兩類提問 (#004)</a:t>
+              <a:t>SLIDE 08 / 16 ｜ LEVEL 2 進階實戰 ｜ 第 3 講（上）條款三級分類與假設提問</a:t>
             </a:r>
           </a:p>
           <a:p>
@@ -18275,7 +18373,7 @@
               </a:defRPr>
             </a:pPr>
             <a:r>
-              <a:t>第 3 講（上）「條款列得多」等同價格開得高：將可談條件分為三級目標，並以非正式會議與假設性問題刺探真實優先序</a:t>
+              <a:t>第 3 講（上）「條款列得多」等同價格開得高：將可談條件分為三級目標，並以非正式會議與假設性提問刺探真實優先序</a:t>
             </a:r>
           </a:p>
         </p:txBody>
@@ -18356,7 +18454,7 @@
               </a:defRPr>
             </a:pPr>
             <a:r>
-              <a:t>▪ 盤點所有可談條件：「條款列得多＝開高價」</a:t>
+              <a:t>▪ 窮盡盤點條款：「條款列得多＝開高價」</a:t>
             </a:r>
           </a:p>
           <a:p>
@@ -18369,7 +18467,7 @@
               </a:defRPr>
             </a:pPr>
             <a:r>
-              <a:t>講者一年找30個商鋪，把租金、押金、簽幾年、裝修電器、物業費、轉讓費、轉租、營業執照等列成20項清單（投融資可達上千條）。條款列得多等於給自己爭取更多讓步空間。</a:t>
+              <a:t>洽談商鋪租賃可將租金、押金、租期、免租期、物業費、轉租權等列為 20 項清單（投融資可達上千條）。條款列得越細，手上的讓步交換緩衝池就越大。</a:t>
             </a:r>
           </a:p>
         </p:txBody>
@@ -18450,7 +18548,7 @@
               </a:defRPr>
             </a:pPr>
             <a:r>
-              <a:t>▪ 條件分三級：主要目標、次要目標、底線條件</a:t>
+              <a:t>▪ 三級目標分類法：主要目標、次要目標、底線條件</a:t>
             </a:r>
           </a:p>
           <a:p>
@@ -18463,7 +18561,7 @@
               </a:defRPr>
             </a:pPr>
             <a:r>
-              <a:t>① 主要目標：達成後其他在底線上即可（如月租3000內＋付三押一）。② 次要目標：可讓步換主要目標（如免租期1週讓到3天）。③ 底線條件：完全無法交易（如禁帶朋友聚會）。</a:t>
+              <a:t>① 主要目標（必保核心，如月租3000內＋付三押一）；② 次要目標（交換籌碼，如免租期7天讓至3天）；③ 底線條件（不可交易紅線，如禁親友來訪）。</a:t>
             </a:r>
           </a:p>
         </p:txBody>
@@ -18544,7 +18642,7 @@
               </a:defRPr>
             </a:pPr>
             <a:r>
-              <a:t>▪ 非正式會議（吹風會）＋ 兩類提問挖需求</a:t>
+              <a:t>▪ 中層吹風會 ＋ 兩類提問刺探真實優先序</a:t>
             </a:r>
           </a:p>
           <a:p>
@@ -18557,7 +18655,7 @@
               </a:defRPr>
             </a:pPr>
             <a:r>
-              <a:t>高層談判前派中層開吹風會放風聲探反應。談判中問兩類問題：① 需求確認類（請候選人排序薪資/發展/職位/地點）；② 假設性問題（低薪有期權 vs 高薪無期權二選一）。傾聽時不急著評論。</a:t>
+              <a:t>高層談判前先派中層開非正式會議（吹風會）探底。會中運用：① 需求確認排序題（請候選人對薪資/發展/職位/地點排序）；② 二選一假設題（低薪配期權 vs 高薪無期權）。</a:t>
             </a:r>
           </a:p>
         </p:txBody>
@@ -18601,7 +18699,7 @@
                         </a:defRPr>
                       </a:pPr>
                       <a:r>
-                        <a:t>條件談判工具</a:t>
+                        <a:t>條件管理工具</a:t>
                       </a:r>
                     </a:p>
                   </a:txBody>
@@ -18625,7 +18723,7 @@
                         </a:defRPr>
                       </a:pPr>
                       <a:r>
-                        <a:t>核心定義與功能</a:t>
+                        <a:t>核心操作定義</a:t>
                       </a:r>
                     </a:p>
                   </a:txBody>
@@ -18649,7 +18747,7 @@
                         </a:defRPr>
                       </a:pPr>
                       <a:r>
-                        <a:t>原文租商鋪／創業招聘案例</a:t>
+                        <a:t>經典商業與招募實例</a:t>
                       </a:r>
                     </a:p>
                   </a:txBody>
@@ -18673,7 +18771,7 @@
                         </a:defRPr>
                       </a:pPr>
                       <a:r>
-                        <a:t>David EPC 合約落地行動 (#004)</a:t>
+                        <a:t>進階商務合約落地指標</a:t>
                       </a:r>
                     </a:p>
                   </a:txBody>
@@ -18699,7 +18797,7 @@
                         </a:defRPr>
                       </a:pPr>
                       <a:r>
-                        <a:t>三級目標分類</a:t>
+                        <a:t>1. 三級條款清單</a:t>
                       </a:r>
                     </a:p>
                   </a:txBody>
@@ -18723,7 +18821,7 @@
                         </a:defRPr>
                       </a:pPr>
                       <a:r>
-                        <a:t>區分主要目標、次要目標（武器）、底線條件</a:t>
+                        <a:t>窮盡列出合約所有可談條件，標註主要/次要/底線</a:t>
                       </a:r>
                     </a:p>
                   </a:txBody>
@@ -18747,7 +18845,7 @@
                         </a:defRPr>
                       </a:pPr>
                       <a:r>
-                        <a:t>主要：租≤3000付三押一；次要：免租期；底線：聚會</a:t>
+                        <a:t>商鋪租賃列 20 項清單；新創招募盤點期權與職位</a:t>
                       </a:r>
                     </a:p>
                   </a:txBody>
@@ -18771,7 +18869,7 @@
                         </a:defRPr>
                       </a:pPr>
                       <a:r>
-                        <a:t>將 EPC 標準合約所有可談條款列清單並標註三級</a:t>
+                        <a:t>將標準商務合約拆解為 15～20 項條款完成三級標註</a:t>
                       </a:r>
                     </a:p>
                   </a:txBody>
@@ -18797,7 +18895,7 @@
                         </a:defRPr>
                       </a:pPr>
                       <a:r>
-                        <a:t>需求確認類問題</a:t>
+                        <a:t>2. 需求確認排序題</a:t>
                       </a:r>
                     </a:p>
                   </a:txBody>
@@ -18821,7 +18919,7 @@
                         </a:defRPr>
                       </a:pPr>
                       <a:r>
-                        <a:t>請對方將多項要素排序，確認價值優先級</a:t>
+                        <a:t>請對方針對多項條件進行優先順序排列</a:t>
                       </a:r>
                     </a:p>
                   </a:txBody>
@@ -18845,7 +18943,7 @@
                         </a:defRPr>
                       </a:pPr>
                       <a:r>
-                        <a:t>請面試者排序：薪資、發展、職位、行業、地點</a:t>
+                        <a:t>請候選人對「薪資、發展、職位、地點」排序</a:t>
                       </a:r>
                     </a:p>
                   </a:txBody>
@@ -18869,7 +18967,7 @@
                         </a:defRPr>
                       </a:pPr>
                       <a:r>
-                        <a:t>請業主排序：總價、併網工期、設備規格、付款期</a:t>
+                        <a:t>請客戶或供應商對「總價、交期、帳期、保固」排序</a:t>
                       </a:r>
                     </a:p>
                   </a:txBody>
@@ -18895,7 +18993,7 @@
                         </a:defRPr>
                       </a:pPr>
                       <a:r>
-                        <a:t>假設性問題</a:t>
+                        <a:t>3. 假設性二選一題</a:t>
                       </a:r>
                     </a:p>
                   </a:txBody>
@@ -18919,7 +19017,7 @@
                         </a:defRPr>
                       </a:pPr>
                       <a:r>
-                        <a:t>給出兩個具體條件組合讓對方二選一</a:t>
+                        <a:t>提供兩組具取捨關係之方案組合測試真實偏好</a:t>
                       </a:r>
                     </a:p>
                   </a:txBody>
@@ -18943,7 +19041,7 @@
                         </a:defRPr>
                       </a:pPr>
                       <a:r>
-                        <a:t>「低工資＋高期權」vs「高工資＋無期權」選哪個？</a:t>
+                        <a:t>「低薪資＋高期權」與「高薪資＋無期權」二選一</a:t>
                       </a:r>
                     </a:p>
                   </a:txBody>
@@ -18967,7 +19065,7 @@
                         </a:defRPr>
                       </a:pPr>
                       <a:r>
-                        <a:t>預備 2 題假設題（例：價格不動調付款期程選哪個）</a:t>
+                        <a:t>預備 2 道假設題(例：總價不變延尾款 vs 降2%提預付)</a:t>
                       </a:r>
                     </a:p>
                   </a:txBody>
@@ -19013,7 +19111,7 @@
               </a:defRPr>
             </a:pPr>
             <a:r>
-              <a:t>大衛雲 2.0 談判協商知識庫 (A2.6.4) ｜ COURSE #001 湯君健《有效提升你的談判能力》 ｜ McKinsey Executive Briefing • Slide 8 of 16</a:t>
+              <a:t>商務談判協商知識庫 ｜ COURSE #001 湯君健《有效提升你的談判能力》 ｜ McKinsey Executive Briefing Standard • Slide 8 of 16</a:t>
             </a:r>
           </a:p>
         </p:txBody>
@@ -19196,7 +19294,7 @@
               </a:defRPr>
             </a:pPr>
             <a:r>
-              <a:t>SLIDE 09 / 16 ｜ 第 3 講（下）最佳可替代方案與條件讓步三原則 (#004)</a:t>
+              <a:t>SLIDE 09 / 16 ｜ LEVEL 2 進階實戰 ｜ 第 3 講（下）最佳可替代方案與條件交換</a:t>
             </a:r>
           </a:p>
           <a:p>
@@ -19209,7 +19307,7 @@
               </a:defRPr>
             </a:pPr>
             <a:r>
-              <a:t>第 3 講（下）用己方低成本條件換對方高收益條件：尋找優於談崩的最佳可替代方案，並嚴守「雙方同時讓步」之條件交換原則</a:t>
+              <a:t>第 3 講（下）以己方低成本條件換取對方高價值讓步：尋找優於談崩的最佳可替代方案，並嚴守「條件換條件」原則</a:t>
             </a:r>
           </a:p>
         </p:txBody>
@@ -19290,7 +19388,7 @@
               </a:defRPr>
             </a:pPr>
             <a:r>
-              <a:t>▪ 尋找可替代方案（挖掘名貴桌子背後的顧慮）</a:t>
+              <a:t>▪ 顧慮替換法：深挖苛刻條件背後的「名貴木桌」</a:t>
             </a:r>
           </a:p>
           <a:p>
@@ -19303,7 +19401,7 @@
               </a:defRPr>
             </a:pPr>
             <a:r>
-              <a:t>房東要求一次付一年租金，溝通發現是怕弄壞屋內收藏的【名貴桌子】→ 替代方案：請他把桌子搬走，或維持季付但多放押金。隱藏替代方案是談崩，找不到優於談崩的方案則離桌無遺憾。</a:t>
+              <a:t>房東堅持一次付清一年租金，深挖發現是怕損壞屋內收藏的【名貴木桌】→ 替代方案：請房東搬走木桌，或維持季付但適度加押金。隱藏替代方案為談崩退路(BATNA)。</a:t>
             </a:r>
           </a:p>
         </p:txBody>
@@ -19384,7 +19482,7 @@
               </a:defRPr>
             </a:pPr>
             <a:r>
-              <a:t>▪ 最佳可替代方案（不等價互利交換）</a:t>
+              <a:t>▪ 最佳可替代方案（不等價互利置換）</a:t>
             </a:r>
           </a:p>
           <a:p>
@@ -19397,7 +19495,7 @@
               </a:defRPr>
             </a:pPr>
             <a:r>
-              <a:t>用我方【成本最低、收益最高】的A條件，去換對方【成本最低、收益最高】的B條件（如分橘子皮肉分開）。即便找到可接受方案，仍可繼續爭取更好方案，不要怕提要求。</a:t>
+              <a:t>以我方【低成本、高收益】之 A 條件，置換對方【低成本、高收益】之 B 條件。即使已找到可接受方案，仍可持續探索更優的互利組合。</a:t>
             </a:r>
           </a:p>
         </p:txBody>
@@ -19478,7 +19576,7 @@
               </a:defRPr>
             </a:pPr>
             <a:r>
-              <a:t>▪ 條件談判讓步三原則（含新空調緩衝地帶）</a:t>
+              <a:t>▪ 條件讓步三原則（含「換新空調」防禦緩衝帶）</a:t>
             </a:r>
           </a:p>
           <a:p>
@@ -19491,7 +19589,7 @@
               </a:defRPr>
             </a:pPr>
             <a:r>
-              <a:t>① 讓步重點在次要目標（高手在低成本小事主動讓步以退為進）；② 做不情願的讓步者（打電話問領導/問太太）；③ 雙方一起讓＝條件換條件（答應付三押三，但要求換新空調作緩衝地帶）。</a:t>
+              <a:t>① 讓步聚焦於次要目標（低成本小事可主動讓步以退為進）；② 扮演不情願讓步者（需請示主管/合夥人）；③ 雙方同步讓步＝條件換條件（答應押三但要求換新空調作緩衝帶）。</a:t>
             </a:r>
           </a:p>
         </p:txBody>
@@ -19535,7 +19633,7 @@
                         </a:defRPr>
                       </a:pPr>
                       <a:r>
-                        <a:t>條件讓步三原則</a:t>
+                        <a:t>條件交換戰術</a:t>
                       </a:r>
                     </a:p>
                   </a:txBody>
@@ -19559,7 +19657,7 @@
                         </a:defRPr>
                       </a:pPr>
                       <a:r>
-                        <a:t>操作心法</a:t>
+                        <a:t>核心邏輯與防禦機制</a:t>
                       </a:r>
                     </a:p>
                   </a:txBody>
@@ -19583,7 +19681,7 @@
                         </a:defRPr>
                       </a:pPr>
                       <a:r>
-                        <a:t>原文實戰案例與話術</a:t>
+                        <a:t>經典案例與標準話術</a:t>
                       </a:r>
                     </a:p>
                   </a:txBody>
@@ -19607,7 +19705,7 @@
                         </a:defRPr>
                       </a:pPr>
                       <a:r>
-                        <a:t>顧問術語校準與 EPC 應用 (#004)</a:t>
+                        <a:t>進階商務合約落地應用</a:t>
                       </a:r>
                     </a:p>
                   </a:txBody>
@@ -19633,7 +19731,7 @@
                         </a:defRPr>
                       </a:pPr>
                       <a:r>
-                        <a:t>1. 讓在次要目標</a:t>
+                        <a:t>1. 顧慮替換法</a:t>
                       </a:r>
                     </a:p>
                   </a:txBody>
@@ -19657,7 +19755,7 @@
                         </a:defRPr>
                       </a:pPr>
                       <a:r>
-                        <a:t>犧牲次要目標保護主要目標；低成本小事主動讓</a:t>
+                        <a:t>針對苛刻條款背後的風險擔憂提供低成本保障</a:t>
                       </a:r>
                     </a:p>
                   </a:txBody>
@@ -19681,7 +19779,7 @@
                         </a:defRPr>
                       </a:pPr>
                       <a:r>
-                        <a:t>免租期由7天讓到3天，保住月租3000與付三押一</a:t>
+                        <a:t>房東怕損壞名貴木桌要年付 → 請其搬走木桌維持季付</a:t>
                       </a:r>
                     </a:p>
                   </a:txBody>
@@ -19705,7 +19803,7 @@
                         </a:defRPr>
                       </a:pPr>
                       <a:r>
-                        <a:t>配合業主周報與現場標示，換取核心付款里程碑不變</a:t>
+                        <a:t>客戶要求高履約保證金 → 改提供每週進度稽核與里程碑驗收</a:t>
                       </a:r>
                     </a:p>
                   </a:txBody>
@@ -19731,7 +19829,7 @@
                         </a:defRPr>
                       </a:pPr>
                       <a:r>
-                        <a:t>2. 不情願讓步者</a:t>
+                        <a:t>2. 以退為進讓步</a:t>
                       </a:r>
                     </a:p>
                   </a:txBody>
@@ -19755,7 +19853,7 @@
                         </a:defRPr>
                       </a:pPr>
                       <a:r>
-                        <a:t>訴諸更高權威，絕不爽快答應</a:t>
+                        <a:t>在己方低成本次要條款主動示好，換核心利益</a:t>
                       </a:r>
                     </a:p>
                   </a:txBody>
@@ -19779,7 +19877,7 @@
                         </a:defRPr>
                       </a:pPr>
                       <a:r>
-                        <a:t>「我要打電話和領導商量／等我太太決定明天告訴你」</a:t>
+                        <a:t>主動配合非核心行政條款，鎖定核心租金與帳期</a:t>
                       </a:r>
                     </a:p>
                   </a:txBody>
@@ -19803,7 +19901,7 @@
                         </a:defRPr>
                       </a:pPr>
                       <a:r>
-                        <a:t>「這條超出專案經理權限，須報請投審會核准」</a:t>
+                        <a:t>主動提供免費操作培訓，換取標準付款帳期不延長</a:t>
                       </a:r>
                     </a:p>
                   </a:txBody>
@@ -19829,7 +19927,7 @@
                         </a:defRPr>
                       </a:pPr>
                       <a:r>
-                        <a:t>3. 雙方同時讓步</a:t>
+                        <a:t>3. 緩衝地帶反制</a:t>
                       </a:r>
                     </a:p>
                   </a:txBody>
@@ -19853,7 +19951,7 @@
                         </a:defRPr>
                       </a:pPr>
                       <a:r>
-                        <a:t>條件換條件，掛鉤新條件作為防加碼緩衝帶</a:t>
+                        <a:t>被迫讓步時同步捆綁新條件，阻止對方加碼</a:t>
                       </a:r>
                     </a:p>
                   </a:txBody>
@@ -19877,7 +19975,7 @@
                         </a:defRPr>
                       </a:pPr>
                       <a:r>
-                        <a:t>「付三押三可以，但房間空調太舊了希望換一台」</a:t>
+                        <a:t>「付三押三可以，但請幫我們更換一台新空調」</a:t>
                       </a:r>
                     </a:p>
                   </a:txBody>
@@ -19901,7 +19999,7 @@
                         </a:defRPr>
                       </a:pPr>
                       <a:r>
-                        <a:t>註：本講最佳替代方案指互利組合；BATNA指談崩退路</a:t>
+                        <a:t>「單價再降 2% 可以，但預付款比例須提高至 30%」</a:t>
                       </a:r>
                     </a:p>
                   </a:txBody>
@@ -19947,7 +20045,7 @@
               </a:defRPr>
             </a:pPr>
             <a:r>
-              <a:t>大衛雲 2.0 談判協商知識庫 (A2.6.4) ｜ COURSE #001 湯君健《有效提升你的談判能力》 ｜ McKinsey Executive Briefing • Slide 9 of 16</a:t>
+              <a:t>商務談判協商知識庫 ｜ COURSE #001 湯君健《有效提升你的談判能力》 ｜ McKinsey Executive Briefing Standard • Slide 9 of 16</a:t>
             </a:r>
           </a:p>
         </p:txBody>
